--- a/Democracy_Race_Pitch.pptx
+++ b/Democracy_Race_Pitch.pptx
@@ -4,21 +4,21 @@
   <p:sldMasterIdLst>
     <p:sldMasterId id="2147483648" r:id="rId1"/>
   </p:sldMasterIdLst>
+  <p:notesMasterIdLst>
+    <p:notesMasterId r:id="rId10"/>
+  </p:notesMasterIdLst>
   <p:sldIdLst>
     <p:sldId id="256" r:id="rId2"/>
     <p:sldId id="257" r:id="rId3"/>
     <p:sldId id="258" r:id="rId4"/>
     <p:sldId id="259" r:id="rId5"/>
-    <p:sldId id="260" r:id="rId6"/>
-    <p:sldId id="261" r:id="rId7"/>
-    <p:sldId id="262" r:id="rId8"/>
-    <p:sldId id="263" r:id="rId9"/>
+    <p:sldId id="263" r:id="rId6"/>
+    <p:sldId id="260" r:id="rId7"/>
+    <p:sldId id="261" r:id="rId8"/>
+    <p:sldId id="262" r:id="rId9"/>
   </p:sldIdLst>
-  <p:notesMasterIdLst>
-    <p:notesMasterId r:id="rId10"/>
-  </p:notesMasterIdLst>
-  <p:sldSz cx="12161520" cy="6858000"/>
-  <p:notesSz cx="6858000" cy="12161520"/>
+  <p:sldSz cx="12161838" cy="6858000"/>
+  <p:notesSz cx="6858000" cy="12161838"/>
   <p:defaultTextStyle>
     <a:lvl1pPr marL="0" algn="l" defTabSz="914400" rtl="0" eaLnBrk="1" latinLnBrk="0" hangingPunct="1">
       <a:defRPr sz="1800" kern="1200">
@@ -111,6 +111,11 @@
       </a:defRPr>
     </a:lvl9pPr>
   </p:defaultTextStyle>
+  <p:extLst>
+    <p:ext uri="{EFAFB233-063F-42B5-8137-9DF3F51BA10A}">
+      <p15:sldGuideLst xmlns:p15="http://schemas.microsoft.com/office/powerpoint/2012/main"/>
+    </p:ext>
+  </p:extLst>
 </p:presentation>
 </file>
 
@@ -136,234 +141,10 @@
           <a:chExt cx="0" cy="0"/>
         </a:xfrm>
       </p:grpSpPr>
-      <p:sp>
-        <p:nvSpPr>
-          <p:cNvPr id="2" name="Header Placeholder 1"/>
-          <p:cNvSpPr>
-            <a:spLocks noGrp="1"/>
-          </p:cNvSpPr>
-          <p:nvPr>
-            <p:ph type="hdr" sz="quarter"/>
-          </p:nvPr>
-        </p:nvSpPr>
-        <p:spPr>
-          <a:xfrm>
-            <a:off x="0" y="0"/>
-            <a:ext cx="2971800" cy="458788"/>
-          </a:xfrm>
-          <a:prstGeom prst="rect">
-            <a:avLst/>
-          </a:prstGeom>
-        </p:spPr>
-        <p:txBody>
-          <a:bodyPr vert="horz" lIns="91440" tIns="45720" rIns="91440" bIns="45720" rtlCol="0"/>
-          <a:lstStyle>
-            <a:lvl1pPr algn="l">
-              <a:defRPr sz="1200"/>
-            </a:lvl1pPr>
-          </a:lstStyle>
-          <a:p>
-            <a:endParaRPr lang="en-US"/>
-          </a:p>
-        </p:txBody>
-      </p:sp>
-      <p:sp>
-        <p:nvSpPr>
-          <p:cNvPr id="3" name="Date Placeholder 2"/>
-          <p:cNvSpPr>
-            <a:spLocks noGrp="1"/>
-          </p:cNvSpPr>
-          <p:nvPr>
-            <p:ph type="dt" idx="1"/>
-          </p:nvPr>
-        </p:nvSpPr>
-        <p:spPr>
-          <a:xfrm>
-            <a:off x="3884613" y="0"/>
-            <a:ext cx="2971800" cy="458788"/>
-          </a:xfrm>
-          <a:prstGeom prst="rect">
-            <a:avLst/>
-          </a:prstGeom>
-        </p:spPr>
-        <p:txBody>
-          <a:bodyPr vert="horz" lIns="91440" tIns="45720" rIns="91440" bIns="45720" rtlCol="0"/>
-          <a:lstStyle>
-            <a:lvl1pPr algn="r">
-              <a:defRPr sz="1200"/>
-            </a:lvl1pPr>
-          </a:lstStyle>
-          <a:p>
-            <a:fld id="{5282F153-3F37-0F45-9E97-73ACFA13230C}" type="datetimeFigureOut">
-              <a:rPr lang="en-US"/>
-              <a:t>7/23/19</a:t>
-            </a:fld>
-            <a:endParaRPr lang="en-US"/>
-          </a:p>
-        </p:txBody>
-      </p:sp>
-      <p:sp>
-        <p:nvSpPr>
-          <p:cNvPr id="4" name="Slide Image Placeholder 3"/>
-          <p:cNvSpPr>
-            <a:spLocks noGrp="1" noRot="1" noChangeAspect="1"/>
-          </p:cNvSpPr>
-          <p:nvPr>
-            <p:ph type="sldImg" idx="2"/>
-          </p:nvPr>
-        </p:nvSpPr>
-        <p:spPr>
-          <a:xfrm>
-            <a:off x="685800" y="1143000"/>
-            <a:ext cx="5486400" cy="3086100"/>
-          </a:xfrm>
-          <a:prstGeom prst="rect">
-            <a:avLst/>
-          </a:prstGeom>
-          <a:noFill/>
-          <a:ln w="12700">
-            <a:solidFill>
-              <a:prstClr val="black"/>
-            </a:solidFill>
-          </a:ln>
-        </p:spPr>
-        <p:txBody>
-          <a:bodyPr vert="horz" lIns="91440" tIns="45720" rIns="91440" bIns="45720" rtlCol="0" anchor="ctr"/>
-          <a:lstStyle/>
-          <a:p>
-            <a:endParaRPr lang="en-US"/>
-          </a:p>
-        </p:txBody>
-      </p:sp>
-      <p:sp>
-        <p:nvSpPr>
-          <p:cNvPr id="5" name="Notes Placeholder 4"/>
-          <p:cNvSpPr>
-            <a:spLocks noGrp="1"/>
-          </p:cNvSpPr>
-          <p:nvPr>
-            <p:ph type="body" sz="quarter" idx="3"/>
-          </p:nvPr>
-        </p:nvSpPr>
-        <p:spPr>
-          <a:xfrm>
-            <a:off x="685800" y="4400550"/>
-            <a:ext cx="5486400" cy="3600450"/>
-          </a:xfrm>
-          <a:prstGeom prst="rect">
-            <a:avLst/>
-          </a:prstGeom>
-        </p:spPr>
-        <p:txBody>
-          <a:bodyPr vert="horz" lIns="91440" tIns="45720" rIns="91440" bIns="45720" rtlCol="0"/>
-          <a:lstStyle/>
-          <a:p>
-            <a:pPr lvl="0"/>
-            <a:r>
-              <a:rPr lang="en-US"/>
-              <a:t>Click to edit Master text styles</a:t>
-            </a:r>
-          </a:p>
-          <a:p>
-            <a:pPr lvl="1"/>
-            <a:r>
-              <a:rPr lang="en-US"/>
-              <a:t>Second level</a:t>
-            </a:r>
-          </a:p>
-          <a:p>
-            <a:pPr lvl="2"/>
-            <a:r>
-              <a:rPr lang="en-US"/>
-              <a:t>Third level</a:t>
-            </a:r>
-          </a:p>
-          <a:p>
-            <a:pPr lvl="3"/>
-            <a:r>
-              <a:rPr lang="en-US"/>
-              <a:t>Fourth level</a:t>
-            </a:r>
-          </a:p>
-          <a:p>
-            <a:pPr lvl="4"/>
-            <a:r>
-              <a:rPr lang="en-US"/>
-              <a:t>Fifth level</a:t>
-            </a:r>
-          </a:p>
-        </p:txBody>
-      </p:sp>
-      <p:sp>
-        <p:nvSpPr>
-          <p:cNvPr id="6" name="Footer Placeholder 5"/>
-          <p:cNvSpPr>
-            <a:spLocks noGrp="1"/>
-          </p:cNvSpPr>
-          <p:nvPr>
-            <p:ph type="ftr" sz="quarter" idx="4"/>
-          </p:nvPr>
-        </p:nvSpPr>
-        <p:spPr>
-          <a:xfrm>
-            <a:off x="0" y="8685213"/>
-            <a:ext cx="2971800" cy="458787"/>
-          </a:xfrm>
-          <a:prstGeom prst="rect">
-            <a:avLst/>
-          </a:prstGeom>
-        </p:spPr>
-        <p:txBody>
-          <a:bodyPr vert="horz" lIns="91440" tIns="45720" rIns="91440" bIns="45720" rtlCol="0" anchor="b"/>
-          <a:lstStyle>
-            <a:lvl1pPr algn="l">
-              <a:defRPr sz="1200"/>
-            </a:lvl1pPr>
-          </a:lstStyle>
-          <a:p>
-            <a:endParaRPr lang="en-US"/>
-          </a:p>
-        </p:txBody>
-      </p:sp>
-      <p:sp>
-        <p:nvSpPr>
-          <p:cNvPr id="7" name="Slide Number Placeholder 6"/>
-          <p:cNvSpPr>
-            <a:spLocks noGrp="1"/>
-          </p:cNvSpPr>
-          <p:nvPr>
-            <p:ph type="sldNum" sz="quarter" idx="5"/>
-          </p:nvPr>
-        </p:nvSpPr>
-        <p:spPr>
-          <a:xfrm>
-            <a:off x="3884613" y="8685213"/>
-            <a:ext cx="2971800" cy="458787"/>
-          </a:xfrm>
-          <a:prstGeom prst="rect">
-            <a:avLst/>
-          </a:prstGeom>
-        </p:spPr>
-        <p:txBody>
-          <a:bodyPr vert="horz" lIns="91440" tIns="45720" rIns="91440" bIns="45720" rtlCol="0" anchor="b"/>
-          <a:lstStyle>
-            <a:lvl1pPr algn="r">
-              <a:defRPr sz="1200"/>
-            </a:lvl1pPr>
-          </a:lstStyle>
-          <a:p>
-            <a:fld id="{CE5E9CC1-C706-0F49-92D6-E571CC5EEA8F}" type="slidenum">
-              <a:rPr lang="en-US"/>
-              <a:t>‹#›</a:t>
-            </a:fld>
-            <a:endParaRPr lang="en-US"/>
-          </a:p>
-        </p:txBody>
-      </p:sp>
     </p:spTree>
     <p:extLst>
       <p:ext uri="{BB962C8B-B14F-4D97-AF65-F5344CB8AC3E}">
-        <p14:creationId xmlns:p14="http://schemas.microsoft.com/office/powerpoint/2010/main" val="1024086991"/>
+        <p14:creationId xmlns:p14="http://schemas.microsoft.com/office/powerpoint/2010/main" val="3015148863"/>
       </p:ext>
     </p:extLst>
   </p:cSld>
@@ -507,10 +288,6 @@
           <a:bodyPr/>
           <a:lstStyle/>
           <a:p>
-            <a:r>
-              <a:rPr lang="en-US" dirty="0"/>
-              <a:t/>
-            </a:r>
             <a:endParaRPr lang="en-US" dirty="0"/>
           </a:p>
         </p:txBody>
@@ -595,10 +372,6 @@
           <a:bodyPr/>
           <a:lstStyle/>
           <a:p>
-            <a:r>
-              <a:rPr lang="en-US" dirty="0"/>
-              <a:t/>
-            </a:r>
             <a:endParaRPr lang="en-US" dirty="0"/>
           </a:p>
         </p:txBody>
@@ -683,10 +456,6 @@
           <a:bodyPr/>
           <a:lstStyle/>
           <a:p>
-            <a:r>
-              <a:rPr lang="en-US" dirty="0"/>
-              <a:t/>
-            </a:r>
             <a:endParaRPr lang="en-US" dirty="0"/>
           </a:p>
         </p:txBody>
@@ -771,10 +540,6 @@
           <a:bodyPr/>
           <a:lstStyle/>
           <a:p>
-            <a:r>
-              <a:rPr lang="en-US" dirty="0"/>
-              <a:t/>
-            </a:r>
             <a:endParaRPr lang="en-US" dirty="0"/>
           </a:p>
         </p:txBody>
@@ -820,7 +585,13 @@
   <p:cSld>
     <p:spTree>
       <p:nvGrpSpPr>
-        <p:cNvPr id="1" name=""/>
+        <p:cNvPr id="1" name="">
+          <a:extLst>
+            <a:ext uri="{FF2B5EF4-FFF2-40B4-BE49-F238E27FC236}">
+              <a16:creationId xmlns:a16="http://schemas.microsoft.com/office/drawing/2014/main" id="{CBE06D20-01DF-B781-D2C7-9F75707ED737}"/>
+            </a:ext>
+          </a:extLst>
+        </p:cNvPr>
         <p:cNvGrpSpPr/>
         <p:nvPr/>
       </p:nvGrpSpPr>
@@ -834,7 +605,13 @@
       </p:grpSpPr>
       <p:sp>
         <p:nvSpPr>
-          <p:cNvPr id="2" name="Slide Image Placeholder 1"/>
+          <p:cNvPr id="2" name="Slide Image Placeholder 1">
+            <a:extLst>
+              <a:ext uri="{FF2B5EF4-FFF2-40B4-BE49-F238E27FC236}">
+                <a16:creationId xmlns:a16="http://schemas.microsoft.com/office/drawing/2014/main" id="{0C72CC69-0371-2581-C009-5D909C5B368E}"/>
+              </a:ext>
+            </a:extLst>
+          </p:cNvPr>
           <p:cNvSpPr>
             <a:spLocks noGrp="1" noRot="1" noChangeAspect="1"/>
           </p:cNvSpPr>
@@ -846,7 +623,13 @@
       </p:sp>
       <p:sp>
         <p:nvSpPr>
-          <p:cNvPr id="3" name="Notes Placeholder 2"/>
+          <p:cNvPr id="3" name="Notes Placeholder 2">
+            <a:extLst>
+              <a:ext uri="{FF2B5EF4-FFF2-40B4-BE49-F238E27FC236}">
+                <a16:creationId xmlns:a16="http://schemas.microsoft.com/office/drawing/2014/main" id="{204E4CE5-EA0F-77A7-2339-DF26E09DA273}"/>
+              </a:ext>
+            </a:extLst>
+          </p:cNvPr>
           <p:cNvSpPr>
             <a:spLocks noGrp="1"/>
           </p:cNvSpPr>
@@ -859,17 +642,19 @@
           <a:bodyPr/>
           <a:lstStyle/>
           <a:p>
-            <a:r>
-              <a:rPr lang="en-US" dirty="0"/>
-              <a:t/>
-            </a:r>
             <a:endParaRPr lang="en-US" dirty="0"/>
           </a:p>
         </p:txBody>
       </p:sp>
       <p:sp>
         <p:nvSpPr>
-          <p:cNvPr id="4" name="Slide Number Placeholder 3"/>
+          <p:cNvPr id="4" name="Slide Number Placeholder 3">
+            <a:extLst>
+              <a:ext uri="{FF2B5EF4-FFF2-40B4-BE49-F238E27FC236}">
+                <a16:creationId xmlns:a16="http://schemas.microsoft.com/office/drawing/2014/main" id="{255EF72A-91B6-BB59-8FCD-9C12B5F69DA3}"/>
+              </a:ext>
+            </a:extLst>
+          </p:cNvPr>
           <p:cNvSpPr>
             <a:spLocks noGrp="1"/>
           </p:cNvSpPr>
@@ -893,7 +678,7 @@
     </p:spTree>
     <p:extLst>
       <p:ext uri="{BB962C8B-B14F-4D97-AF65-F5344CB8AC3E}">
-        <p14:creationId xmlns:p14="http://schemas.microsoft.com/office/powerpoint/2010/main" val="1024086991"/>
+        <p14:creationId xmlns:p14="http://schemas.microsoft.com/office/powerpoint/2010/main" val="3710781766"/>
       </p:ext>
     </p:extLst>
   </p:cSld>
@@ -947,10 +732,6 @@
           <a:bodyPr/>
           <a:lstStyle/>
           <a:p>
-            <a:r>
-              <a:rPr lang="en-US" dirty="0"/>
-              <a:t/>
-            </a:r>
             <a:endParaRPr lang="en-US" dirty="0"/>
           </a:p>
         </p:txBody>
@@ -1035,10 +816,6 @@
           <a:bodyPr/>
           <a:lstStyle/>
           <a:p>
-            <a:r>
-              <a:rPr lang="en-US" dirty="0"/>
-              <a:t/>
-            </a:r>
             <a:endParaRPr lang="en-US" dirty="0"/>
           </a:p>
         </p:txBody>
@@ -1123,10 +900,6 @@
           <a:bodyPr/>
           <a:lstStyle/>
           <a:p>
-            <a:r>
-              <a:rPr lang="en-US" dirty="0"/>
-              <a:t/>
-            </a:r>
             <a:endParaRPr lang="en-US" dirty="0"/>
           </a:p>
         </p:txBody>
@@ -1200,6 +973,11 @@
 <file path=ppt/slideMasters/slideMaster1.xml><?xml version="1.0" encoding="utf-8"?>
 <p:sldMaster xmlns:a="http://schemas.openxmlformats.org/drawingml/2006/main" xmlns:r="http://schemas.openxmlformats.org/officeDocument/2006/relationships" xmlns:p="http://schemas.openxmlformats.org/presentationml/2006/main">
   <p:cSld>
+    <p:bg>
+      <p:bgRef idx="1001">
+        <a:schemeClr val="bg1"/>
+      </p:bgRef>
+    </p:bg>
     <p:spTree>
       <p:nvGrpSpPr>
         <p:cNvPr id="1" name=""/>
@@ -1482,6 +1260,7 @@
         <a:solidFill>
           <a:srgbClr val="0F172A"/>
         </a:solidFill>
+        <a:effectLst/>
       </p:bgPr>
     </p:bg>
     <p:spTree>
@@ -1500,60 +1279,6 @@
       </p:grpSpPr>
       <p:sp>
         <p:nvSpPr>
-          <p:cNvPr id="2" name="Shape 0"/>
-          <p:cNvSpPr/>
-          <p:nvPr/>
-        </p:nvSpPr>
-        <p:spPr>
-          <a:xfrm>
-            <a:off x="10698480" y="548640"/>
-            <a:ext cx="502920" cy="502920"/>
-          </a:xfrm>
-          <a:prstGeom prst="roundRect">
-            <a:avLst>
-              <a:gd name="adj" fmla="val 14545"/>
-            </a:avLst>
-          </a:prstGeom>
-          <a:solidFill>
-            <a:srgbClr val="2563EB"/>
-          </a:solidFill>
-          <a:ln w="25400">
-            <a:solidFill>
-              <a:srgbClr val="FFFFFF"/>
-            </a:solidFill>
-            <a:prstDash val="solid"/>
-          </a:ln>
-        </p:spPr>
-      </p:sp>
-      <p:sp>
-        <p:nvSpPr>
-          <p:cNvPr id="3" name="Shape 1"/>
-          <p:cNvSpPr/>
-          <p:nvPr/>
-        </p:nvSpPr>
-        <p:spPr>
-          <a:xfrm>
-            <a:off x="11292840" y="548640"/>
-            <a:ext cx="502920" cy="502920"/>
-          </a:xfrm>
-          <a:prstGeom prst="roundRect">
-            <a:avLst>
-              <a:gd name="adj" fmla="val 14545"/>
-            </a:avLst>
-          </a:prstGeom>
-          <a:solidFill>
-            <a:srgbClr val="E30613"/>
-          </a:solidFill>
-          <a:ln w="25400">
-            <a:solidFill>
-              <a:srgbClr val="FFFFFF"/>
-            </a:solidFill>
-            <a:prstDash val="solid"/>
-          </a:ln>
-        </p:spPr>
-      </p:sp>
-      <p:sp>
-        <p:nvSpPr>
           <p:cNvPr id="4" name="Shape 2"/>
           <p:cNvSpPr/>
           <p:nvPr/>
@@ -1578,13 +1303,20 @@
             <a:prstDash val="solid"/>
           </a:ln>
           <a:effectLst>
-            <a:outerShdw sx="100000" sy="100000" kx="0" ky="0" algn="bl" rotWithShape="0" blurRad="101600" dist="50800" dir="8100000">
-              <a:srgbClr val="0f172a">
+            <a:outerShdw blurRad="101600" dist="50800" dir="8100000" algn="bl" rotWithShape="0">
+              <a:srgbClr val="0F172A">
                 <a:alpha val="100000"/>
               </a:srgbClr>
             </a:outerShdw>
           </a:effectLst>
         </p:spPr>
+        <p:txBody>
+          <a:bodyPr/>
+          <a:lstStyle/>
+          <a:p>
+            <a:endParaRPr lang="de-CH"/>
+          </a:p>
+        </p:txBody>
       </p:sp>
       <p:sp>
         <p:nvSpPr>
@@ -1607,11 +1339,11 @@
           <a:bodyPr wrap="square" lIns="0" tIns="0" rIns="0" bIns="0" rtlCol="0" anchor="ctr"/>
           <a:lstStyle/>
           <a:p>
-            <a:pPr algn="ctr" indent="0" marL="0">
+            <a:pPr marL="0" indent="0" algn="ctr">
               <a:buNone/>
             </a:pPr>
             <a:r>
-              <a:rPr lang="en-US" sz="1100" b="1" spc="150" kern="0" dirty="0">
+              <a:rPr lang="en-US" sz="1100" b="1" kern="0" spc="150" dirty="0">
                 <a:solidFill>
                   <a:srgbClr val="FFFFFF"/>
                 </a:solidFill>
@@ -1646,11 +1378,11 @@
           <a:bodyPr wrap="square" lIns="0" tIns="0" rIns="0" bIns="0" rtlCol="0" anchor="ctr"/>
           <a:lstStyle/>
           <a:p>
-            <a:pPr algn="l" indent="0" marL="0">
+            <a:pPr marL="0" indent="0" algn="l">
               <a:buNone/>
             </a:pPr>
             <a:r>
-              <a:rPr lang="en-US" sz="8800" b="1" spc="-100" kern="0" dirty="0">
+              <a:rPr lang="en-US" sz="8800" b="1" kern="0" spc="-100" dirty="0" err="1">
                 <a:solidFill>
                   <a:srgbClr val="FFFFFF"/>
                 </a:solidFill>
@@ -1658,21 +1390,7 @@
                 <a:ea typeface="Plus Jakarta Sans" pitchFamily="34" charset="-122"/>
                 <a:cs typeface="Plus Jakarta Sans" pitchFamily="34" charset="-120"/>
               </a:rPr>
-              <a:t>Democracy</a:t>
-            </a:r>
-            <a:pPr algn="l" indent="0" marL="0">
-              <a:buNone/>
-            </a:pPr>
-            <a:r>
-              <a:rPr lang="en-US" sz="8800" b="1" spc="-100" kern="0" dirty="0">
-                <a:solidFill>
-                  <a:srgbClr val="E30613"/>
-                </a:solidFill>
-                <a:latin typeface="Plus Jakarta Sans" pitchFamily="34" charset="0"/>
-                <a:ea typeface="Plus Jakarta Sans" pitchFamily="34" charset="-122"/>
-                <a:cs typeface="Plus Jakarta Sans" pitchFamily="34" charset="-120"/>
-              </a:rPr>
-              <a:t> Race</a:t>
+              <a:t>Demokratieliga</a:t>
             </a:r>
             <a:endParaRPr lang="en-US" sz="8800" dirty="0"/>
           </a:p>
@@ -1699,13 +1417,23 @@
           <a:bodyPr wrap="square" lIns="0" tIns="0" rIns="0" bIns="0" rtlCol="0" anchor="ctr"/>
           <a:lstStyle/>
           <a:p>
-            <a:pPr indent="0" marL="0">
+            <a:pPr>
               <a:lnSpc>
                 <a:spcPct val="120000"/>
               </a:lnSpc>
-              <a:buNone/>
             </a:pPr>
             <a:r>
+              <a:rPr lang="en-US" sz="1900" dirty="0" err="1">
+                <a:solidFill>
+                  <a:srgbClr val="CBD5E1"/>
+                </a:solidFill>
+                <a:latin typeface="Plus Jakarta Sans" pitchFamily="34" charset="0"/>
+                <a:ea typeface="Plus Jakarta Sans" pitchFamily="34" charset="-122"/>
+                <a:cs typeface="Plus Jakarta Sans" pitchFamily="34" charset="-120"/>
+              </a:rPr>
+              <a:t>Meisterschaften</a:t>
+            </a:r>
+            <a:r>
               <a:rPr lang="en-US" sz="1900" dirty="0">
                 <a:solidFill>
                   <a:srgbClr val="CBD5E1"/>
@@ -1714,7 +1442,84 @@
                 <a:ea typeface="Plus Jakarta Sans" pitchFamily="34" charset="-122"/>
                 <a:cs typeface="Plus Jakarta Sans" pitchFamily="34" charset="-120"/>
               </a:rPr>
-              <a:t>Die Stimmbeteiligung der Schweizer Kantone seit 1848 — als sportlicher Wettbewerb erzählt.</a:t>
+              <a:t> der </a:t>
+            </a:r>
+            <a:r>
+              <a:rPr lang="en-US" sz="1900" dirty="0" err="1">
+                <a:solidFill>
+                  <a:srgbClr val="CBD5E1"/>
+                </a:solidFill>
+                <a:latin typeface="Plus Jakarta Sans" pitchFamily="34" charset="0"/>
+                <a:ea typeface="Plus Jakarta Sans" pitchFamily="34" charset="-122"/>
+                <a:cs typeface="Plus Jakarta Sans" pitchFamily="34" charset="-120"/>
+              </a:rPr>
+              <a:t>Stimmbeteiligung</a:t>
+            </a:r>
+            <a:r>
+              <a:rPr lang="en-US" sz="1900" dirty="0">
+                <a:solidFill>
+                  <a:srgbClr val="CBD5E1"/>
+                </a:solidFill>
+                <a:latin typeface="Plus Jakarta Sans" pitchFamily="34" charset="0"/>
+                <a:ea typeface="Plus Jakarta Sans" pitchFamily="34" charset="-122"/>
+                <a:cs typeface="Plus Jakarta Sans" pitchFamily="34" charset="-120"/>
+              </a:rPr>
+              <a:t>: die </a:t>
+            </a:r>
+            <a:r>
+              <a:rPr lang="en-US" sz="1900" dirty="0" err="1">
+                <a:solidFill>
+                  <a:srgbClr val="CBD5E1"/>
+                </a:solidFill>
+                <a:latin typeface="Plus Jakarta Sans" pitchFamily="34" charset="0"/>
+                <a:ea typeface="Plus Jakarta Sans" pitchFamily="34" charset="-122"/>
+                <a:cs typeface="Plus Jakarta Sans" pitchFamily="34" charset="-120"/>
+              </a:rPr>
+              <a:t>Kantone</a:t>
+            </a:r>
+            <a:r>
+              <a:rPr lang="en-US" sz="1900" dirty="0">
+                <a:solidFill>
+                  <a:srgbClr val="CBD5E1"/>
+                </a:solidFill>
+                <a:latin typeface="Plus Jakarta Sans" pitchFamily="34" charset="0"/>
+                <a:ea typeface="Plus Jakarta Sans" pitchFamily="34" charset="-122"/>
+                <a:cs typeface="Plus Jakarta Sans" pitchFamily="34" charset="-120"/>
+              </a:rPr>
+              <a:t> </a:t>
+            </a:r>
+            <a:r>
+              <a:rPr lang="en-US" sz="1900" dirty="0" err="1">
+                <a:solidFill>
+                  <a:srgbClr val="CBD5E1"/>
+                </a:solidFill>
+                <a:latin typeface="Plus Jakarta Sans" pitchFamily="34" charset="0"/>
+                <a:ea typeface="Plus Jakarta Sans" pitchFamily="34" charset="-122"/>
+                <a:cs typeface="Plus Jakarta Sans" pitchFamily="34" charset="-120"/>
+              </a:rPr>
+              <a:t>im</a:t>
+            </a:r>
+            <a:r>
+              <a:rPr lang="en-US" sz="1900" dirty="0">
+                <a:solidFill>
+                  <a:srgbClr val="CBD5E1"/>
+                </a:solidFill>
+                <a:latin typeface="Plus Jakarta Sans" pitchFamily="34" charset="0"/>
+                <a:ea typeface="Plus Jakarta Sans" pitchFamily="34" charset="-122"/>
+                <a:cs typeface="Plus Jakarta Sans" pitchFamily="34" charset="-120"/>
+              </a:rPr>
+              <a:t> </a:t>
+            </a:r>
+            <a:r>
+              <a:rPr lang="en-US" sz="1900" dirty="0" err="1">
+                <a:solidFill>
+                  <a:srgbClr val="CBD5E1"/>
+                </a:solidFill>
+                <a:latin typeface="Plus Jakarta Sans" pitchFamily="34" charset="0"/>
+                <a:ea typeface="Plus Jakarta Sans" pitchFamily="34" charset="-122"/>
+                <a:cs typeface="Plus Jakarta Sans" pitchFamily="34" charset="-120"/>
+              </a:rPr>
+              <a:t>Vergleich</a:t>
             </a:r>
             <a:endParaRPr lang="en-US" sz="1900" dirty="0"/>
           </a:p>
@@ -1746,13 +1551,20 @@
             <a:prstDash val="solid"/>
           </a:ln>
           <a:effectLst>
-            <a:outerShdw sx="100000" sy="100000" kx="0" ky="0" algn="bl" rotWithShape="0" blurRad="101600" dist="76200" dir="8100000">
-              <a:srgbClr val="0f172a">
+            <a:outerShdw blurRad="101600" dist="76200" dir="8100000" algn="bl" rotWithShape="0">
+              <a:srgbClr val="0F172A">
                 <a:alpha val="100000"/>
               </a:srgbClr>
             </a:outerShdw>
           </a:effectLst>
         </p:spPr>
+        <p:txBody>
+          <a:bodyPr/>
+          <a:lstStyle/>
+          <a:p>
+            <a:endParaRPr lang="de-CH"/>
+          </a:p>
+        </p:txBody>
       </p:sp>
       <p:sp>
         <p:nvSpPr>
@@ -1773,6 +1585,13 @@
           </a:solidFill>
           <a:ln/>
         </p:spPr>
+        <p:txBody>
+          <a:bodyPr/>
+          <a:lstStyle/>
+          <a:p>
+            <a:endParaRPr lang="de-CH"/>
+          </a:p>
+        </p:txBody>
       </p:sp>
       <p:sp>
         <p:nvSpPr>
@@ -1793,6 +1612,13 @@
           </a:solidFill>
           <a:ln/>
         </p:spPr>
+        <p:txBody>
+          <a:bodyPr/>
+          <a:lstStyle/>
+          <a:p>
+            <a:endParaRPr lang="de-CH"/>
+          </a:p>
+        </p:txBody>
       </p:sp>
       <p:sp>
         <p:nvSpPr>
@@ -1820,6 +1646,13 @@
             <a:prstDash val="solid"/>
           </a:ln>
         </p:spPr>
+        <p:txBody>
+          <a:bodyPr/>
+          <a:lstStyle/>
+          <a:p>
+            <a:endParaRPr lang="de-CH"/>
+          </a:p>
+        </p:txBody>
       </p:sp>
       <p:sp>
         <p:nvSpPr>
@@ -1842,7 +1675,7 @@
           <a:bodyPr wrap="square" lIns="0" tIns="0" rIns="0" bIns="0" rtlCol="0" anchor="ctr"/>
           <a:lstStyle/>
           <a:p>
-            <a:pPr algn="l" indent="0" marL="0">
+            <a:pPr marL="0" indent="0" algn="l">
               <a:buNone/>
             </a:pPr>
             <a:r>
@@ -1881,7 +1714,7 @@
           <a:bodyPr wrap="square" lIns="0" tIns="0" rIns="0" bIns="0" rtlCol="0" anchor="ctr"/>
           <a:lstStyle/>
           <a:p>
-            <a:pPr algn="l" indent="0" marL="0">
+            <a:pPr marL="0" indent="0" algn="l">
               <a:buNone/>
             </a:pPr>
             <a:r>
@@ -1925,6 +1758,13 @@
             <a:prstDash val="solid"/>
           </a:ln>
         </p:spPr>
+        <p:txBody>
+          <a:bodyPr/>
+          <a:lstStyle/>
+          <a:p>
+            <a:endParaRPr lang="de-CH"/>
+          </a:p>
+        </p:txBody>
       </p:sp>
       <p:sp>
         <p:nvSpPr>
@@ -1947,7 +1787,7 @@
           <a:bodyPr wrap="square" lIns="0" tIns="0" rIns="0" bIns="0" rtlCol="0" anchor="ctr"/>
           <a:lstStyle/>
           <a:p>
-            <a:pPr algn="l" indent="0" marL="0">
+            <a:pPr marL="0" indent="0" algn="l">
               <a:buNone/>
             </a:pPr>
             <a:r>
@@ -1986,7 +1826,7 @@
           <a:bodyPr wrap="square" lIns="0" tIns="0" rIns="0" bIns="0" rtlCol="0" anchor="ctr"/>
           <a:lstStyle/>
           <a:p>
-            <a:pPr algn="l" indent="0" marL="0">
+            <a:pPr marL="0" indent="0" algn="l">
               <a:buNone/>
             </a:pPr>
             <a:r>
@@ -2030,6 +1870,13 @@
             <a:prstDash val="solid"/>
           </a:ln>
         </p:spPr>
+        <p:txBody>
+          <a:bodyPr/>
+          <a:lstStyle/>
+          <a:p>
+            <a:endParaRPr lang="de-CH"/>
+          </a:p>
+        </p:txBody>
       </p:sp>
       <p:sp>
         <p:nvSpPr>
@@ -2052,7 +1899,7 @@
           <a:bodyPr wrap="square" lIns="0" tIns="0" rIns="0" bIns="0" rtlCol="0" anchor="ctr"/>
           <a:lstStyle/>
           <a:p>
-            <a:pPr algn="l" indent="0" marL="0">
+            <a:pPr marL="0" indent="0" algn="l">
               <a:buNone/>
             </a:pPr>
             <a:r>
@@ -2091,7 +1938,7 @@
           <a:bodyPr wrap="square" lIns="0" tIns="0" rIns="0" bIns="0" rtlCol="0" anchor="ctr"/>
           <a:lstStyle/>
           <a:p>
-            <a:pPr algn="l" indent="0" marL="0">
+            <a:pPr marL="0" indent="0" algn="l">
               <a:buNone/>
             </a:pPr>
             <a:r>
@@ -2125,6 +1972,7 @@
         <a:solidFill>
           <a:srgbClr val="F5F6F8"/>
         </a:solidFill>
+        <a:effectLst/>
       </p:bgPr>
     </p:bg>
     <p:spTree>
@@ -2167,13 +2015,20 @@
             <a:prstDash val="solid"/>
           </a:ln>
           <a:effectLst>
-            <a:outerShdw sx="100000" sy="100000" kx="0" ky="0" algn="bl" rotWithShape="0" blurRad="101600" dist="31750" dir="8100000">
-              <a:srgbClr val="0f172a">
+            <a:outerShdw blurRad="101600" dist="31750" dir="8100000" algn="bl" rotWithShape="0">
+              <a:srgbClr val="0F172A">
                 <a:alpha val="100000"/>
               </a:srgbClr>
             </a:outerShdw>
           </a:effectLst>
         </p:spPr>
+        <p:txBody>
+          <a:bodyPr/>
+          <a:lstStyle/>
+          <a:p>
+            <a:endParaRPr lang="de-CH"/>
+          </a:p>
+        </p:txBody>
       </p:sp>
       <p:sp>
         <p:nvSpPr>
@@ -2196,11 +2051,11 @@
           <a:bodyPr wrap="square" lIns="0" tIns="0" rIns="0" bIns="0" rtlCol="0" anchor="ctr"/>
           <a:lstStyle/>
           <a:p>
-            <a:pPr algn="ctr" indent="0" marL="0">
+            <a:pPr marL="0" indent="0" algn="ctr">
               <a:buNone/>
             </a:pPr>
             <a:r>
-              <a:rPr lang="en-US" sz="1050" b="1" spc="120" kern="0" dirty="0">
+              <a:rPr lang="en-US" sz="1050" b="1" kern="0" spc="120" dirty="0">
                 <a:solidFill>
                   <a:srgbClr val="E30613"/>
                 </a:solidFill>
@@ -2235,7 +2090,7 @@
           <a:bodyPr wrap="square" lIns="0" tIns="0" rIns="0" bIns="0" rtlCol="0" anchor="ctr"/>
           <a:lstStyle/>
           <a:p>
-            <a:pPr indent="0" marL="0">
+            <a:pPr marL="0" indent="0">
               <a:buNone/>
             </a:pPr>
             <a:r>
@@ -2279,13 +2134,20 @@
             <a:prstDash val="solid"/>
           </a:ln>
           <a:effectLst>
-            <a:outerShdw sx="100000" sy="100000" kx="0" ky="0" algn="bl" rotWithShape="0" blurRad="101600" dist="63500" dir="8100000">
-              <a:srgbClr val="0f172a">
+            <a:outerShdw blurRad="101600" dist="63500" dir="8100000" algn="bl" rotWithShape="0">
+              <a:srgbClr val="0F172A">
                 <a:alpha val="100000"/>
               </a:srgbClr>
             </a:outerShdw>
           </a:effectLst>
         </p:spPr>
+        <p:txBody>
+          <a:bodyPr/>
+          <a:lstStyle/>
+          <a:p>
+            <a:endParaRPr lang="de-CH"/>
+          </a:p>
+        </p:txBody>
       </p:sp>
       <p:sp>
         <p:nvSpPr>
@@ -2308,11 +2170,11 @@
           <a:bodyPr wrap="square" lIns="0" tIns="0" rIns="0" bIns="0" rtlCol="0" anchor="ctr"/>
           <a:lstStyle/>
           <a:p>
-            <a:pPr indent="0" marL="0">
+            <a:pPr marL="0" indent="0">
               <a:buNone/>
             </a:pPr>
             <a:r>
-              <a:rPr lang="en-US" sz="1200" b="1" spc="100" kern="0" dirty="0">
+              <a:rPr lang="en-US" sz="1200" b="1" kern="0" spc="100" dirty="0">
                 <a:solidFill>
                   <a:srgbClr val="475569"/>
                 </a:solidFill>
@@ -2347,7 +2209,7 @@
           <a:bodyPr wrap="square" lIns="0" tIns="0" rIns="0" bIns="0" rtlCol="0" anchor="ctr"/>
           <a:lstStyle/>
           <a:p>
-            <a:pPr indent="0" marL="0">
+            <a:pPr marL="0" indent="0">
               <a:buNone/>
             </a:pPr>
             <a:r>
@@ -2386,7 +2248,7 @@
           <a:bodyPr wrap="square" lIns="0" tIns="0" rIns="0" bIns="0" rtlCol="0" anchor="ctr"/>
           <a:lstStyle/>
           <a:p>
-            <a:pPr indent="0" marL="0">
+            <a:pPr marL="0" indent="0">
               <a:lnSpc>
                 <a:spcPct val="110000"/>
               </a:lnSpc>
@@ -2415,8 +2277,8 @@
         </p:nvSpPr>
         <p:spPr>
           <a:xfrm>
-            <a:off x="4846320" y="1965960"/>
-            <a:ext cx="6675120" cy="2331720"/>
+            <a:off x="4846319" y="1965960"/>
+            <a:ext cx="7021215" cy="2331720"/>
           </a:xfrm>
           <a:prstGeom prst="roundRect">
             <a:avLst>
@@ -2433,13 +2295,20 @@
             <a:prstDash val="solid"/>
           </a:ln>
           <a:effectLst>
-            <a:outerShdw sx="100000" sy="100000" kx="0" ky="0" algn="bl" rotWithShape="0" blurRad="101600" dist="63500" dir="8100000">
-              <a:srgbClr val="0f172a">
+            <a:outerShdw blurRad="101600" dist="63500" dir="8100000" algn="bl" rotWithShape="0">
+              <a:srgbClr val="0F172A">
                 <a:alpha val="100000"/>
               </a:srgbClr>
             </a:outerShdw>
           </a:effectLst>
         </p:spPr>
+        <p:txBody>
+          <a:bodyPr/>
+          <a:lstStyle/>
+          <a:p>
+            <a:endParaRPr lang="de-CH"/>
+          </a:p>
+        </p:txBody>
       </p:sp>
       <p:sp>
         <p:nvSpPr>
@@ -2465,24 +2334,31 @@
             <a:prstDash val="solid"/>
           </a:ln>
           <a:effectLst>
-            <a:outerShdw sx="100000" sy="100000" kx="0" ky="0" algn="bl" rotWithShape="0" blurRad="101600" dist="31750" dir="8100000">
-              <a:srgbClr val="0f172a">
+            <a:outerShdw blurRad="101600" dist="31750" dir="8100000" algn="bl" rotWithShape="0">
+              <a:srgbClr val="0F172A">
                 <a:alpha val="100000"/>
               </a:srgbClr>
             </a:outerShdw>
           </a:effectLst>
         </p:spPr>
+        <p:txBody>
+          <a:bodyPr/>
+          <a:lstStyle/>
+          <a:p>
+            <a:endParaRPr lang="de-CH"/>
+          </a:p>
+        </p:txBody>
       </p:sp>
       <p:pic>
         <p:nvPicPr>
-          <p:cNvPr id="11" name="Image 0" descr="preencoded.png">    </p:cNvPr>
+          <p:cNvPr id="11" name="Image 0" descr="preencoded.png"/>
           <p:cNvPicPr>
             <a:picLocks noChangeAspect="1"/>
           </p:cNvPicPr>
           <p:nvPr/>
         </p:nvPicPr>
         <p:blipFill>
-          <a:blip r:embed="rId1"/>
+          <a:blip r:embed="rId3"/>
           <a:stretch>
             <a:fillRect/>
           </a:stretch>
@@ -2518,7 +2394,7 @@
           <a:bodyPr wrap="square" lIns="0" tIns="0" rIns="0" bIns="0" rtlCol="0" anchor="ctr"/>
           <a:lstStyle/>
           <a:p>
-            <a:pPr indent="0" marL="0">
+            <a:pPr marL="0" indent="0">
               <a:buNone/>
             </a:pPr>
             <a:r>
@@ -2530,7 +2406,18 @@
                 <a:ea typeface="Plus Jakarta Sans" pitchFamily="34" charset="-122"/>
                 <a:cs typeface="Plus Jakarta Sans" pitchFamily="34" charset="-120"/>
               </a:rPr>
-              <a:t>Ein Team mit 5 von 11 Spieler*innen</a:t>
+              <a:t>Ein Team mit 5 von 11 </a:t>
+            </a:r>
+            <a:r>
+              <a:rPr lang="en-US" sz="1900" b="1" dirty="0" err="1">
+                <a:solidFill>
+                  <a:srgbClr val="0F172A"/>
+                </a:solidFill>
+                <a:latin typeface="Plus Jakarta Sans" pitchFamily="34" charset="0"/>
+                <a:ea typeface="Plus Jakarta Sans" pitchFamily="34" charset="-122"/>
+                <a:cs typeface="Plus Jakarta Sans" pitchFamily="34" charset="-120"/>
+              </a:rPr>
+              <a:t>Spieler:innen</a:t>
             </a:r>
             <a:endParaRPr lang="en-US" sz="1900" dirty="0"/>
           </a:p>
@@ -2560,13 +2447,20 @@
             <a:prstDash val="solid"/>
           </a:ln>
           <a:effectLst>
-            <a:outerShdw sx="100000" sy="100000" kx="0" ky="0" algn="bl" rotWithShape="0" blurRad="101600" dist="31750" dir="8100000">
-              <a:srgbClr val="0f172a">
+            <a:outerShdw blurRad="101600" dist="31750" dir="8100000" algn="bl" rotWithShape="0">
+              <a:srgbClr val="0F172A">
                 <a:alpha val="100000"/>
               </a:srgbClr>
             </a:outerShdw>
           </a:effectLst>
         </p:spPr>
+        <p:txBody>
+          <a:bodyPr/>
+          <a:lstStyle/>
+          <a:p>
+            <a:endParaRPr lang="de-CH"/>
+          </a:p>
+        </p:txBody>
       </p:sp>
       <p:sp>
         <p:nvSpPr>
@@ -2589,7 +2483,7 @@
           <a:bodyPr wrap="square" lIns="0" tIns="0" rIns="0" bIns="0" rtlCol="0" anchor="ctr"/>
           <a:lstStyle/>
           <a:p>
-            <a:pPr algn="ctr" indent="0" marL="0">
+            <a:pPr marL="0" indent="0" algn="ctr">
               <a:buNone/>
             </a:pPr>
             <a:r>
@@ -2631,13 +2525,20 @@
             <a:prstDash val="solid"/>
           </a:ln>
           <a:effectLst>
-            <a:outerShdw sx="100000" sy="100000" kx="0" ky="0" algn="bl" rotWithShape="0" blurRad="101600" dist="31750" dir="8100000">
-              <a:srgbClr val="0f172a">
+            <a:outerShdw blurRad="101600" dist="31750" dir="8100000" algn="bl" rotWithShape="0">
+              <a:srgbClr val="0F172A">
                 <a:alpha val="100000"/>
               </a:srgbClr>
             </a:outerShdw>
           </a:effectLst>
         </p:spPr>
+        <p:txBody>
+          <a:bodyPr/>
+          <a:lstStyle/>
+          <a:p>
+            <a:endParaRPr lang="de-CH"/>
+          </a:p>
+        </p:txBody>
       </p:sp>
       <p:sp>
         <p:nvSpPr>
@@ -2660,7 +2561,7 @@
           <a:bodyPr wrap="square" lIns="0" tIns="0" rIns="0" bIns="0" rtlCol="0" anchor="ctr"/>
           <a:lstStyle/>
           <a:p>
-            <a:pPr algn="ctr" indent="0" marL="0">
+            <a:pPr marL="0" indent="0" algn="ctr">
               <a:buNone/>
             </a:pPr>
             <a:r>
@@ -2702,13 +2603,20 @@
             <a:prstDash val="solid"/>
           </a:ln>
           <a:effectLst>
-            <a:outerShdw sx="100000" sy="100000" kx="0" ky="0" algn="bl" rotWithShape="0" blurRad="101600" dist="31750" dir="8100000">
-              <a:srgbClr val="0f172a">
+            <a:outerShdw blurRad="101600" dist="31750" dir="8100000" algn="bl" rotWithShape="0">
+              <a:srgbClr val="0F172A">
                 <a:alpha val="100000"/>
               </a:srgbClr>
             </a:outerShdw>
           </a:effectLst>
         </p:spPr>
+        <p:txBody>
+          <a:bodyPr/>
+          <a:lstStyle/>
+          <a:p>
+            <a:endParaRPr lang="de-CH"/>
+          </a:p>
+        </p:txBody>
       </p:sp>
       <p:sp>
         <p:nvSpPr>
@@ -2731,7 +2639,7 @@
           <a:bodyPr wrap="square" lIns="0" tIns="0" rIns="0" bIns="0" rtlCol="0" anchor="ctr"/>
           <a:lstStyle/>
           <a:p>
-            <a:pPr algn="ctr" indent="0" marL="0">
+            <a:pPr marL="0" indent="0" algn="ctr">
               <a:buNone/>
             </a:pPr>
             <a:r>
@@ -2773,13 +2681,20 @@
             <a:prstDash val="solid"/>
           </a:ln>
           <a:effectLst>
-            <a:outerShdw sx="100000" sy="100000" kx="0" ky="0" algn="bl" rotWithShape="0" blurRad="101600" dist="31750" dir="8100000">
-              <a:srgbClr val="0f172a">
+            <a:outerShdw blurRad="101600" dist="31750" dir="8100000" algn="bl" rotWithShape="0">
+              <a:srgbClr val="0F172A">
                 <a:alpha val="100000"/>
               </a:srgbClr>
             </a:outerShdw>
           </a:effectLst>
         </p:spPr>
+        <p:txBody>
+          <a:bodyPr/>
+          <a:lstStyle/>
+          <a:p>
+            <a:endParaRPr lang="de-CH"/>
+          </a:p>
+        </p:txBody>
       </p:sp>
       <p:sp>
         <p:nvSpPr>
@@ -2802,7 +2717,7 @@
           <a:bodyPr wrap="square" lIns="0" tIns="0" rIns="0" bIns="0" rtlCol="0" anchor="ctr"/>
           <a:lstStyle/>
           <a:p>
-            <a:pPr algn="ctr" indent="0" marL="0">
+            <a:pPr marL="0" indent="0" algn="ctr">
               <a:buNone/>
             </a:pPr>
             <a:r>
@@ -2844,13 +2759,20 @@
             <a:prstDash val="solid"/>
           </a:ln>
           <a:effectLst>
-            <a:outerShdw sx="100000" sy="100000" kx="0" ky="0" algn="bl" rotWithShape="0" blurRad="101600" dist="31750" dir="8100000">
-              <a:srgbClr val="0f172a">
+            <a:outerShdw blurRad="101600" dist="31750" dir="8100000" algn="bl" rotWithShape="0">
+              <a:srgbClr val="0F172A">
                 <a:alpha val="100000"/>
               </a:srgbClr>
             </a:outerShdw>
           </a:effectLst>
         </p:spPr>
+        <p:txBody>
+          <a:bodyPr/>
+          <a:lstStyle/>
+          <a:p>
+            <a:endParaRPr lang="de-CH"/>
+          </a:p>
+        </p:txBody>
       </p:sp>
       <p:sp>
         <p:nvSpPr>
@@ -2873,7 +2795,7 @@
           <a:bodyPr wrap="square" lIns="0" tIns="0" rIns="0" bIns="0" rtlCol="0" anchor="ctr"/>
           <a:lstStyle/>
           <a:p>
-            <a:pPr algn="ctr" indent="0" marL="0">
+            <a:pPr marL="0" indent="0" algn="ctr">
               <a:buNone/>
             </a:pPr>
             <a:r>
@@ -2915,13 +2837,20 @@
             <a:prstDash val="solid"/>
           </a:ln>
           <a:effectLst>
-            <a:outerShdw sx="100000" sy="100000" kx="0" ky="0" algn="bl" rotWithShape="0" blurRad="101600" dist="31750" dir="8100000">
-              <a:srgbClr val="0f172a">
+            <a:outerShdw blurRad="101600" dist="31750" dir="8100000" algn="bl" rotWithShape="0">
+              <a:srgbClr val="0F172A">
                 <a:alpha val="100000"/>
               </a:srgbClr>
             </a:outerShdw>
           </a:effectLst>
         </p:spPr>
+        <p:txBody>
+          <a:bodyPr/>
+          <a:lstStyle/>
+          <a:p>
+            <a:endParaRPr lang="de-CH"/>
+          </a:p>
+        </p:txBody>
       </p:sp>
       <p:sp>
         <p:nvSpPr>
@@ -2947,13 +2876,20 @@
             <a:prstDash val="solid"/>
           </a:ln>
           <a:effectLst>
-            <a:outerShdw sx="100000" sy="100000" kx="0" ky="0" algn="bl" rotWithShape="0" blurRad="101600" dist="31750" dir="8100000">
-              <a:srgbClr val="0f172a">
+            <a:outerShdw blurRad="101600" dist="31750" dir="8100000" algn="bl" rotWithShape="0">
+              <a:srgbClr val="0F172A">
                 <a:alpha val="100000"/>
               </a:srgbClr>
             </a:outerShdw>
           </a:effectLst>
         </p:spPr>
+        <p:txBody>
+          <a:bodyPr/>
+          <a:lstStyle/>
+          <a:p>
+            <a:endParaRPr lang="de-CH"/>
+          </a:p>
+        </p:txBody>
       </p:sp>
       <p:sp>
         <p:nvSpPr>
@@ -2979,13 +2915,20 @@
             <a:prstDash val="solid"/>
           </a:ln>
           <a:effectLst>
-            <a:outerShdw sx="100000" sy="100000" kx="0" ky="0" algn="bl" rotWithShape="0" blurRad="101600" dist="31750" dir="8100000">
-              <a:srgbClr val="0f172a">
+            <a:outerShdw blurRad="101600" dist="31750" dir="8100000" algn="bl" rotWithShape="0">
+              <a:srgbClr val="0F172A">
                 <a:alpha val="100000"/>
               </a:srgbClr>
             </a:outerShdw>
           </a:effectLst>
         </p:spPr>
+        <p:txBody>
+          <a:bodyPr/>
+          <a:lstStyle/>
+          <a:p>
+            <a:endParaRPr lang="de-CH"/>
+          </a:p>
+        </p:txBody>
       </p:sp>
       <p:sp>
         <p:nvSpPr>
@@ -3011,13 +2954,20 @@
             <a:prstDash val="solid"/>
           </a:ln>
           <a:effectLst>
-            <a:outerShdw sx="100000" sy="100000" kx="0" ky="0" algn="bl" rotWithShape="0" blurRad="101600" dist="31750" dir="8100000">
-              <a:srgbClr val="0f172a">
+            <a:outerShdw blurRad="101600" dist="31750" dir="8100000" algn="bl" rotWithShape="0">
+              <a:srgbClr val="0F172A">
                 <a:alpha val="100000"/>
               </a:srgbClr>
             </a:outerShdw>
           </a:effectLst>
         </p:spPr>
+        <p:txBody>
+          <a:bodyPr/>
+          <a:lstStyle/>
+          <a:p>
+            <a:endParaRPr lang="de-CH"/>
+          </a:p>
+        </p:txBody>
       </p:sp>
       <p:sp>
         <p:nvSpPr>
@@ -3043,13 +2993,20 @@
             <a:prstDash val="solid"/>
           </a:ln>
           <a:effectLst>
-            <a:outerShdw sx="100000" sy="100000" kx="0" ky="0" algn="bl" rotWithShape="0" blurRad="101600" dist="31750" dir="8100000">
-              <a:srgbClr val="0f172a">
+            <a:outerShdw blurRad="101600" dist="31750" dir="8100000" algn="bl" rotWithShape="0">
+              <a:srgbClr val="0F172A">
                 <a:alpha val="100000"/>
               </a:srgbClr>
             </a:outerShdw>
           </a:effectLst>
         </p:spPr>
+        <p:txBody>
+          <a:bodyPr/>
+          <a:lstStyle/>
+          <a:p>
+            <a:endParaRPr lang="de-CH"/>
+          </a:p>
+        </p:txBody>
       </p:sp>
       <p:sp>
         <p:nvSpPr>
@@ -3075,13 +3032,20 @@
             <a:prstDash val="solid"/>
           </a:ln>
           <a:effectLst>
-            <a:outerShdw sx="100000" sy="100000" kx="0" ky="0" algn="bl" rotWithShape="0" blurRad="101600" dist="31750" dir="8100000">
-              <a:srgbClr val="0f172a">
+            <a:outerShdw blurRad="101600" dist="31750" dir="8100000" algn="bl" rotWithShape="0">
+              <a:srgbClr val="0F172A">
                 <a:alpha val="100000"/>
               </a:srgbClr>
             </a:outerShdw>
           </a:effectLst>
         </p:spPr>
+        <p:txBody>
+          <a:bodyPr/>
+          <a:lstStyle/>
+          <a:p>
+            <a:endParaRPr lang="de-CH"/>
+          </a:p>
+        </p:txBody>
       </p:sp>
       <p:sp>
         <p:nvSpPr>
@@ -3104,14 +3068,11 @@
           <a:bodyPr wrap="square" lIns="0" tIns="0" rIns="0" bIns="0" rtlCol="0" anchor="ctr"/>
           <a:lstStyle/>
           <a:p>
-            <a:pPr indent="0" marL="0">
+            <a:pPr marL="0" indent="0">
               <a:buNone/>
             </a:pPr>
             <a:r>
               <a:rPr lang="en-US" sz="1350" b="1" dirty="0">
-                <a:solidFill>
-                  <a:srgbClr val="475569"/>
-                </a:solidFill>
                 <a:latin typeface="Plus Jakarta Sans" pitchFamily="34" charset="0"/>
                 <a:ea typeface="Plus Jakarta Sans" pitchFamily="34" charset="-122"/>
                 <a:cs typeface="Plus Jakarta Sans" pitchFamily="34" charset="-120"/>
@@ -3131,7 +3092,7 @@
         <p:spPr>
           <a:xfrm>
             <a:off x="640080" y="4572000"/>
-            <a:ext cx="10881360" cy="1417320"/>
+            <a:ext cx="11227454" cy="1417320"/>
           </a:xfrm>
           <a:prstGeom prst="roundRect">
             <a:avLst>
@@ -3148,70 +3109,21 @@
             <a:prstDash val="solid"/>
           </a:ln>
           <a:effectLst>
-            <a:outerShdw sx="100000" sy="100000" kx="0" ky="0" algn="bl" rotWithShape="0" blurRad="101600" dist="63500" dir="8100000">
-              <a:srgbClr val="0f172a">
+            <a:outerShdw blurRad="101600" dist="63500" dir="8100000" algn="bl" rotWithShape="0">
+              <a:srgbClr val="0F172A">
                 <a:alpha val="100000"/>
               </a:srgbClr>
             </a:outerShdw>
           </a:effectLst>
         </p:spPr>
-      </p:sp>
-      <p:sp>
-        <p:nvSpPr>
-          <p:cNvPr id="31" name="Shape 28"/>
-          <p:cNvSpPr/>
-          <p:nvPr/>
-        </p:nvSpPr>
-        <p:spPr>
-          <a:xfrm>
-            <a:off x="914400" y="4937760"/>
-            <a:ext cx="713232" cy="713232"/>
-          </a:xfrm>
-          <a:prstGeom prst="ellipse">
-            <a:avLst/>
-          </a:prstGeom>
-          <a:solidFill>
-            <a:srgbClr val="FFFFFF"/>
-          </a:solidFill>
-          <a:ln w="25400">
-            <a:solidFill>
-              <a:srgbClr val="0F172A"/>
-            </a:solidFill>
-            <a:prstDash val="solid"/>
-          </a:ln>
-          <a:effectLst>
-            <a:outerShdw sx="100000" sy="100000" kx="0" ky="0" algn="bl" rotWithShape="0" blurRad="101600" dist="31750" dir="8100000">
-              <a:srgbClr val="0f172a">
-                <a:alpha val="100000"/>
-              </a:srgbClr>
-            </a:outerShdw>
-          </a:effectLst>
-        </p:spPr>
-      </p:sp>
-      <p:pic>
-        <p:nvPicPr>
-          <p:cNvPr id="32" name="Image 1" descr="preencoded.png">    </p:cNvPr>
-          <p:cNvPicPr>
-            <a:picLocks noChangeAspect="1"/>
-          </p:cNvPicPr>
-          <p:nvPr/>
-        </p:nvPicPr>
-        <p:blipFill>
-          <a:blip r:embed="rId2"/>
-          <a:stretch>
-            <a:fillRect/>
-          </a:stretch>
-        </p:blipFill>
-        <p:spPr>
-          <a:xfrm>
-            <a:off x="1106973" y="5130333"/>
-            <a:ext cx="328087" cy="328087"/>
-          </a:xfrm>
-          <a:prstGeom prst="rect">
-            <a:avLst/>
-          </a:prstGeom>
-        </p:spPr>
-      </p:pic>
+        <p:txBody>
+          <a:bodyPr/>
+          <a:lstStyle/>
+          <a:p>
+            <a:endParaRPr lang="de-CH"/>
+          </a:p>
+        </p:txBody>
+      </p:sp>
       <p:sp>
         <p:nvSpPr>
           <p:cNvPr id="33" name="Text 29"/>
@@ -3220,8 +3132,8 @@
         </p:nvSpPr>
         <p:spPr>
           <a:xfrm>
-            <a:off x="1828800" y="4572000"/>
-            <a:ext cx="9418320" cy="1417320"/>
+            <a:off x="822961" y="4572000"/>
+            <a:ext cx="10424160" cy="1417320"/>
           </a:xfrm>
           <a:prstGeom prst="rect">
             <a:avLst/>
@@ -3233,7 +3145,7 @@
           <a:bodyPr wrap="square" lIns="0" tIns="0" rIns="0" bIns="0" rtlCol="0" anchor="ctr"/>
           <a:lstStyle/>
           <a:p>
-            <a:pPr indent="0" marL="0">
+            <a:pPr marL="0" indent="0">
               <a:lnSpc>
                 <a:spcPct val="105000"/>
               </a:lnSpc>
@@ -3250,22 +3162,61 @@
               </a:rPr>
               <a:t>Die Schweiz liebt Sport und Rankings. </a:t>
             </a:r>
-            <a:pPr indent="0" marL="0">
-              <a:lnSpc>
-                <a:spcPct val="105000"/>
-              </a:lnSpc>
-              <a:buNone/>
-            </a:pPr>
             <a:r>
               <a:rPr lang="en-US" sz="2100" b="1" dirty="0">
-                <a:solidFill>
-                  <a:srgbClr val="2563EB"/>
-                </a:solidFill>
-                <a:latin typeface="Plus Jakarta Sans" pitchFamily="34" charset="0"/>
-                <a:ea typeface="Plus Jakarta Sans" pitchFamily="34" charset="-122"/>
-                <a:cs typeface="Plus Jakarta Sans" pitchFamily="34" charset="-120"/>
-              </a:rPr>
-              <a:t>Warum also nicht Demokratie als Wettbewerb?</a:t>
+                <a:latin typeface="Plus Jakarta Sans" pitchFamily="34" charset="0"/>
+                <a:ea typeface="Plus Jakarta Sans" pitchFamily="34" charset="-122"/>
+                <a:cs typeface="Plus Jakarta Sans" pitchFamily="34" charset="-120"/>
+              </a:rPr>
+              <a:t>Warum also nicht Demokratie </a:t>
+            </a:r>
+            <a:r>
+              <a:rPr lang="en-US" sz="2100" b="1" dirty="0" err="1">
+                <a:latin typeface="Plus Jakarta Sans" pitchFamily="34" charset="0"/>
+                <a:ea typeface="Plus Jakarta Sans" pitchFamily="34" charset="-122"/>
+                <a:cs typeface="Plus Jakarta Sans" pitchFamily="34" charset="-120"/>
+              </a:rPr>
+              <a:t>als</a:t>
+            </a:r>
+            <a:r>
+              <a:rPr lang="en-US" sz="2100" b="1" dirty="0">
+                <a:latin typeface="Plus Jakarta Sans" pitchFamily="34" charset="0"/>
+                <a:ea typeface="Plus Jakarta Sans" pitchFamily="34" charset="-122"/>
+                <a:cs typeface="Plus Jakarta Sans" pitchFamily="34" charset="-120"/>
+              </a:rPr>
+              <a:t> </a:t>
+            </a:r>
+            <a:r>
+              <a:rPr lang="en-US" sz="2100" b="1" dirty="0" err="1">
+                <a:latin typeface="Plus Jakarta Sans" pitchFamily="34" charset="0"/>
+                <a:ea typeface="Plus Jakarta Sans" pitchFamily="34" charset="-122"/>
+                <a:cs typeface="Plus Jakarta Sans" pitchFamily="34" charset="-120"/>
+              </a:rPr>
+              <a:t>Wettbewerb</a:t>
+            </a:r>
+            <a:r>
+              <a:rPr lang="en-US" sz="2100" b="1" dirty="0">
+                <a:latin typeface="Plus Jakarta Sans" pitchFamily="34" charset="0"/>
+                <a:ea typeface="Plus Jakarta Sans" pitchFamily="34" charset="-122"/>
+                <a:cs typeface="Plus Jakarta Sans" pitchFamily="34" charset="-120"/>
+              </a:rPr>
+              <a:t> der </a:t>
+            </a:r>
+            <a:r>
+              <a:rPr lang="en-US" sz="2100" b="1" dirty="0" err="1">
+                <a:latin typeface="Plus Jakarta Sans" pitchFamily="34" charset="0"/>
+                <a:ea typeface="Plus Jakarta Sans" pitchFamily="34" charset="-122"/>
+                <a:cs typeface="Plus Jakarta Sans" pitchFamily="34" charset="-120"/>
+              </a:rPr>
+              <a:t>Kantone</a:t>
+            </a:r>
+            <a:r>
+              <a:rPr lang="en-US" sz="2100" b="1" dirty="0">
+                <a:latin typeface="Plus Jakarta Sans" pitchFamily="34" charset="0"/>
+                <a:ea typeface="Plus Jakarta Sans" pitchFamily="34" charset="-122"/>
+                <a:cs typeface="Plus Jakarta Sans" pitchFamily="34" charset="-120"/>
+              </a:rPr>
+              <a:t>?</a:t>
             </a:r>
             <a:endParaRPr lang="en-US" sz="2100" dirty="0"/>
           </a:p>
@@ -3287,6 +3238,7 @@
         <a:solidFill>
           <a:srgbClr val="F5F6F8"/>
         </a:solidFill>
+        <a:effectLst/>
       </p:bgPr>
     </p:bg>
     <p:spTree>
@@ -3329,13 +3281,20 @@
             <a:prstDash val="solid"/>
           </a:ln>
           <a:effectLst>
-            <a:outerShdw sx="100000" sy="100000" kx="0" ky="0" algn="bl" rotWithShape="0" blurRad="101600" dist="31750" dir="8100000">
-              <a:srgbClr val="0f172a">
+            <a:outerShdw blurRad="101600" dist="31750" dir="8100000" algn="bl" rotWithShape="0">
+              <a:srgbClr val="0F172A">
                 <a:alpha val="100000"/>
               </a:srgbClr>
             </a:outerShdw>
           </a:effectLst>
         </p:spPr>
+        <p:txBody>
+          <a:bodyPr/>
+          <a:lstStyle/>
+          <a:p>
+            <a:endParaRPr lang="de-CH"/>
+          </a:p>
+        </p:txBody>
       </p:sp>
       <p:sp>
         <p:nvSpPr>
@@ -3358,11 +3317,11 @@
           <a:bodyPr wrap="square" lIns="0" tIns="0" rIns="0" bIns="0" rtlCol="0" anchor="ctr"/>
           <a:lstStyle/>
           <a:p>
-            <a:pPr algn="ctr" indent="0" marL="0">
+            <a:pPr marL="0" indent="0" algn="ctr">
               <a:buNone/>
             </a:pPr>
             <a:r>
-              <a:rPr lang="en-US" sz="1050" b="1" spc="120" kern="0" dirty="0">
+              <a:rPr lang="en-US" sz="1050" b="1" kern="0" spc="120" dirty="0">
                 <a:solidFill>
                   <a:srgbClr val="E30613"/>
                 </a:solidFill>
@@ -3397,7 +3356,7 @@
           <a:bodyPr wrap="square" lIns="0" tIns="0" rIns="0" bIns="0" rtlCol="0" anchor="ctr"/>
           <a:lstStyle/>
           <a:p>
-            <a:pPr indent="0" marL="0">
+            <a:pPr marL="0" indent="0">
               <a:buNone/>
             </a:pPr>
             <a:r>
@@ -3405,13 +3364,15 @@
                 <a:solidFill>
                   <a:srgbClr val="0F172A"/>
                 </a:solidFill>
-                <a:latin typeface="Plus Jakarta Sans" pitchFamily="34" charset="0"/>
+                <a:latin typeface="Plus Jakarta Sans"/>
                 <a:ea typeface="Plus Jakarta Sans" pitchFamily="34" charset="-122"/>
                 <a:cs typeface="Plus Jakarta Sans" pitchFamily="34" charset="-120"/>
               </a:rPr>
               <a:t>Von der offenen Frage zur Idee</a:t>
             </a:r>
-            <a:endParaRPr lang="en-US" sz="4000" dirty="0"/>
+            <a:endParaRPr lang="en-US" sz="4000" dirty="0">
+              <a:latin typeface="Plus Jakarta Sans"/>
+            </a:endParaRPr>
           </a:p>
         </p:txBody>
       </p:sp>
@@ -3423,7 +3384,7 @@
         </p:nvSpPr>
         <p:spPr>
           <a:xfrm>
-            <a:off x="640080" y="1920240"/>
+            <a:off x="626364" y="1826404"/>
             <a:ext cx="3520440" cy="4160520"/>
           </a:xfrm>
           <a:prstGeom prst="roundRect">
@@ -3441,70 +3402,21 @@
             <a:prstDash val="solid"/>
           </a:ln>
           <a:effectLst>
-            <a:outerShdw sx="100000" sy="100000" kx="0" ky="0" algn="bl" rotWithShape="0" blurRad="101600" dist="63500" dir="8100000">
-              <a:srgbClr val="0f172a">
+            <a:outerShdw blurRad="101600" dist="63500" dir="8100000" algn="bl" rotWithShape="0">
+              <a:srgbClr val="0F172A">
                 <a:alpha val="100000"/>
               </a:srgbClr>
             </a:outerShdw>
           </a:effectLst>
         </p:spPr>
-      </p:sp>
-      <p:sp>
-        <p:nvSpPr>
-          <p:cNvPr id="6" name="Shape 4"/>
-          <p:cNvSpPr/>
-          <p:nvPr/>
-        </p:nvSpPr>
-        <p:spPr>
-          <a:xfrm>
-            <a:off x="960120" y="2267712"/>
-            <a:ext cx="713232" cy="713232"/>
-          </a:xfrm>
-          <a:prstGeom prst="ellipse">
-            <a:avLst/>
-          </a:prstGeom>
-          <a:solidFill>
-            <a:srgbClr val="FEE2E2"/>
-          </a:solidFill>
-          <a:ln w="25400">
-            <a:solidFill>
-              <a:srgbClr val="0F172A"/>
-            </a:solidFill>
-            <a:prstDash val="solid"/>
-          </a:ln>
-          <a:effectLst>
-            <a:outerShdw sx="100000" sy="100000" kx="0" ky="0" algn="bl" rotWithShape="0" blurRad="101600" dist="31750" dir="8100000">
-              <a:srgbClr val="0f172a">
-                <a:alpha val="100000"/>
-              </a:srgbClr>
-            </a:outerShdw>
-          </a:effectLst>
-        </p:spPr>
-      </p:sp>
-      <p:pic>
-        <p:nvPicPr>
-          <p:cNvPr id="7" name="Image 0" descr="preencoded.png">    </p:cNvPr>
-          <p:cNvPicPr>
-            <a:picLocks noChangeAspect="1"/>
-          </p:cNvPicPr>
-          <p:nvPr/>
-        </p:nvPicPr>
-        <p:blipFill>
-          <a:blip r:embed="rId1"/>
-          <a:stretch>
-            <a:fillRect/>
-          </a:stretch>
-        </p:blipFill>
-        <p:spPr>
-          <a:xfrm>
-            <a:off x="1152693" y="2460285"/>
-            <a:ext cx="328087" cy="328087"/>
-          </a:xfrm>
-          <a:prstGeom prst="rect">
-            <a:avLst/>
-          </a:prstGeom>
-        </p:spPr>
-      </p:pic>
+        <p:txBody>
+          <a:bodyPr/>
+          <a:lstStyle/>
+          <a:p>
+            <a:endParaRPr lang="de-CH"/>
+          </a:p>
+        </p:txBody>
+      </p:sp>
       <p:sp>
         <p:nvSpPr>
           <p:cNvPr id="8" name="Text 5"/>
@@ -3513,7 +3425,7 @@
         </p:nvSpPr>
         <p:spPr>
           <a:xfrm>
-            <a:off x="960120" y="3127248"/>
+            <a:off x="960120" y="2134463"/>
             <a:ext cx="2880360" cy="457200"/>
           </a:xfrm>
           <a:prstGeom prst="rect">
@@ -3526,7 +3438,7 @@
           <a:bodyPr wrap="square" lIns="0" tIns="0" rIns="0" bIns="0" rtlCol="0" anchor="ctr"/>
           <a:lstStyle/>
           <a:p>
-            <a:pPr indent="0" marL="0">
+            <a:pPr marL="0" indent="0">
               <a:buNone/>
             </a:pPr>
             <a:r>
@@ -3552,7 +3464,7 @@
         </p:nvSpPr>
         <p:spPr>
           <a:xfrm>
-            <a:off x="960120" y="3749040"/>
+            <a:off x="960120" y="2874773"/>
             <a:ext cx="2971800" cy="2103120"/>
           </a:xfrm>
           <a:prstGeom prst="rect">
@@ -3576,17 +3488,41 @@
               <a:buChar char="•"/>
             </a:pPr>
             <a:r>
-              <a:rPr lang="en-US" sz="1400" dirty="0">
+              <a:rPr lang="en-US" sz="2000" dirty="0" err="1">
                 <a:solidFill>
                   <a:srgbClr val="0F172A"/>
                 </a:solidFill>
-                <a:latin typeface="Plus Jakarta Sans" pitchFamily="34" charset="0"/>
-                <a:ea typeface="Plus Jakarta Sans" pitchFamily="34" charset="-122"/>
-                <a:cs typeface="Plus Jakarta Sans" pitchFamily="34" charset="-120"/>
-              </a:rPr>
-              <a:t>Abstimmungsvorlagen analysieren</a:t>
-            </a:r>
-            <a:endParaRPr lang="en-US" sz="1400" dirty="0"/>
+                <a:latin typeface="Plus Jakarta Sans"/>
+                <a:ea typeface="Plus Jakarta Sans" pitchFamily="34" charset="-122"/>
+                <a:cs typeface="Plus Jakarta Sans" pitchFamily="34" charset="-120"/>
+              </a:rPr>
+              <a:t>Abstimmungsvorlagen</a:t>
+            </a:r>
+            <a:r>
+              <a:rPr lang="en-US" sz="2000" dirty="0">
+                <a:solidFill>
+                  <a:srgbClr val="0F172A"/>
+                </a:solidFill>
+                <a:latin typeface="Plus Jakarta Sans"/>
+                <a:ea typeface="Plus Jakarta Sans" pitchFamily="34" charset="-122"/>
+                <a:cs typeface="Plus Jakarta Sans" pitchFamily="34" charset="-120"/>
+              </a:rPr>
+              <a:t> </a:t>
+            </a:r>
+            <a:r>
+              <a:rPr lang="en-US" sz="2000" dirty="0" err="1">
+                <a:solidFill>
+                  <a:srgbClr val="0F172A"/>
+                </a:solidFill>
+                <a:latin typeface="Plus Jakarta Sans"/>
+                <a:ea typeface="Plus Jakarta Sans" pitchFamily="34" charset="-122"/>
+                <a:cs typeface="Plus Jakarta Sans" pitchFamily="34" charset="-120"/>
+              </a:rPr>
+              <a:t>analysieren</a:t>
+            </a:r>
+            <a:endParaRPr lang="en-US" sz="2000" dirty="0">
+              <a:latin typeface="Plus Jakarta Sans"/>
+            </a:endParaRPr>
           </a:p>
           <a:p>
             <a:pPr marL="177800" indent="-177800">
@@ -3600,17 +3536,41 @@
               <a:buChar char="•"/>
             </a:pPr>
             <a:r>
-              <a:rPr lang="en-US" sz="1400" dirty="0">
+              <a:rPr lang="en-US" sz="2000" dirty="0" err="1">
                 <a:solidFill>
                   <a:srgbClr val="0F172A"/>
                 </a:solidFill>
-                <a:latin typeface="Plus Jakarta Sans" pitchFamily="34" charset="0"/>
-                <a:ea typeface="Plus Jakarta Sans" pitchFamily="34" charset="-122"/>
-                <a:cs typeface="Plus Jakarta Sans" pitchFamily="34" charset="-120"/>
-              </a:rPr>
-              <a:t>Bundesratsdaten visualisieren</a:t>
-            </a:r>
-            <a:endParaRPr lang="en-US" sz="1400" dirty="0"/>
+                <a:latin typeface="Plus Jakarta Sans"/>
+                <a:ea typeface="Plus Jakarta Sans" pitchFamily="34" charset="-122"/>
+                <a:cs typeface="Plus Jakarta Sans" pitchFamily="34" charset="-120"/>
+              </a:rPr>
+              <a:t>Bundesratsdaten</a:t>
+            </a:r>
+            <a:r>
+              <a:rPr lang="en-US" sz="2000" dirty="0">
+                <a:solidFill>
+                  <a:srgbClr val="0F172A"/>
+                </a:solidFill>
+                <a:latin typeface="Plus Jakarta Sans"/>
+                <a:ea typeface="Plus Jakarta Sans" pitchFamily="34" charset="-122"/>
+                <a:cs typeface="Plus Jakarta Sans" pitchFamily="34" charset="-120"/>
+              </a:rPr>
+              <a:t> </a:t>
+            </a:r>
+            <a:r>
+              <a:rPr lang="en-US" sz="2000" dirty="0" err="1">
+                <a:solidFill>
+                  <a:srgbClr val="0F172A"/>
+                </a:solidFill>
+                <a:latin typeface="Plus Jakarta Sans"/>
+                <a:ea typeface="Plus Jakarta Sans" pitchFamily="34" charset="-122"/>
+                <a:cs typeface="Plus Jakarta Sans" pitchFamily="34" charset="-120"/>
+              </a:rPr>
+              <a:t>visualisieren</a:t>
+            </a:r>
+            <a:endParaRPr lang="en-US" sz="2000" dirty="0">
+              <a:latin typeface="Plus Jakarta Sans"/>
+            </a:endParaRPr>
           </a:p>
           <a:p>
             <a:pPr marL="177800" indent="-177800">
@@ -3624,17 +3584,63 @@
               <a:buChar char="•"/>
             </a:pPr>
             <a:r>
-              <a:rPr lang="en-US" sz="1400" dirty="0">
+              <a:rPr lang="en-US" sz="2000" dirty="0" err="1">
                 <a:solidFill>
                   <a:srgbClr val="0F172A"/>
                 </a:solidFill>
-                <a:latin typeface="Plus Jakarta Sans" pitchFamily="34" charset="0"/>
-                <a:ea typeface="Plus Jakarta Sans" pitchFamily="34" charset="-122"/>
-                <a:cs typeface="Plus Jakarta Sans" pitchFamily="34" charset="-120"/>
-              </a:rPr>
-              <a:t>Politische Netzwerke &amp; Kommissionen</a:t>
-            </a:r>
-            <a:endParaRPr lang="en-US" sz="1400" dirty="0"/>
+                <a:latin typeface="Plus Jakarta Sans"/>
+                <a:ea typeface="Plus Jakarta Sans" pitchFamily="34" charset="-122"/>
+                <a:cs typeface="Plus Jakarta Sans" pitchFamily="34" charset="-120"/>
+              </a:rPr>
+              <a:t>Politische</a:t>
+            </a:r>
+            <a:r>
+              <a:rPr lang="en-US" sz="2000" dirty="0">
+                <a:solidFill>
+                  <a:srgbClr val="0F172A"/>
+                </a:solidFill>
+                <a:latin typeface="Plus Jakarta Sans"/>
+                <a:ea typeface="Plus Jakarta Sans" pitchFamily="34" charset="-122"/>
+                <a:cs typeface="Plus Jakarta Sans" pitchFamily="34" charset="-120"/>
+              </a:rPr>
+              <a:t> </a:t>
+            </a:r>
+            <a:r>
+              <a:rPr lang="en-US" sz="2000" dirty="0" err="1">
+                <a:solidFill>
+                  <a:srgbClr val="0F172A"/>
+                </a:solidFill>
+                <a:latin typeface="Plus Jakarta Sans"/>
+                <a:ea typeface="Plus Jakarta Sans" pitchFamily="34" charset="-122"/>
+                <a:cs typeface="Plus Jakarta Sans" pitchFamily="34" charset="-120"/>
+              </a:rPr>
+              <a:t>Netzwerke</a:t>
+            </a:r>
+            <a:r>
+              <a:rPr lang="en-US" sz="2000" dirty="0">
+                <a:solidFill>
+                  <a:srgbClr val="0F172A"/>
+                </a:solidFill>
+                <a:latin typeface="Plus Jakarta Sans"/>
+                <a:ea typeface="Plus Jakarta Sans" pitchFamily="34" charset="-122"/>
+                <a:cs typeface="Plus Jakarta Sans" pitchFamily="34" charset="-120"/>
+              </a:rPr>
+              <a:t> &amp; </a:t>
+            </a:r>
+            <a:r>
+              <a:rPr lang="en-US" sz="2000" dirty="0" err="1">
+                <a:solidFill>
+                  <a:srgbClr val="0F172A"/>
+                </a:solidFill>
+                <a:latin typeface="Plus Jakarta Sans"/>
+                <a:ea typeface="Plus Jakarta Sans" pitchFamily="34" charset="-122"/>
+                <a:cs typeface="Plus Jakarta Sans" pitchFamily="34" charset="-120"/>
+              </a:rPr>
+              <a:t>Kommissionen</a:t>
+            </a:r>
+            <a:endParaRPr lang="en-US" sz="2000" dirty="0">
+              <a:latin typeface="Plus Jakarta Sans"/>
+            </a:endParaRPr>
           </a:p>
         </p:txBody>
       </p:sp>
@@ -3646,7 +3652,7 @@
         </p:nvSpPr>
         <p:spPr>
           <a:xfrm>
-            <a:off x="4361688" y="1920240"/>
+            <a:off x="4361688" y="1826404"/>
             <a:ext cx="3520440" cy="4160520"/>
           </a:xfrm>
           <a:prstGeom prst="roundRect">
@@ -3664,70 +3670,21 @@
             <a:prstDash val="solid"/>
           </a:ln>
           <a:effectLst>
-            <a:outerShdw sx="100000" sy="100000" kx="0" ky="0" algn="bl" rotWithShape="0" blurRad="101600" dist="63500" dir="8100000">
-              <a:srgbClr val="0f172a">
+            <a:outerShdw blurRad="101600" dist="63500" dir="8100000" algn="bl" rotWithShape="0">
+              <a:srgbClr val="0F172A">
                 <a:alpha val="100000"/>
               </a:srgbClr>
             </a:outerShdw>
           </a:effectLst>
         </p:spPr>
-      </p:sp>
-      <p:sp>
-        <p:nvSpPr>
-          <p:cNvPr id="11" name="Shape 8"/>
-          <p:cNvSpPr/>
-          <p:nvPr/>
-        </p:nvSpPr>
-        <p:spPr>
-          <a:xfrm>
-            <a:off x="4681728" y="2267712"/>
-            <a:ext cx="713232" cy="713232"/>
-          </a:xfrm>
-          <a:prstGeom prst="ellipse">
-            <a:avLst/>
-          </a:prstGeom>
-          <a:solidFill>
-            <a:srgbClr val="FEE2E2"/>
-          </a:solidFill>
-          <a:ln w="25400">
-            <a:solidFill>
-              <a:srgbClr val="0F172A"/>
-            </a:solidFill>
-            <a:prstDash val="solid"/>
-          </a:ln>
-          <a:effectLst>
-            <a:outerShdw sx="100000" sy="100000" kx="0" ky="0" algn="bl" rotWithShape="0" blurRad="101600" dist="31750" dir="8100000">
-              <a:srgbClr val="0f172a">
-                <a:alpha val="100000"/>
-              </a:srgbClr>
-            </a:outerShdw>
-          </a:effectLst>
-        </p:spPr>
-      </p:sp>
-      <p:pic>
-        <p:nvPicPr>
-          <p:cNvPr id="12" name="Image 1" descr="preencoded.png">    </p:cNvPr>
-          <p:cNvPicPr>
-            <a:picLocks noChangeAspect="1"/>
-          </p:cNvPicPr>
-          <p:nvPr/>
-        </p:nvPicPr>
-        <p:blipFill>
-          <a:blip r:embed="rId2"/>
-          <a:stretch>
-            <a:fillRect/>
-          </a:stretch>
-        </p:blipFill>
-        <p:spPr>
-          <a:xfrm>
-            <a:off x="4874301" y="2460285"/>
-            <a:ext cx="328087" cy="328087"/>
-          </a:xfrm>
-          <a:prstGeom prst="rect">
-            <a:avLst/>
-          </a:prstGeom>
-        </p:spPr>
-      </p:pic>
+        <p:txBody>
+          <a:bodyPr/>
+          <a:lstStyle/>
+          <a:p>
+            <a:endParaRPr lang="de-CH"/>
+          </a:p>
+        </p:txBody>
+      </p:sp>
       <p:sp>
         <p:nvSpPr>
           <p:cNvPr id="13" name="Text 9"/>
@@ -3736,7 +3693,7 @@
         </p:nvSpPr>
         <p:spPr>
           <a:xfrm>
-            <a:off x="4681728" y="3127248"/>
+            <a:off x="4681728" y="2134463"/>
             <a:ext cx="2880360" cy="457200"/>
           </a:xfrm>
           <a:prstGeom prst="rect">
@@ -3749,7 +3706,7 @@
           <a:bodyPr wrap="square" lIns="0" tIns="0" rIns="0" bIns="0" rtlCol="0" anchor="ctr"/>
           <a:lstStyle/>
           <a:p>
-            <a:pPr indent="0" marL="0">
+            <a:pPr marL="0" indent="0">
               <a:buNone/>
             </a:pPr>
             <a:r>
@@ -3775,7 +3732,7 @@
         </p:nvSpPr>
         <p:spPr>
           <a:xfrm>
-            <a:off x="4681728" y="3749040"/>
+            <a:off x="4681728" y="2874773"/>
             <a:ext cx="2971800" cy="2103120"/>
           </a:xfrm>
           <a:prstGeom prst="rect">
@@ -3799,17 +3756,32 @@
               <a:buChar char="•"/>
             </a:pPr>
             <a:r>
-              <a:rPr lang="en-US" sz="1400" dirty="0">
+              <a:rPr lang="en-US" sz="2000" dirty="0">
                 <a:solidFill>
                   <a:srgbClr val="0F172A"/>
                 </a:solidFill>
-                <a:latin typeface="Plus Jakarta Sans" pitchFamily="34" charset="0"/>
-                <a:ea typeface="Plus Jakarta Sans" pitchFamily="34" charset="-122"/>
-                <a:cs typeface="Plus Jakarta Sans" pitchFamily="34" charset="-120"/>
-              </a:rPr>
-              <a:t>Daten sind komplex und abstrakt</a:t>
-            </a:r>
-            <a:endParaRPr lang="en-US" sz="1400" dirty="0"/>
+                <a:latin typeface="Plus Jakarta Sans"/>
+                <a:ea typeface="Plus Jakarta Sans"/>
+              </a:rPr>
+              <a:t>Daten sind komplex und </a:t>
+            </a:r>
+            <a:r>
+              <a:rPr lang="en-US" sz="2000" dirty="0" err="1">
+                <a:solidFill>
+                  <a:srgbClr val="0F172A"/>
+                </a:solidFill>
+                <a:latin typeface="Plus Jakarta Sans"/>
+                <a:ea typeface="Plus Jakarta Sans"/>
+              </a:rPr>
+              <a:t>abstrakt</a:t>
+            </a:r>
+            <a:endParaRPr lang="en-US" sz="2000" dirty="0">
+              <a:solidFill>
+                <a:srgbClr val="0F172A"/>
+              </a:solidFill>
+              <a:latin typeface="Plus Jakarta Sans"/>
+              <a:ea typeface="Plus Jakarta Sans"/>
+            </a:endParaRPr>
           </a:p>
           <a:p>
             <a:pPr marL="177800" indent="-177800">
@@ -3823,17 +3795,32 @@
               <a:buChar char="•"/>
             </a:pPr>
             <a:r>
-              <a:rPr lang="en-US" sz="1400" dirty="0">
+              <a:rPr lang="en-US" sz="2000" dirty="0">
                 <a:solidFill>
                   <a:srgbClr val="0F172A"/>
                 </a:solidFill>
-                <a:latin typeface="Plus Jakarta Sans" pitchFamily="34" charset="0"/>
-                <a:ea typeface="Plus Jakarta Sans" pitchFamily="34" charset="-122"/>
-                <a:cs typeface="Plus Jakarta Sans" pitchFamily="34" charset="-120"/>
-              </a:rPr>
-              <a:t>Wenig zugänglich für das Publikum</a:t>
-            </a:r>
-            <a:endParaRPr lang="en-US" sz="1400" dirty="0"/>
+                <a:latin typeface="Plus Jakarta Sans"/>
+                <a:ea typeface="Plus Jakarta Sans"/>
+              </a:rPr>
+              <a:t>Wenig zugänglich für das </a:t>
+            </a:r>
+            <a:r>
+              <a:rPr lang="en-US" sz="2000" dirty="0" err="1">
+                <a:solidFill>
+                  <a:srgbClr val="0F172A"/>
+                </a:solidFill>
+                <a:latin typeface="Plus Jakarta Sans"/>
+                <a:ea typeface="Plus Jakarta Sans"/>
+              </a:rPr>
+              <a:t>Publikum</a:t>
+            </a:r>
+            <a:endParaRPr lang="en-US" sz="2000" dirty="0">
+              <a:solidFill>
+                <a:srgbClr val="0F172A"/>
+              </a:solidFill>
+              <a:latin typeface="Plus Jakarta Sans"/>
+              <a:ea typeface="Plus Jakarta Sans"/>
+            </a:endParaRPr>
           </a:p>
           <a:p>
             <a:pPr marL="177800" indent="-177800">
@@ -3847,17 +3834,52 @@
               <a:buChar char="•"/>
             </a:pPr>
             <a:r>
-              <a:rPr lang="en-US" sz="1400" dirty="0">
+              <a:rPr lang="en-US" sz="2000" dirty="0">
                 <a:solidFill>
                   <a:srgbClr val="0F172A"/>
                 </a:solidFill>
-                <a:latin typeface="Plus Jakarta Sans" pitchFamily="34" charset="0"/>
-                <a:ea typeface="Plus Jakarta Sans" pitchFamily="34" charset="-122"/>
-                <a:cs typeface="Plus Jakarta Sans" pitchFamily="34" charset="-120"/>
-              </a:rPr>
-              <a:t>Kaum Bezug zum Alltag</a:t>
-            </a:r>
-            <a:endParaRPr lang="en-US" sz="1400" dirty="0"/>
+                <a:latin typeface="Plus Jakarta Sans"/>
+                <a:ea typeface="Plus Jakarta Sans"/>
+              </a:rPr>
+              <a:t>Kaum Bezug </a:t>
+            </a:r>
+            <a:r>
+              <a:rPr lang="en-US" sz="2000" dirty="0" err="1">
+                <a:solidFill>
+                  <a:srgbClr val="0F172A"/>
+                </a:solidFill>
+                <a:latin typeface="Plus Jakarta Sans"/>
+                <a:ea typeface="Plus Jakarta Sans"/>
+              </a:rPr>
+              <a:t>zum</a:t>
+            </a:r>
+            <a:r>
+              <a:rPr lang="en-US" sz="2000" dirty="0">
+                <a:solidFill>
+                  <a:srgbClr val="0F172A"/>
+                </a:solidFill>
+                <a:latin typeface="Plus Jakarta Sans"/>
+                <a:ea typeface="Plus Jakarta Sans"/>
+              </a:rPr>
+              <a:t> </a:t>
+            </a:r>
+            <a:r>
+              <a:rPr lang="en-US" sz="2000" dirty="0" err="1">
+                <a:solidFill>
+                  <a:srgbClr val="0F172A"/>
+                </a:solidFill>
+                <a:latin typeface="Plus Jakarta Sans"/>
+                <a:ea typeface="Plus Jakarta Sans"/>
+              </a:rPr>
+              <a:t>Alltag</a:t>
+            </a:r>
+            <a:endParaRPr lang="en-US" sz="2000" dirty="0">
+              <a:solidFill>
+                <a:srgbClr val="0F172A"/>
+              </a:solidFill>
+              <a:latin typeface="Plus Jakarta Sans"/>
+              <a:ea typeface="Plus Jakarta Sans"/>
+            </a:endParaRPr>
           </a:p>
         </p:txBody>
       </p:sp>
@@ -3869,7 +3891,7 @@
         </p:nvSpPr>
         <p:spPr>
           <a:xfrm>
-            <a:off x="8083296" y="1920240"/>
+            <a:off x="8083296" y="1826404"/>
             <a:ext cx="3520440" cy="4160520"/>
           </a:xfrm>
           <a:prstGeom prst="roundRect">
@@ -3887,70 +3909,21 @@
             <a:prstDash val="solid"/>
           </a:ln>
           <a:effectLst>
-            <a:outerShdw sx="100000" sy="100000" kx="0" ky="0" algn="bl" rotWithShape="0" blurRad="101600" dist="63500" dir="8100000">
-              <a:srgbClr val="0f172a">
+            <a:outerShdw blurRad="101600" dist="63500" dir="8100000" algn="bl" rotWithShape="0">
+              <a:srgbClr val="0F172A">
                 <a:alpha val="100000"/>
               </a:srgbClr>
             </a:outerShdw>
           </a:effectLst>
         </p:spPr>
-      </p:sp>
-      <p:sp>
-        <p:nvSpPr>
-          <p:cNvPr id="16" name="Shape 12"/>
-          <p:cNvSpPr/>
-          <p:nvPr/>
-        </p:nvSpPr>
-        <p:spPr>
-          <a:xfrm>
-            <a:off x="8403336" y="2267712"/>
-            <a:ext cx="713232" cy="713232"/>
-          </a:xfrm>
-          <a:prstGeom prst="ellipse">
-            <a:avLst/>
-          </a:prstGeom>
-          <a:solidFill>
-            <a:srgbClr val="FFFFFF"/>
-          </a:solidFill>
-          <a:ln w="25400">
-            <a:solidFill>
-              <a:srgbClr val="0F172A"/>
-            </a:solidFill>
-            <a:prstDash val="solid"/>
-          </a:ln>
-          <a:effectLst>
-            <a:outerShdw sx="100000" sy="100000" kx="0" ky="0" algn="bl" rotWithShape="0" blurRad="101600" dist="31750" dir="8100000">
-              <a:srgbClr val="0f172a">
-                <a:alpha val="100000"/>
-              </a:srgbClr>
-            </a:outerShdw>
-          </a:effectLst>
-        </p:spPr>
-      </p:sp>
-      <p:pic>
-        <p:nvPicPr>
-          <p:cNvPr id="17" name="Image 2" descr="preencoded.png">    </p:cNvPr>
-          <p:cNvPicPr>
-            <a:picLocks noChangeAspect="1"/>
-          </p:cNvPicPr>
-          <p:nvPr/>
-        </p:nvPicPr>
-        <p:blipFill>
-          <a:blip r:embed="rId3"/>
-          <a:stretch>
-            <a:fillRect/>
-          </a:stretch>
-        </p:blipFill>
-        <p:spPr>
-          <a:xfrm>
-            <a:off x="8595909" y="2460285"/>
-            <a:ext cx="328087" cy="328087"/>
-          </a:xfrm>
-          <a:prstGeom prst="rect">
-            <a:avLst/>
-          </a:prstGeom>
-        </p:spPr>
-      </p:pic>
+        <p:txBody>
+          <a:bodyPr/>
+          <a:lstStyle/>
+          <a:p>
+            <a:endParaRPr lang="de-CH"/>
+          </a:p>
+        </p:txBody>
+      </p:sp>
       <p:sp>
         <p:nvSpPr>
           <p:cNvPr id="18" name="Text 13"/>
@@ -3959,7 +3932,7 @@
         </p:nvSpPr>
         <p:spPr>
           <a:xfrm>
-            <a:off x="8403336" y="3127248"/>
+            <a:off x="8403336" y="2134463"/>
             <a:ext cx="2880360" cy="457200"/>
           </a:xfrm>
           <a:prstGeom prst="rect">
@@ -3972,14 +3945,11 @@
           <a:bodyPr wrap="square" lIns="0" tIns="0" rIns="0" bIns="0" rtlCol="0" anchor="ctr"/>
           <a:lstStyle/>
           <a:p>
-            <a:pPr indent="0" marL="0">
+            <a:pPr marL="0" indent="0">
               <a:buNone/>
             </a:pPr>
             <a:r>
               <a:rPr lang="en-US" sz="2100" b="1" dirty="0">
-                <a:solidFill>
-                  <a:srgbClr val="2563EB"/>
-                </a:solidFill>
                 <a:latin typeface="Plus Jakarta Sans" pitchFamily="34" charset="0"/>
                 <a:ea typeface="Plus Jakarta Sans" pitchFamily="34" charset="-122"/>
                 <a:cs typeface="Plus Jakarta Sans" pitchFamily="34" charset="-120"/>
@@ -3998,7 +3968,7 @@
         </p:nvSpPr>
         <p:spPr>
           <a:xfrm>
-            <a:off x="8403336" y="3749040"/>
+            <a:off x="8403336" y="2874773"/>
             <a:ext cx="2971800" cy="2103120"/>
           </a:xfrm>
           <a:prstGeom prst="rect">
@@ -4022,17 +3992,52 @@
               <a:buChar char="•"/>
             </a:pPr>
             <a:r>
-              <a:rPr lang="en-US" sz="1400" dirty="0">
+              <a:rPr lang="en-US" sz="2000" dirty="0">
                 <a:solidFill>
                   <a:srgbClr val="0F172A"/>
                 </a:solidFill>
-                <a:latin typeface="Plus Jakarta Sans" pitchFamily="34" charset="0"/>
-                <a:ea typeface="Plus Jakarta Sans" pitchFamily="34" charset="-122"/>
-                <a:cs typeface="Plus Jakarta Sans" pitchFamily="34" charset="-120"/>
-              </a:rPr>
-              <a:t>Kantönligeist als Antrieb</a:t>
-            </a:r>
-            <a:endParaRPr lang="en-US" sz="1400" dirty="0"/>
+                <a:latin typeface="Plus Jakarta Sans"/>
+                <a:ea typeface="Plus Jakarta Sans" pitchFamily="34" charset="-122"/>
+              </a:rPr>
+              <a:t>Kantönligeist </a:t>
+            </a:r>
+            <a:r>
+              <a:rPr lang="en-US" sz="2000" dirty="0" err="1">
+                <a:solidFill>
+                  <a:srgbClr val="0F172A"/>
+                </a:solidFill>
+                <a:latin typeface="Plus Jakarta Sans"/>
+                <a:ea typeface="Plus Jakarta Sans" pitchFamily="34" charset="-122"/>
+              </a:rPr>
+              <a:t>als</a:t>
+            </a:r>
+            <a:r>
+              <a:rPr lang="en-US" sz="2000" dirty="0">
+                <a:solidFill>
+                  <a:srgbClr val="0F172A"/>
+                </a:solidFill>
+                <a:latin typeface="Plus Jakarta Sans"/>
+                <a:ea typeface="Plus Jakarta Sans" pitchFamily="34" charset="-122"/>
+              </a:rPr>
+              <a:t> </a:t>
+            </a:r>
+            <a:r>
+              <a:rPr lang="en-US" sz="2000" dirty="0" err="1">
+                <a:solidFill>
+                  <a:srgbClr val="0F172A"/>
+                </a:solidFill>
+                <a:latin typeface="Plus Jakarta Sans"/>
+                <a:ea typeface="Plus Jakarta Sans" pitchFamily="34" charset="-122"/>
+              </a:rPr>
+              <a:t>Antrieb</a:t>
+            </a:r>
+            <a:endParaRPr lang="en-US" sz="2000" dirty="0">
+              <a:solidFill>
+                <a:srgbClr val="0F172A"/>
+              </a:solidFill>
+              <a:latin typeface="Plus Jakarta Sans"/>
+              <a:ea typeface="Plus Jakarta Sans" pitchFamily="34" charset="-122"/>
+            </a:endParaRPr>
           </a:p>
           <a:p>
             <a:pPr marL="177800" indent="-177800">
@@ -4046,17 +4051,52 @@
               <a:buChar char="•"/>
             </a:pPr>
             <a:r>
-              <a:rPr lang="en-US" sz="1400" dirty="0">
+              <a:rPr lang="en-US" sz="2000" dirty="0">
                 <a:solidFill>
                   <a:srgbClr val="0F172A"/>
                 </a:solidFill>
-                <a:latin typeface="Plus Jakarta Sans" pitchFamily="34" charset="0"/>
-                <a:ea typeface="Plus Jakarta Sans" pitchFamily="34" charset="-122"/>
-                <a:cs typeface="Plus Jakarta Sans" pitchFamily="34" charset="-120"/>
-              </a:rPr>
-              <a:t>Wettbewerb statt Tabelle</a:t>
-            </a:r>
-            <a:endParaRPr lang="en-US" sz="1400" dirty="0"/>
+                <a:latin typeface="Plus Jakarta Sans"/>
+                <a:ea typeface="Plus Jakarta Sans" pitchFamily="34" charset="-122"/>
+              </a:rPr>
+              <a:t>Wettbewerb </a:t>
+            </a:r>
+            <a:r>
+              <a:rPr lang="en-US" sz="2000" dirty="0" err="1">
+                <a:solidFill>
+                  <a:srgbClr val="0F172A"/>
+                </a:solidFill>
+                <a:latin typeface="Plus Jakarta Sans"/>
+                <a:ea typeface="Plus Jakarta Sans" pitchFamily="34" charset="-122"/>
+              </a:rPr>
+              <a:t>statt</a:t>
+            </a:r>
+            <a:r>
+              <a:rPr lang="en-US" sz="2000" dirty="0">
+                <a:solidFill>
+                  <a:srgbClr val="0F172A"/>
+                </a:solidFill>
+                <a:latin typeface="Plus Jakarta Sans"/>
+                <a:ea typeface="Plus Jakarta Sans" pitchFamily="34" charset="-122"/>
+              </a:rPr>
+              <a:t> </a:t>
+            </a:r>
+            <a:r>
+              <a:rPr lang="en-US" sz="2000" dirty="0" err="1">
+                <a:solidFill>
+                  <a:srgbClr val="0F172A"/>
+                </a:solidFill>
+                <a:latin typeface="Plus Jakarta Sans"/>
+                <a:ea typeface="Plus Jakarta Sans" pitchFamily="34" charset="-122"/>
+              </a:rPr>
+              <a:t>Tabelle</a:t>
+            </a:r>
+            <a:endParaRPr lang="en-US" sz="2000" dirty="0">
+              <a:solidFill>
+                <a:srgbClr val="0F172A"/>
+              </a:solidFill>
+              <a:latin typeface="Plus Jakarta Sans"/>
+              <a:ea typeface="Plus Jakarta Sans" pitchFamily="34" charset="-122"/>
+            </a:endParaRPr>
           </a:p>
           <a:p>
             <a:pPr marL="177800" indent="-177800">
@@ -4070,38 +4110,36 @@
               <a:buChar char="•"/>
             </a:pPr>
             <a:r>
-              <a:rPr lang="en-US" sz="1400" dirty="0">
+              <a:rPr lang="en-US" sz="2000" dirty="0">
                 <a:solidFill>
                   <a:srgbClr val="0F172A"/>
                 </a:solidFill>
-                <a:latin typeface="Plus Jakarta Sans" pitchFamily="34" charset="0"/>
-                <a:ea typeface="Plus Jakarta Sans" pitchFamily="34" charset="-122"/>
-                <a:cs typeface="Plus Jakarta Sans" pitchFamily="34" charset="-120"/>
+                <a:latin typeface="Plus Jakarta Sans"/>
+                <a:ea typeface="Plus Jakarta Sans" pitchFamily="34" charset="-122"/>
               </a:rPr>
               <a:t>Sport-Storytelling für Motivation</a:t>
             </a:r>
-            <a:endParaRPr lang="en-US" sz="1400" dirty="0"/>
           </a:p>
         </p:txBody>
       </p:sp>
       <p:pic>
         <p:nvPicPr>
-          <p:cNvPr id="20" name="Image 3" descr="preencoded.png">    </p:cNvPr>
+          <p:cNvPr id="20" name="Image 3" descr="preencoded.png"/>
           <p:cNvPicPr>
             <a:picLocks noChangeAspect="1"/>
           </p:cNvPicPr>
           <p:nvPr/>
         </p:nvPicPr>
         <p:blipFill>
-          <a:blip r:embed="rId4"/>
+          <a:blip r:embed="rId3"/>
           <a:stretch>
             <a:fillRect/>
           </a:stretch>
         </p:blipFill>
         <p:spPr>
           <a:xfrm>
-            <a:off x="4197096" y="3881628"/>
-            <a:ext cx="237744" cy="237744"/>
+            <a:off x="4037076" y="3682636"/>
+            <a:ext cx="448056" cy="448056"/>
           </a:xfrm>
           <a:prstGeom prst="rect">
             <a:avLst/>
@@ -4110,22 +4148,22 @@
       </p:pic>
       <p:pic>
         <p:nvPicPr>
-          <p:cNvPr id="21" name="Image 4" descr="preencoded.png">    </p:cNvPr>
+          <p:cNvPr id="21" name="Image 4" descr="preencoded.png"/>
           <p:cNvPicPr>
             <a:picLocks noChangeAspect="1"/>
           </p:cNvPicPr>
           <p:nvPr/>
         </p:nvPicPr>
         <p:blipFill>
-          <a:blip r:embed="rId5"/>
+          <a:blip r:embed="rId3"/>
           <a:stretch>
             <a:fillRect/>
           </a:stretch>
         </p:blipFill>
         <p:spPr>
           <a:xfrm>
-            <a:off x="7918704" y="3881628"/>
-            <a:ext cx="237744" cy="237744"/>
+            <a:off x="7806580" y="3682636"/>
+            <a:ext cx="436736" cy="436736"/>
           </a:xfrm>
           <a:prstGeom prst="rect">
             <a:avLst/>
@@ -4148,6 +4186,7 @@
         <a:solidFill>
           <a:srgbClr val="F5F6F8"/>
         </a:solidFill>
+        <a:effectLst/>
       </p:bgPr>
     </p:bg>
     <p:spTree>
@@ -4190,13 +4229,20 @@
             <a:prstDash val="solid"/>
           </a:ln>
           <a:effectLst>
-            <a:outerShdw sx="100000" sy="100000" kx="0" ky="0" algn="bl" rotWithShape="0" blurRad="101600" dist="31750" dir="8100000">
-              <a:srgbClr val="0f172a">
+            <a:outerShdw blurRad="101600" dist="31750" dir="8100000" algn="bl" rotWithShape="0">
+              <a:srgbClr val="0F172A">
                 <a:alpha val="100000"/>
               </a:srgbClr>
             </a:outerShdw>
           </a:effectLst>
         </p:spPr>
+        <p:txBody>
+          <a:bodyPr/>
+          <a:lstStyle/>
+          <a:p>
+            <a:endParaRPr lang="de-CH"/>
+          </a:p>
+        </p:txBody>
       </p:sp>
       <p:sp>
         <p:nvSpPr>
@@ -4219,11 +4265,11 @@
           <a:bodyPr wrap="square" lIns="0" tIns="0" rIns="0" bIns="0" rtlCol="0" anchor="ctr"/>
           <a:lstStyle/>
           <a:p>
-            <a:pPr algn="ctr" indent="0" marL="0">
+            <a:pPr marL="0" indent="0" algn="ctr">
               <a:buNone/>
             </a:pPr>
             <a:r>
-              <a:rPr lang="en-US" sz="1050" b="1" spc="120" kern="0" dirty="0">
+              <a:rPr lang="en-US" sz="1050" b="1" kern="0" spc="120" dirty="0">
                 <a:solidFill>
                   <a:srgbClr val="E30613"/>
                 </a:solidFill>
@@ -4258,7 +4304,7 @@
           <a:bodyPr wrap="square" lIns="0" tIns="0" rIns="0" bIns="0" rtlCol="0" anchor="ctr"/>
           <a:lstStyle/>
           <a:p>
-            <a:pPr indent="0" marL="0">
+            <a:pPr marL="0" indent="0">
               <a:buNone/>
             </a:pPr>
             <a:r>
@@ -4276,447 +4322,15 @@
           </a:p>
         </p:txBody>
       </p:sp>
-      <p:sp>
-        <p:nvSpPr>
-          <p:cNvPr id="5" name="Text 3"/>
-          <p:cNvSpPr/>
-          <p:nvPr/>
-        </p:nvSpPr>
-        <p:spPr>
-          <a:xfrm>
-            <a:off x="640080" y="1481328"/>
-            <a:ext cx="8686800" cy="365760"/>
-          </a:xfrm>
-          <a:prstGeom prst="rect">
-            <a:avLst/>
-          </a:prstGeom>
-          <a:noFill/>
-          <a:ln/>
-        </p:spPr>
-        <p:txBody>
-          <a:bodyPr wrap="square" lIns="0" tIns="0" rIns="0" bIns="0" rtlCol="0" anchor="ctr"/>
-          <a:lstStyle/>
-          <a:p>
-            <a:pPr indent="0" marL="0">
-              <a:buNone/>
-            </a:pPr>
-            <a:r>
-              <a:rPr lang="en-US" sz="1500" b="1" dirty="0">
-                <a:solidFill>
-                  <a:srgbClr val="475569"/>
-                </a:solidFill>
-                <a:latin typeface="Plus Jakarta Sans" pitchFamily="34" charset="0"/>
-                <a:ea typeface="Plus Jakarta Sans" pitchFamily="34" charset="-122"/>
-                <a:cs typeface="Plus Jakarta Sans" pitchFamily="34" charset="-120"/>
-              </a:rPr>
-              <a:t>Eine interaktive Reise durch die Beteiligung von 1848 bis heute.</a:t>
-            </a:r>
-            <a:endParaRPr lang="en-US" sz="1500" dirty="0"/>
-          </a:p>
-        </p:txBody>
-      </p:sp>
-      <p:sp>
-        <p:nvSpPr>
-          <p:cNvPr id="6" name="Shape 4"/>
-          <p:cNvSpPr/>
-          <p:nvPr/>
-        </p:nvSpPr>
-        <p:spPr>
-          <a:xfrm>
-            <a:off x="640080" y="2057400"/>
-            <a:ext cx="4983480" cy="4114800"/>
-          </a:xfrm>
-          <a:prstGeom prst="roundRect">
-            <a:avLst>
-              <a:gd name="adj" fmla="val 2889"/>
-            </a:avLst>
-          </a:prstGeom>
-          <a:solidFill>
-            <a:srgbClr val="FFFFFF"/>
-          </a:solidFill>
-          <a:ln w="31750">
-            <a:solidFill>
-              <a:srgbClr val="0F172A"/>
-            </a:solidFill>
-            <a:prstDash val="solid"/>
-          </a:ln>
-          <a:effectLst>
-            <a:outerShdw sx="100000" sy="100000" kx="0" ky="0" algn="bl" rotWithShape="0" blurRad="101600" dist="63500" dir="8100000">
-              <a:srgbClr val="0f172a">
-                <a:alpha val="100000"/>
-              </a:srgbClr>
-            </a:outerShdw>
-          </a:effectLst>
-        </p:spPr>
-      </p:sp>
-      <p:sp>
-        <p:nvSpPr>
-          <p:cNvPr id="7" name="Shape 5"/>
-          <p:cNvSpPr/>
-          <p:nvPr/>
-        </p:nvSpPr>
-        <p:spPr>
-          <a:xfrm>
-            <a:off x="640080" y="2057400"/>
-            <a:ext cx="4983480" cy="658368"/>
-          </a:xfrm>
-          <a:prstGeom prst="rect">
-            <a:avLst/>
-          </a:prstGeom>
-          <a:solidFill>
-            <a:srgbClr val="F8FAFC"/>
-          </a:solidFill>
-          <a:ln/>
-        </p:spPr>
-      </p:sp>
-      <p:sp>
-        <p:nvSpPr>
-          <p:cNvPr id="8" name="Text 6"/>
-          <p:cNvSpPr/>
-          <p:nvPr/>
-        </p:nvSpPr>
-        <p:spPr>
-          <a:xfrm>
-            <a:off x="914400" y="2057400"/>
-            <a:ext cx="4389120" cy="658368"/>
-          </a:xfrm>
-          <a:prstGeom prst="rect">
-            <a:avLst/>
-          </a:prstGeom>
-          <a:noFill/>
-          <a:ln/>
-        </p:spPr>
-        <p:txBody>
-          <a:bodyPr wrap="square" lIns="0" tIns="0" rIns="0" bIns="0" rtlCol="0" anchor="ctr"/>
-          <a:lstStyle/>
-          <a:p>
-            <a:pPr indent="0" marL="0">
-              <a:buNone/>
-            </a:pPr>
-            <a:r>
-              <a:rPr lang="en-US" sz="1400" b="1" spc="100" kern="0" dirty="0">
-                <a:solidFill>
-                  <a:srgbClr val="0F172A"/>
-                </a:solidFill>
-                <a:latin typeface="Plus Jakarta Sans" pitchFamily="34" charset="0"/>
-                <a:ea typeface="Plus Jakarta Sans" pitchFamily="34" charset="-122"/>
-                <a:cs typeface="Plus Jakarta Sans" pitchFamily="34" charset="-120"/>
-              </a:rPr>
-              <a:t>VISUALISIERUNGEN</a:t>
-            </a:r>
-            <a:endParaRPr lang="en-US" sz="1400" dirty="0"/>
-          </a:p>
-        </p:txBody>
-      </p:sp>
-      <p:sp>
-        <p:nvSpPr>
-          <p:cNvPr id="9" name="Shape 7"/>
-          <p:cNvSpPr/>
-          <p:nvPr/>
-        </p:nvSpPr>
-        <p:spPr>
-          <a:xfrm>
-            <a:off x="914400" y="2926080"/>
-            <a:ext cx="603504" cy="603504"/>
-          </a:xfrm>
-          <a:prstGeom prst="ellipse">
-            <a:avLst/>
-          </a:prstGeom>
-          <a:solidFill>
-            <a:srgbClr val="EFF6FF"/>
-          </a:solidFill>
-          <a:ln w="25400">
-            <a:solidFill>
-              <a:srgbClr val="0F172A"/>
-            </a:solidFill>
-            <a:prstDash val="solid"/>
-          </a:ln>
-          <a:effectLst>
-            <a:outerShdw sx="100000" sy="100000" kx="0" ky="0" algn="bl" rotWithShape="0" blurRad="101600" dist="31750" dir="8100000">
-              <a:srgbClr val="0f172a">
-                <a:alpha val="100000"/>
-              </a:srgbClr>
-            </a:outerShdw>
-          </a:effectLst>
-        </p:spPr>
-      </p:sp>
       <p:pic>
         <p:nvPicPr>
-          <p:cNvPr id="10" name="Image 0" descr="preencoded.png">    </p:cNvPr>
-          <p:cNvPicPr>
-            <a:picLocks noChangeAspect="1"/>
-          </p:cNvPicPr>
-          <p:nvPr/>
-        </p:nvPicPr>
-        <p:blipFill>
-          <a:blip r:embed="rId1"/>
-          <a:stretch>
-            <a:fillRect/>
-          </a:stretch>
-        </p:blipFill>
-        <p:spPr>
-          <a:xfrm>
-            <a:off x="1077346" y="3089026"/>
-            <a:ext cx="277612" cy="277612"/>
-          </a:xfrm>
-          <a:prstGeom prst="rect">
-            <a:avLst/>
-          </a:prstGeom>
-        </p:spPr>
-      </p:pic>
-      <p:sp>
-        <p:nvSpPr>
-          <p:cNvPr id="11" name="Text 8"/>
-          <p:cNvSpPr/>
-          <p:nvPr/>
-        </p:nvSpPr>
-        <p:spPr>
-          <a:xfrm>
-            <a:off x="1691640" y="2889504"/>
-            <a:ext cx="3749040" cy="365760"/>
-          </a:xfrm>
-          <a:prstGeom prst="rect">
-            <a:avLst/>
-          </a:prstGeom>
-          <a:noFill/>
-          <a:ln/>
-        </p:spPr>
-        <p:txBody>
-          <a:bodyPr wrap="square" lIns="0" tIns="0" rIns="0" bIns="0" rtlCol="0" anchor="ctr"/>
-          <a:lstStyle/>
-          <a:p>
-            <a:pPr indent="0" marL="0">
-              <a:buNone/>
-            </a:pPr>
-            <a:r>
-              <a:rPr lang="en-US" sz="1700" b="1" dirty="0">
-                <a:solidFill>
-                  <a:srgbClr val="0F172A"/>
-                </a:solidFill>
-                <a:latin typeface="Plus Jakarta Sans" pitchFamily="34" charset="0"/>
-                <a:ea typeface="Plus Jakarta Sans" pitchFamily="34" charset="-122"/>
-                <a:cs typeface="Plus Jakarta Sans" pitchFamily="34" charset="-120"/>
-              </a:rPr>
-              <a:t>Race Bar Chart</a:t>
-            </a:r>
-            <a:endParaRPr lang="en-US" sz="1700" dirty="0"/>
-          </a:p>
-        </p:txBody>
-      </p:sp>
-      <p:sp>
-        <p:nvSpPr>
-          <p:cNvPr id="12" name="Text 9"/>
-          <p:cNvSpPr/>
-          <p:nvPr/>
-        </p:nvSpPr>
-        <p:spPr>
-          <a:xfrm>
-            <a:off x="1691640" y="3236976"/>
-            <a:ext cx="3794760" cy="457200"/>
-          </a:xfrm>
-          <a:prstGeom prst="rect">
-            <a:avLst/>
-          </a:prstGeom>
-          <a:noFill/>
-          <a:ln/>
-        </p:spPr>
-        <p:txBody>
-          <a:bodyPr wrap="square" lIns="0" tIns="0" rIns="0" bIns="0" rtlCol="0" anchor="ctr"/>
-          <a:lstStyle/>
-          <a:p>
-            <a:pPr indent="0" marL="0">
-              <a:lnSpc>
-                <a:spcPct val="100000"/>
-              </a:lnSpc>
-              <a:buNone/>
-            </a:pPr>
-            <a:r>
-              <a:rPr lang="en-US" sz="1250" dirty="0">
-                <a:solidFill>
-                  <a:srgbClr val="475569"/>
-                </a:solidFill>
-                <a:latin typeface="Plus Jakarta Sans" pitchFamily="34" charset="0"/>
-                <a:ea typeface="Plus Jakarta Sans" pitchFamily="34" charset="-122"/>
-                <a:cs typeface="Plus Jakarta Sans" pitchFamily="34" charset="-120"/>
-              </a:rPr>
-              <a:t>Live-Ranking der Kantone im Zeitraffer</a:t>
-            </a:r>
-            <a:endParaRPr lang="en-US" sz="1250" dirty="0"/>
-          </a:p>
-        </p:txBody>
-      </p:sp>
-      <p:sp>
-        <p:nvSpPr>
-          <p:cNvPr id="13" name="Shape 10"/>
-          <p:cNvSpPr/>
-          <p:nvPr/>
-        </p:nvSpPr>
-        <p:spPr>
-          <a:xfrm>
-            <a:off x="914400" y="3950208"/>
-            <a:ext cx="603504" cy="603504"/>
-          </a:xfrm>
-          <a:prstGeom prst="ellipse">
-            <a:avLst/>
-          </a:prstGeom>
-          <a:solidFill>
-            <a:srgbClr val="EFF6FF"/>
-          </a:solidFill>
-          <a:ln w="25400">
-            <a:solidFill>
-              <a:srgbClr val="0F172A"/>
-            </a:solidFill>
-            <a:prstDash val="solid"/>
-          </a:ln>
-          <a:effectLst>
-            <a:outerShdw sx="100000" sy="100000" kx="0" ky="0" algn="bl" rotWithShape="0" blurRad="101600" dist="31750" dir="8100000">
-              <a:srgbClr val="0f172a">
-                <a:alpha val="100000"/>
-              </a:srgbClr>
-            </a:outerShdw>
-          </a:effectLst>
-        </p:spPr>
-      </p:sp>
-      <p:pic>
-        <p:nvPicPr>
-          <p:cNvPr id="14" name="Image 1" descr="preencoded.png">    </p:cNvPr>
-          <p:cNvPicPr>
-            <a:picLocks noChangeAspect="1"/>
-          </p:cNvPicPr>
-          <p:nvPr/>
-        </p:nvPicPr>
-        <p:blipFill>
-          <a:blip r:embed="rId2"/>
-          <a:stretch>
-            <a:fillRect/>
-          </a:stretch>
-        </p:blipFill>
-        <p:spPr>
-          <a:xfrm>
-            <a:off x="1077346" y="4113154"/>
-            <a:ext cx="277612" cy="277612"/>
-          </a:xfrm>
-          <a:prstGeom prst="rect">
-            <a:avLst/>
-          </a:prstGeom>
-        </p:spPr>
-      </p:pic>
-      <p:sp>
-        <p:nvSpPr>
-          <p:cNvPr id="15" name="Text 11"/>
-          <p:cNvSpPr/>
-          <p:nvPr/>
-        </p:nvSpPr>
-        <p:spPr>
-          <a:xfrm>
-            <a:off x="1691640" y="3913632"/>
-            <a:ext cx="3749040" cy="365760"/>
-          </a:xfrm>
-          <a:prstGeom prst="rect">
-            <a:avLst/>
-          </a:prstGeom>
-          <a:noFill/>
-          <a:ln/>
-        </p:spPr>
-        <p:txBody>
-          <a:bodyPr wrap="square" lIns="0" tIns="0" rIns="0" bIns="0" rtlCol="0" anchor="ctr"/>
-          <a:lstStyle/>
-          <a:p>
-            <a:pPr indent="0" marL="0">
-              <a:buNone/>
-            </a:pPr>
-            <a:r>
-              <a:rPr lang="en-US" sz="1700" b="1" dirty="0">
-                <a:solidFill>
-                  <a:srgbClr val="0F172A"/>
-                </a:solidFill>
-                <a:latin typeface="Plus Jakarta Sans" pitchFamily="34" charset="0"/>
-                <a:ea typeface="Plus Jakarta Sans" pitchFamily="34" charset="-122"/>
-                <a:cs typeface="Plus Jakarta Sans" pitchFamily="34" charset="-120"/>
-              </a:rPr>
-              <a:t>Line Plot</a:t>
-            </a:r>
-            <a:endParaRPr lang="en-US" sz="1700" dirty="0"/>
-          </a:p>
-        </p:txBody>
-      </p:sp>
-      <p:sp>
-        <p:nvSpPr>
-          <p:cNvPr id="16" name="Text 12"/>
-          <p:cNvSpPr/>
-          <p:nvPr/>
-        </p:nvSpPr>
-        <p:spPr>
-          <a:xfrm>
-            <a:off x="1691640" y="4261104"/>
-            <a:ext cx="3794760" cy="457200"/>
-          </a:xfrm>
-          <a:prstGeom prst="rect">
-            <a:avLst/>
-          </a:prstGeom>
-          <a:noFill/>
-          <a:ln/>
-        </p:spPr>
-        <p:txBody>
-          <a:bodyPr wrap="square" lIns="0" tIns="0" rIns="0" bIns="0" rtlCol="0" anchor="ctr"/>
-          <a:lstStyle/>
-          <a:p>
-            <a:pPr indent="0" marL="0">
-              <a:lnSpc>
-                <a:spcPct val="100000"/>
-              </a:lnSpc>
-              <a:buNone/>
-            </a:pPr>
-            <a:r>
-              <a:rPr lang="en-US" sz="1250" dirty="0">
-                <a:solidFill>
-                  <a:srgbClr val="475569"/>
-                </a:solidFill>
-                <a:latin typeface="Plus Jakarta Sans" pitchFamily="34" charset="0"/>
-                <a:ea typeface="Plus Jakarta Sans" pitchFamily="34" charset="-122"/>
-                <a:cs typeface="Plus Jakarta Sans" pitchFamily="34" charset="-120"/>
-              </a:rPr>
-              <a:t>Zeitverlauf der Beteiligung pro Kanton</a:t>
-            </a:r>
-            <a:endParaRPr lang="en-US" sz="1250" dirty="0"/>
-          </a:p>
-        </p:txBody>
-      </p:sp>
-      <p:sp>
-        <p:nvSpPr>
-          <p:cNvPr id="17" name="Shape 13"/>
-          <p:cNvSpPr/>
-          <p:nvPr/>
-        </p:nvSpPr>
-        <p:spPr>
-          <a:xfrm>
-            <a:off x="914400" y="4974336"/>
-            <a:ext cx="603504" cy="603504"/>
-          </a:xfrm>
-          <a:prstGeom prst="ellipse">
-            <a:avLst/>
-          </a:prstGeom>
-          <a:solidFill>
-            <a:srgbClr val="EFF6FF"/>
-          </a:solidFill>
-          <a:ln w="25400">
-            <a:solidFill>
-              <a:srgbClr val="0F172A"/>
-            </a:solidFill>
-            <a:prstDash val="solid"/>
-          </a:ln>
-          <a:effectLst>
-            <a:outerShdw sx="100000" sy="100000" kx="0" ky="0" algn="bl" rotWithShape="0" blurRad="101600" dist="31750" dir="8100000">
-              <a:srgbClr val="0f172a">
-                <a:alpha val="100000"/>
-              </a:srgbClr>
-            </a:outerShdw>
-          </a:effectLst>
-        </p:spPr>
-      </p:sp>
-      <p:pic>
-        <p:nvPicPr>
-          <p:cNvPr id="18" name="Image 2" descr="preencoded.png">    </p:cNvPr>
+          <p:cNvPr id="45" name="Grafik 44">
+            <a:extLst>
+              <a:ext uri="{FF2B5EF4-FFF2-40B4-BE49-F238E27FC236}">
+                <a16:creationId xmlns:a16="http://schemas.microsoft.com/office/drawing/2014/main" id="{B7EB1382-02D9-DDF4-5C82-EDA797347B22}"/>
+              </a:ext>
+            </a:extLst>
+          </p:cNvPr>
           <p:cNvPicPr>
             <a:picLocks noChangeAspect="1"/>
           </p:cNvPicPr>
@@ -4730,790 +4344,14 @@
         </p:blipFill>
         <p:spPr>
           <a:xfrm>
-            <a:off x="1077346" y="5137282"/>
-            <a:ext cx="277612" cy="277612"/>
+            <a:off x="2393287" y="1591095"/>
+            <a:ext cx="7225842" cy="4425657"/>
           </a:xfrm>
           <a:prstGeom prst="rect">
             <a:avLst/>
           </a:prstGeom>
         </p:spPr>
       </p:pic>
-      <p:sp>
-        <p:nvSpPr>
-          <p:cNvPr id="19" name="Text 14"/>
-          <p:cNvSpPr/>
-          <p:nvPr/>
-        </p:nvSpPr>
-        <p:spPr>
-          <a:xfrm>
-            <a:off x="1691640" y="4937760"/>
-            <a:ext cx="3749040" cy="365760"/>
-          </a:xfrm>
-          <a:prstGeom prst="rect">
-            <a:avLst/>
-          </a:prstGeom>
-          <a:noFill/>
-          <a:ln/>
-        </p:spPr>
-        <p:txBody>
-          <a:bodyPr wrap="square" lIns="0" tIns="0" rIns="0" bIns="0" rtlCol="0" anchor="ctr"/>
-          <a:lstStyle/>
-          <a:p>
-            <a:pPr indent="0" marL="0">
-              <a:buNone/>
-            </a:pPr>
-            <a:r>
-              <a:rPr lang="en-US" sz="1700" b="1" dirty="0">
-                <a:solidFill>
-                  <a:srgbClr val="0F172A"/>
-                </a:solidFill>
-                <a:latin typeface="Plus Jakarta Sans" pitchFamily="34" charset="0"/>
-                <a:ea typeface="Plus Jakarta Sans" pitchFamily="34" charset="-122"/>
-                <a:cs typeface="Plus Jakarta Sans" pitchFamily="34" charset="-120"/>
-              </a:rPr>
-              <a:t>Rangverlauf</a:t>
-            </a:r>
-            <a:endParaRPr lang="en-US" sz="1700" dirty="0"/>
-          </a:p>
-        </p:txBody>
-      </p:sp>
-      <p:sp>
-        <p:nvSpPr>
-          <p:cNvPr id="20" name="Text 15"/>
-          <p:cNvSpPr/>
-          <p:nvPr/>
-        </p:nvSpPr>
-        <p:spPr>
-          <a:xfrm>
-            <a:off x="1691640" y="5285232"/>
-            <a:ext cx="3794760" cy="457200"/>
-          </a:xfrm>
-          <a:prstGeom prst="rect">
-            <a:avLst/>
-          </a:prstGeom>
-          <a:noFill/>
-          <a:ln/>
-        </p:spPr>
-        <p:txBody>
-          <a:bodyPr wrap="square" lIns="0" tIns="0" rIns="0" bIns="0" rtlCol="0" anchor="ctr"/>
-          <a:lstStyle/>
-          <a:p>
-            <a:pPr indent="0" marL="0">
-              <a:lnSpc>
-                <a:spcPct val="100000"/>
-              </a:lnSpc>
-              <a:buNone/>
-            </a:pPr>
-            <a:r>
-              <a:rPr lang="en-US" sz="1250" dirty="0">
-                <a:solidFill>
-                  <a:srgbClr val="475569"/>
-                </a:solidFill>
-                <a:latin typeface="Plus Jakarta Sans" pitchFamily="34" charset="0"/>
-                <a:ea typeface="Plus Jakarta Sans" pitchFamily="34" charset="-122"/>
-                <a:cs typeface="Plus Jakarta Sans" pitchFamily="34" charset="-120"/>
-              </a:rPr>
-              <a:t>Position einzelner Abstimmungen</a:t>
-            </a:r>
-            <a:endParaRPr lang="en-US" sz="1250" dirty="0"/>
-          </a:p>
-        </p:txBody>
-      </p:sp>
-      <p:sp>
-        <p:nvSpPr>
-          <p:cNvPr id="21" name="Shape 16"/>
-          <p:cNvSpPr/>
-          <p:nvPr/>
-        </p:nvSpPr>
-        <p:spPr>
-          <a:xfrm>
-            <a:off x="5852160" y="2057400"/>
-            <a:ext cx="5669280" cy="4114800"/>
-          </a:xfrm>
-          <a:prstGeom prst="roundRect">
-            <a:avLst>
-              <a:gd name="adj" fmla="val 2889"/>
-            </a:avLst>
-          </a:prstGeom>
-          <a:solidFill>
-            <a:srgbClr val="FFFFFF"/>
-          </a:solidFill>
-          <a:ln w="31750">
-            <a:solidFill>
-              <a:srgbClr val="0F172A"/>
-            </a:solidFill>
-            <a:prstDash val="solid"/>
-          </a:ln>
-          <a:effectLst>
-            <a:outerShdw sx="100000" sy="100000" kx="0" ky="0" algn="bl" rotWithShape="0" blurRad="101600" dist="63500" dir="8100000">
-              <a:srgbClr val="0f172a">
-                <a:alpha val="100000"/>
-              </a:srgbClr>
-            </a:outerShdw>
-          </a:effectLst>
-        </p:spPr>
-      </p:sp>
-      <p:sp>
-        <p:nvSpPr>
-          <p:cNvPr id="22" name="Shape 17"/>
-          <p:cNvSpPr/>
-          <p:nvPr/>
-        </p:nvSpPr>
-        <p:spPr>
-          <a:xfrm>
-            <a:off x="5852160" y="2057400"/>
-            <a:ext cx="5669280" cy="658368"/>
-          </a:xfrm>
-          <a:prstGeom prst="rect">
-            <a:avLst/>
-          </a:prstGeom>
-          <a:solidFill>
-            <a:srgbClr val="F8FAFC"/>
-          </a:solidFill>
-          <a:ln/>
-        </p:spPr>
-      </p:sp>
-      <p:sp>
-        <p:nvSpPr>
-          <p:cNvPr id="23" name="Text 18"/>
-          <p:cNvSpPr/>
-          <p:nvPr/>
-        </p:nvSpPr>
-        <p:spPr>
-          <a:xfrm>
-            <a:off x="6126480" y="2057400"/>
-            <a:ext cx="5120640" cy="658368"/>
-          </a:xfrm>
-          <a:prstGeom prst="rect">
-            <a:avLst/>
-          </a:prstGeom>
-          <a:noFill/>
-          <a:ln/>
-        </p:spPr>
-        <p:txBody>
-          <a:bodyPr wrap="square" lIns="0" tIns="0" rIns="0" bIns="0" rtlCol="0" anchor="ctr"/>
-          <a:lstStyle/>
-          <a:p>
-            <a:pPr indent="0" marL="0">
-              <a:buNone/>
-            </a:pPr>
-            <a:r>
-              <a:rPr lang="en-US" sz="1400" b="1" spc="100" kern="0" dirty="0">
-                <a:solidFill>
-                  <a:srgbClr val="0F172A"/>
-                </a:solidFill>
-                <a:latin typeface="Plus Jakarta Sans" pitchFamily="34" charset="0"/>
-                <a:ea typeface="Plus Jakarta Sans" pitchFamily="34" charset="-122"/>
-                <a:cs typeface="Plus Jakarta Sans" pitchFamily="34" charset="-120"/>
-              </a:rPr>
-              <a:t>FEATURES</a:t>
-            </a:r>
-            <a:endParaRPr lang="en-US" sz="1400" dirty="0"/>
-          </a:p>
-        </p:txBody>
-      </p:sp>
-      <p:sp>
-        <p:nvSpPr>
-          <p:cNvPr id="24" name="Shape 19"/>
-          <p:cNvSpPr/>
-          <p:nvPr/>
-        </p:nvSpPr>
-        <p:spPr>
-          <a:xfrm>
-            <a:off x="6126480" y="2852928"/>
-            <a:ext cx="548640" cy="548640"/>
-          </a:xfrm>
-          <a:prstGeom prst="ellipse">
-            <a:avLst/>
-          </a:prstGeom>
-          <a:solidFill>
-            <a:srgbClr val="FEE2E2"/>
-          </a:solidFill>
-          <a:ln w="25400">
-            <a:solidFill>
-              <a:srgbClr val="0F172A"/>
-            </a:solidFill>
-            <a:prstDash val="solid"/>
-          </a:ln>
-          <a:effectLst>
-            <a:outerShdw sx="100000" sy="100000" kx="0" ky="0" algn="bl" rotWithShape="0" blurRad="101600" dist="31750" dir="8100000">
-              <a:srgbClr val="0f172a">
-                <a:alpha val="100000"/>
-              </a:srgbClr>
-            </a:outerShdw>
-          </a:effectLst>
-        </p:spPr>
-      </p:sp>
-      <p:pic>
-        <p:nvPicPr>
-          <p:cNvPr id="25" name="Image 3" descr="preencoded.png">    </p:cNvPr>
-          <p:cNvPicPr>
-            <a:picLocks noChangeAspect="1"/>
-          </p:cNvPicPr>
-          <p:nvPr/>
-        </p:nvPicPr>
-        <p:blipFill>
-          <a:blip r:embed="rId4"/>
-          <a:stretch>
-            <a:fillRect/>
-          </a:stretch>
-        </p:blipFill>
-        <p:spPr>
-          <a:xfrm>
-            <a:off x="6274613" y="3001061"/>
-            <a:ext cx="252374" cy="252374"/>
-          </a:xfrm>
-          <a:prstGeom prst="rect">
-            <a:avLst/>
-          </a:prstGeom>
-        </p:spPr>
-      </p:pic>
-      <p:sp>
-        <p:nvSpPr>
-          <p:cNvPr id="26" name="Text 20"/>
-          <p:cNvSpPr/>
-          <p:nvPr/>
-        </p:nvSpPr>
-        <p:spPr>
-          <a:xfrm>
-            <a:off x="6126480" y="3493008"/>
-            <a:ext cx="2468880" cy="320040"/>
-          </a:xfrm>
-          <a:prstGeom prst="rect">
-            <a:avLst/>
-          </a:prstGeom>
-          <a:noFill/>
-          <a:ln/>
-        </p:spPr>
-        <p:txBody>
-          <a:bodyPr wrap="square" lIns="0" tIns="0" rIns="0" bIns="0" rtlCol="0" anchor="ctr"/>
-          <a:lstStyle/>
-          <a:p>
-            <a:pPr indent="0" marL="0">
-              <a:buNone/>
-            </a:pPr>
-            <a:r>
-              <a:rPr lang="en-US" sz="1550" b="1" dirty="0">
-                <a:solidFill>
-                  <a:srgbClr val="0F172A"/>
-                </a:solidFill>
-                <a:latin typeface="Plus Jakarta Sans" pitchFamily="34" charset="0"/>
-                <a:ea typeface="Plus Jakarta Sans" pitchFamily="34" charset="-122"/>
-                <a:cs typeface="Plus Jakarta Sans" pitchFamily="34" charset="-120"/>
-              </a:rPr>
-              <a:t>Serious Mode</a:t>
-            </a:r>
-            <a:endParaRPr lang="en-US" sz="1550" dirty="0"/>
-          </a:p>
-        </p:txBody>
-      </p:sp>
-      <p:sp>
-        <p:nvSpPr>
-          <p:cNvPr id="27" name="Text 21"/>
-          <p:cNvSpPr/>
-          <p:nvPr/>
-        </p:nvSpPr>
-        <p:spPr>
-          <a:xfrm>
-            <a:off x="6126480" y="3803904"/>
-            <a:ext cx="2468880" cy="274320"/>
-          </a:xfrm>
-          <a:prstGeom prst="rect">
-            <a:avLst/>
-          </a:prstGeom>
-          <a:noFill/>
-          <a:ln/>
-        </p:spPr>
-        <p:txBody>
-          <a:bodyPr wrap="square" lIns="0" tIns="0" rIns="0" bIns="0" rtlCol="0" anchor="ctr"/>
-          <a:lstStyle/>
-          <a:p>
-            <a:pPr indent="0" marL="0">
-              <a:buNone/>
-            </a:pPr>
-            <a:r>
-              <a:rPr lang="en-US" sz="1200" dirty="0">
-                <a:solidFill>
-                  <a:srgbClr val="475569"/>
-                </a:solidFill>
-                <a:latin typeface="Plus Jakarta Sans" pitchFamily="34" charset="0"/>
-                <a:ea typeface="Plus Jakarta Sans" pitchFamily="34" charset="-122"/>
-                <a:cs typeface="Plus Jakarta Sans" pitchFamily="34" charset="-120"/>
-              </a:rPr>
-              <a:t>Analyse &amp; Exploration</a:t>
-            </a:r>
-            <a:endParaRPr lang="en-US" sz="1200" dirty="0"/>
-          </a:p>
-        </p:txBody>
-      </p:sp>
-      <p:sp>
-        <p:nvSpPr>
-          <p:cNvPr id="28" name="Shape 22"/>
-          <p:cNvSpPr/>
-          <p:nvPr/>
-        </p:nvSpPr>
-        <p:spPr>
-          <a:xfrm>
-            <a:off x="8869680" y="2852928"/>
-            <a:ext cx="548640" cy="548640"/>
-          </a:xfrm>
-          <a:prstGeom prst="ellipse">
-            <a:avLst/>
-          </a:prstGeom>
-          <a:solidFill>
-            <a:srgbClr val="FEE2E2"/>
-          </a:solidFill>
-          <a:ln w="25400">
-            <a:solidFill>
-              <a:srgbClr val="0F172A"/>
-            </a:solidFill>
-            <a:prstDash val="solid"/>
-          </a:ln>
-          <a:effectLst>
-            <a:outerShdw sx="100000" sy="100000" kx="0" ky="0" algn="bl" rotWithShape="0" blurRad="101600" dist="31750" dir="8100000">
-              <a:srgbClr val="0f172a">
-                <a:alpha val="100000"/>
-              </a:srgbClr>
-            </a:outerShdw>
-          </a:effectLst>
-        </p:spPr>
-      </p:sp>
-      <p:pic>
-        <p:nvPicPr>
-          <p:cNvPr id="29" name="Image 4" descr="preencoded.png">    </p:cNvPr>
-          <p:cNvPicPr>
-            <a:picLocks noChangeAspect="1"/>
-          </p:cNvPicPr>
-          <p:nvPr/>
-        </p:nvPicPr>
-        <p:blipFill>
-          <a:blip r:embed="rId5"/>
-          <a:stretch>
-            <a:fillRect/>
-          </a:stretch>
-        </p:blipFill>
-        <p:spPr>
-          <a:xfrm>
-            <a:off x="9017813" y="3001061"/>
-            <a:ext cx="252374" cy="252374"/>
-          </a:xfrm>
-          <a:prstGeom prst="rect">
-            <a:avLst/>
-          </a:prstGeom>
-        </p:spPr>
-      </p:pic>
-      <p:sp>
-        <p:nvSpPr>
-          <p:cNvPr id="30" name="Text 23"/>
-          <p:cNvSpPr/>
-          <p:nvPr/>
-        </p:nvSpPr>
-        <p:spPr>
-          <a:xfrm>
-            <a:off x="8869680" y="3493008"/>
-            <a:ext cx="2468880" cy="320040"/>
-          </a:xfrm>
-          <a:prstGeom prst="rect">
-            <a:avLst/>
-          </a:prstGeom>
-          <a:noFill/>
-          <a:ln/>
-        </p:spPr>
-        <p:txBody>
-          <a:bodyPr wrap="square" lIns="0" tIns="0" rIns="0" bIns="0" rtlCol="0" anchor="ctr"/>
-          <a:lstStyle/>
-          <a:p>
-            <a:pPr indent="0" marL="0">
-              <a:buNone/>
-            </a:pPr>
-            <a:r>
-              <a:rPr lang="en-US" sz="1550" b="1" dirty="0">
-                <a:solidFill>
-                  <a:srgbClr val="0F172A"/>
-                </a:solidFill>
-                <a:latin typeface="Plus Jakarta Sans" pitchFamily="34" charset="0"/>
-                <a:ea typeface="Plus Jakarta Sans" pitchFamily="34" charset="-122"/>
-                <a:cs typeface="Plus Jakarta Sans" pitchFamily="34" charset="-120"/>
-              </a:rPr>
-              <a:t>Fun Mode</a:t>
-            </a:r>
-            <a:endParaRPr lang="en-US" sz="1550" dirty="0"/>
-          </a:p>
-        </p:txBody>
-      </p:sp>
-      <p:sp>
-        <p:nvSpPr>
-          <p:cNvPr id="31" name="Text 24"/>
-          <p:cNvSpPr/>
-          <p:nvPr/>
-        </p:nvSpPr>
-        <p:spPr>
-          <a:xfrm>
-            <a:off x="8869680" y="3803904"/>
-            <a:ext cx="2468880" cy="274320"/>
-          </a:xfrm>
-          <a:prstGeom prst="rect">
-            <a:avLst/>
-          </a:prstGeom>
-          <a:noFill/>
-          <a:ln/>
-        </p:spPr>
-        <p:txBody>
-          <a:bodyPr wrap="square" lIns="0" tIns="0" rIns="0" bIns="0" rtlCol="0" anchor="ctr"/>
-          <a:lstStyle/>
-          <a:p>
-            <a:pPr indent="0" marL="0">
-              <a:buNone/>
-            </a:pPr>
-            <a:r>
-              <a:rPr lang="en-US" sz="1200" dirty="0">
-                <a:solidFill>
-                  <a:srgbClr val="475569"/>
-                </a:solidFill>
-                <a:latin typeface="Plus Jakarta Sans" pitchFamily="34" charset="0"/>
-                <a:ea typeface="Plus Jakarta Sans" pitchFamily="34" charset="-122"/>
-                <a:cs typeface="Plus Jakarta Sans" pitchFamily="34" charset="-120"/>
-              </a:rPr>
-              <a:t>Gamification &amp; Sportevent</a:t>
-            </a:r>
-            <a:endParaRPr lang="en-US" sz="1200" dirty="0"/>
-          </a:p>
-        </p:txBody>
-      </p:sp>
-      <p:sp>
-        <p:nvSpPr>
-          <p:cNvPr id="32" name="Shape 25"/>
-          <p:cNvSpPr/>
-          <p:nvPr/>
-        </p:nvSpPr>
-        <p:spPr>
-          <a:xfrm>
-            <a:off x="6126480" y="4370832"/>
-            <a:ext cx="548640" cy="548640"/>
-          </a:xfrm>
-          <a:prstGeom prst="ellipse">
-            <a:avLst/>
-          </a:prstGeom>
-          <a:solidFill>
-            <a:srgbClr val="FEE2E2"/>
-          </a:solidFill>
-          <a:ln w="25400">
-            <a:solidFill>
-              <a:srgbClr val="0F172A"/>
-            </a:solidFill>
-            <a:prstDash val="solid"/>
-          </a:ln>
-          <a:effectLst>
-            <a:outerShdw sx="100000" sy="100000" kx="0" ky="0" algn="bl" rotWithShape="0" blurRad="101600" dist="31750" dir="8100000">
-              <a:srgbClr val="0f172a">
-                <a:alpha val="100000"/>
-              </a:srgbClr>
-            </a:outerShdw>
-          </a:effectLst>
-        </p:spPr>
-      </p:sp>
-      <p:pic>
-        <p:nvPicPr>
-          <p:cNvPr id="33" name="Image 5" descr="preencoded.png">    </p:cNvPr>
-          <p:cNvPicPr>
-            <a:picLocks noChangeAspect="1"/>
-          </p:cNvPicPr>
-          <p:nvPr/>
-        </p:nvPicPr>
-        <p:blipFill>
-          <a:blip r:embed="rId6"/>
-          <a:stretch>
-            <a:fillRect/>
-          </a:stretch>
-        </p:blipFill>
-        <p:spPr>
-          <a:xfrm>
-            <a:off x="6274613" y="4518965"/>
-            <a:ext cx="252374" cy="252374"/>
-          </a:xfrm>
-          <a:prstGeom prst="rect">
-            <a:avLst/>
-          </a:prstGeom>
-        </p:spPr>
-      </p:pic>
-      <p:sp>
-        <p:nvSpPr>
-          <p:cNvPr id="34" name="Text 26"/>
-          <p:cNvSpPr/>
-          <p:nvPr/>
-        </p:nvSpPr>
-        <p:spPr>
-          <a:xfrm>
-            <a:off x="6126480" y="5010912"/>
-            <a:ext cx="2468880" cy="320040"/>
-          </a:xfrm>
-          <a:prstGeom prst="rect">
-            <a:avLst/>
-          </a:prstGeom>
-          <a:noFill/>
-          <a:ln/>
-        </p:spPr>
-        <p:txBody>
-          <a:bodyPr wrap="square" lIns="0" tIns="0" rIns="0" bIns="0" rtlCol="0" anchor="ctr"/>
-          <a:lstStyle/>
-          <a:p>
-            <a:pPr indent="0" marL="0">
-              <a:buNone/>
-            </a:pPr>
-            <a:r>
-              <a:rPr lang="en-US" sz="1550" b="1" dirty="0">
-                <a:solidFill>
-                  <a:srgbClr val="0F172A"/>
-                </a:solidFill>
-                <a:latin typeface="Plus Jakarta Sans" pitchFamily="34" charset="0"/>
-                <a:ea typeface="Plus Jakarta Sans" pitchFamily="34" charset="-122"/>
-                <a:cs typeface="Plus Jakarta Sans" pitchFamily="34" charset="-120"/>
-              </a:rPr>
-              <a:t>AI-Kommentator</a:t>
-            </a:r>
-            <a:endParaRPr lang="en-US" sz="1550" dirty="0"/>
-          </a:p>
-        </p:txBody>
-      </p:sp>
-      <p:sp>
-        <p:nvSpPr>
-          <p:cNvPr id="35" name="Text 27"/>
-          <p:cNvSpPr/>
-          <p:nvPr/>
-        </p:nvSpPr>
-        <p:spPr>
-          <a:xfrm>
-            <a:off x="6126480" y="5321808"/>
-            <a:ext cx="2468880" cy="274320"/>
-          </a:xfrm>
-          <a:prstGeom prst="rect">
-            <a:avLst/>
-          </a:prstGeom>
-          <a:noFill/>
-          <a:ln/>
-        </p:spPr>
-        <p:txBody>
-          <a:bodyPr wrap="square" lIns="0" tIns="0" rIns="0" bIns="0" rtlCol="0" anchor="ctr"/>
-          <a:lstStyle/>
-          <a:p>
-            <a:pPr indent="0" marL="0">
-              <a:buNone/>
-            </a:pPr>
-            <a:r>
-              <a:rPr lang="en-US" sz="1200" dirty="0">
-                <a:solidFill>
-                  <a:srgbClr val="475569"/>
-                </a:solidFill>
-                <a:latin typeface="Plus Jakarta Sans" pitchFamily="34" charset="0"/>
-                <a:ea typeface="Plus Jakarta Sans" pitchFamily="34" charset="-122"/>
-                <a:cs typeface="Plus Jakarta Sans" pitchFamily="34" charset="-120"/>
-              </a:rPr>
-              <a:t>Text-to-Speech live</a:t>
-            </a:r>
-            <a:endParaRPr lang="en-US" sz="1200" dirty="0"/>
-          </a:p>
-        </p:txBody>
-      </p:sp>
-      <p:sp>
-        <p:nvSpPr>
-          <p:cNvPr id="36" name="Shape 28"/>
-          <p:cNvSpPr/>
-          <p:nvPr/>
-        </p:nvSpPr>
-        <p:spPr>
-          <a:xfrm>
-            <a:off x="8869680" y="4370832"/>
-            <a:ext cx="548640" cy="548640"/>
-          </a:xfrm>
-          <a:prstGeom prst="ellipse">
-            <a:avLst/>
-          </a:prstGeom>
-          <a:solidFill>
-            <a:srgbClr val="FEE2E2"/>
-          </a:solidFill>
-          <a:ln w="25400">
-            <a:solidFill>
-              <a:srgbClr val="0F172A"/>
-            </a:solidFill>
-            <a:prstDash val="solid"/>
-          </a:ln>
-          <a:effectLst>
-            <a:outerShdw sx="100000" sy="100000" kx="0" ky="0" algn="bl" rotWithShape="0" blurRad="101600" dist="31750" dir="8100000">
-              <a:srgbClr val="0f172a">
-                <a:alpha val="100000"/>
-              </a:srgbClr>
-            </a:outerShdw>
-          </a:effectLst>
-        </p:spPr>
-      </p:sp>
-      <p:pic>
-        <p:nvPicPr>
-          <p:cNvPr id="37" name="Image 6" descr="preencoded.png">    </p:cNvPr>
-          <p:cNvPicPr>
-            <a:picLocks noChangeAspect="1"/>
-          </p:cNvPicPr>
-          <p:nvPr/>
-        </p:nvPicPr>
-        <p:blipFill>
-          <a:blip r:embed="rId7"/>
-          <a:stretch>
-            <a:fillRect/>
-          </a:stretch>
-        </p:blipFill>
-        <p:spPr>
-          <a:xfrm>
-            <a:off x="9017813" y="4518965"/>
-            <a:ext cx="252374" cy="252374"/>
-          </a:xfrm>
-          <a:prstGeom prst="rect">
-            <a:avLst/>
-          </a:prstGeom>
-        </p:spPr>
-      </p:pic>
-      <p:sp>
-        <p:nvSpPr>
-          <p:cNvPr id="38" name="Text 29"/>
-          <p:cNvSpPr/>
-          <p:nvPr/>
-        </p:nvSpPr>
-        <p:spPr>
-          <a:xfrm>
-            <a:off x="8869680" y="5010912"/>
-            <a:ext cx="2468880" cy="320040"/>
-          </a:xfrm>
-          <a:prstGeom prst="rect">
-            <a:avLst/>
-          </a:prstGeom>
-          <a:noFill/>
-          <a:ln/>
-        </p:spPr>
-        <p:txBody>
-          <a:bodyPr wrap="square" lIns="0" tIns="0" rIns="0" bIns="0" rtlCol="0" anchor="ctr"/>
-          <a:lstStyle/>
-          <a:p>
-            <a:pPr indent="0" marL="0">
-              <a:buNone/>
-            </a:pPr>
-            <a:r>
-              <a:rPr lang="en-US" sz="1550" b="1" dirty="0">
-                <a:solidFill>
-                  <a:srgbClr val="0F172A"/>
-                </a:solidFill>
-                <a:latin typeface="Plus Jakarta Sans" pitchFamily="34" charset="0"/>
-                <a:ea typeface="Plus Jakarta Sans" pitchFamily="34" charset="-122"/>
-                <a:cs typeface="Plus Jakarta Sans" pitchFamily="34" charset="-120"/>
-              </a:rPr>
-              <a:t>Kantonswappen</a:t>
-            </a:r>
-            <a:endParaRPr lang="en-US" sz="1550" dirty="0"/>
-          </a:p>
-        </p:txBody>
-      </p:sp>
-      <p:sp>
-        <p:nvSpPr>
-          <p:cNvPr id="39" name="Text 30"/>
-          <p:cNvSpPr/>
-          <p:nvPr/>
-        </p:nvSpPr>
-        <p:spPr>
-          <a:xfrm>
-            <a:off x="8869680" y="5321808"/>
-            <a:ext cx="2468880" cy="274320"/>
-          </a:xfrm>
-          <a:prstGeom prst="rect">
-            <a:avLst/>
-          </a:prstGeom>
-          <a:noFill/>
-          <a:ln/>
-        </p:spPr>
-        <p:txBody>
-          <a:bodyPr wrap="square" lIns="0" tIns="0" rIns="0" bIns="0" rtlCol="0" anchor="ctr"/>
-          <a:lstStyle/>
-          <a:p>
-            <a:pPr indent="0" marL="0">
-              <a:buNone/>
-            </a:pPr>
-            <a:r>
-              <a:rPr lang="en-US" sz="1200" dirty="0">
-                <a:solidFill>
-                  <a:srgbClr val="475569"/>
-                </a:solidFill>
-                <a:latin typeface="Plus Jakarta Sans" pitchFamily="34" charset="0"/>
-                <a:ea typeface="Plus Jakarta Sans" pitchFamily="34" charset="-122"/>
-                <a:cs typeface="Plus Jakarta Sans" pitchFamily="34" charset="-120"/>
-              </a:rPr>
-              <a:t>Visuell integriert</a:t>
-            </a:r>
-            <a:endParaRPr lang="en-US" sz="1200" dirty="0"/>
-          </a:p>
-        </p:txBody>
-      </p:sp>
-      <p:sp>
-        <p:nvSpPr>
-          <p:cNvPr id="40" name="Shape 31"/>
-          <p:cNvSpPr/>
-          <p:nvPr/>
-        </p:nvSpPr>
-        <p:spPr>
-          <a:xfrm>
-            <a:off x="6126480" y="5687568"/>
-            <a:ext cx="5120640" cy="365760"/>
-          </a:xfrm>
-          <a:prstGeom prst="roundRect">
-            <a:avLst>
-              <a:gd name="adj" fmla="val 15000"/>
-            </a:avLst>
-          </a:prstGeom>
-          <a:solidFill>
-            <a:srgbClr val="EFF6FF"/>
-          </a:solidFill>
-          <a:ln w="19050">
-            <a:solidFill>
-              <a:srgbClr val="0F172A"/>
-            </a:solidFill>
-            <a:prstDash val="solid"/>
-          </a:ln>
-        </p:spPr>
-      </p:sp>
-      <p:sp>
-        <p:nvSpPr>
-          <p:cNvPr id="41" name="Text 32"/>
-          <p:cNvSpPr/>
-          <p:nvPr/>
-        </p:nvSpPr>
-        <p:spPr>
-          <a:xfrm>
-            <a:off x="6126480" y="5687568"/>
-            <a:ext cx="5120640" cy="365760"/>
-          </a:xfrm>
-          <a:prstGeom prst="rect">
-            <a:avLst/>
-          </a:prstGeom>
-          <a:noFill/>
-          <a:ln/>
-        </p:spPr>
-        <p:txBody>
-          <a:bodyPr wrap="square" lIns="0" tIns="0" rIns="0" bIns="0" rtlCol="0" anchor="ctr"/>
-          <a:lstStyle/>
-          <a:p>
-            <a:pPr algn="ctr" indent="0" marL="0">
-              <a:buNone/>
-            </a:pPr>
-            <a:r>
-              <a:rPr lang="en-US" sz="1250" b="1" dirty="0">
-                <a:solidFill>
-                  <a:srgbClr val="2563EB"/>
-                </a:solidFill>
-                <a:latin typeface="Plus Jakarta Sans" pitchFamily="34" charset="0"/>
-                <a:ea typeface="Plus Jakarta Sans" pitchFamily="34" charset="-122"/>
-                <a:cs typeface="Plus Jakarta Sans" pitchFamily="34" charset="-120"/>
-              </a:rPr>
-              <a:t>★ Bundesrats-Heimatkantone hervorgehoben</a:t>
-            </a:r>
-            <a:endParaRPr lang="en-US" sz="1250" dirty="0"/>
-          </a:p>
-        </p:txBody>
-      </p:sp>
     </p:spTree>
   </p:cSld>
   <p:clrMapOvr>
@@ -5524,12 +4362,246 @@
 
 <file path=ppt/slides/slide5.xml><?xml version="1.0" encoding="utf-8"?>
 <p:sld xmlns:a="http://schemas.openxmlformats.org/drawingml/2006/main" xmlns:r="http://schemas.openxmlformats.org/officeDocument/2006/relationships" xmlns:p="http://schemas.openxmlformats.org/presentationml/2006/main">
+  <p:cSld>
+    <p:spTree>
+      <p:nvGrpSpPr>
+        <p:cNvPr id="1" name="">
+          <a:extLst>
+            <a:ext uri="{FF2B5EF4-FFF2-40B4-BE49-F238E27FC236}">
+              <a16:creationId xmlns:a16="http://schemas.microsoft.com/office/drawing/2014/main" id="{FF3AAAD0-AAB1-6EB2-D902-64894BB88B58}"/>
+            </a:ext>
+          </a:extLst>
+        </p:cNvPr>
+        <p:cNvGrpSpPr/>
+        <p:nvPr/>
+      </p:nvGrpSpPr>
+      <p:grpSpPr>
+        <a:xfrm>
+          <a:off x="0" y="0"/>
+          <a:ext cx="0" cy="0"/>
+          <a:chOff x="0" y="0"/>
+          <a:chExt cx="0" cy="0"/>
+        </a:xfrm>
+      </p:grpSpPr>
+      <p:sp>
+        <p:nvSpPr>
+          <p:cNvPr id="2" name="Shape 0">
+            <a:extLst>
+              <a:ext uri="{FF2B5EF4-FFF2-40B4-BE49-F238E27FC236}">
+                <a16:creationId xmlns:a16="http://schemas.microsoft.com/office/drawing/2014/main" id="{514F36A9-1C6D-97CA-AC4B-920B5A67E635}"/>
+              </a:ext>
+            </a:extLst>
+          </p:cNvPr>
+          <p:cNvSpPr/>
+          <p:nvPr/>
+        </p:nvSpPr>
+        <p:spPr>
+          <a:xfrm>
+            <a:off x="640080" y="457200"/>
+            <a:ext cx="2212848" cy="329184"/>
+          </a:xfrm>
+          <a:prstGeom prst="roundRect">
+            <a:avLst>
+              <a:gd name="adj" fmla="val 16667"/>
+            </a:avLst>
+          </a:prstGeom>
+          <a:solidFill>
+            <a:srgbClr val="FEE2E2"/>
+          </a:solidFill>
+          <a:ln w="19050">
+            <a:solidFill>
+              <a:srgbClr val="0F172A"/>
+            </a:solidFill>
+            <a:prstDash val="solid"/>
+          </a:ln>
+          <a:effectLst>
+            <a:outerShdw blurRad="101600" dist="31750" dir="8100000" algn="bl" rotWithShape="0">
+              <a:srgbClr val="0F172A">
+                <a:alpha val="100000"/>
+              </a:srgbClr>
+            </a:outerShdw>
+          </a:effectLst>
+        </p:spPr>
+        <p:txBody>
+          <a:bodyPr/>
+          <a:lstStyle/>
+          <a:p>
+            <a:endParaRPr lang="de-CH"/>
+          </a:p>
+        </p:txBody>
+      </p:sp>
+      <p:sp>
+        <p:nvSpPr>
+          <p:cNvPr id="3" name="Text 1">
+            <a:extLst>
+              <a:ext uri="{FF2B5EF4-FFF2-40B4-BE49-F238E27FC236}">
+                <a16:creationId xmlns:a16="http://schemas.microsoft.com/office/drawing/2014/main" id="{4ED85662-EFA8-5C57-66EF-98085EC2D57A}"/>
+              </a:ext>
+            </a:extLst>
+          </p:cNvPr>
+          <p:cNvSpPr/>
+          <p:nvPr/>
+        </p:nvSpPr>
+        <p:spPr>
+          <a:xfrm>
+            <a:off x="640080" y="457200"/>
+            <a:ext cx="2212848" cy="329184"/>
+          </a:xfrm>
+          <a:prstGeom prst="rect">
+            <a:avLst/>
+          </a:prstGeom>
+          <a:noFill/>
+          <a:ln/>
+        </p:spPr>
+        <p:txBody>
+          <a:bodyPr wrap="square" lIns="0" tIns="0" rIns="0" bIns="0" rtlCol="0" anchor="ctr"/>
+          <a:lstStyle/>
+          <a:p>
+            <a:pPr marL="0" indent="0" algn="ctr">
+              <a:buNone/>
+            </a:pPr>
+            <a:r>
+              <a:rPr lang="en-US" sz="1050" b="1" kern="0" spc="120" dirty="0">
+                <a:solidFill>
+                  <a:srgbClr val="E30613"/>
+                </a:solidFill>
+                <a:latin typeface="Plus Jakarta Sans" pitchFamily="34" charset="0"/>
+                <a:ea typeface="Plus Jakarta Sans" pitchFamily="34" charset="-122"/>
+                <a:cs typeface="Plus Jakarta Sans" pitchFamily="34" charset="-120"/>
+              </a:rPr>
+              <a:t>03 · DAS PRODUKT</a:t>
+            </a:r>
+            <a:endParaRPr lang="en-US" sz="1050" dirty="0"/>
+          </a:p>
+        </p:txBody>
+      </p:sp>
+      <p:sp>
+        <p:nvSpPr>
+          <p:cNvPr id="4" name="Text 2">
+            <a:extLst>
+              <a:ext uri="{FF2B5EF4-FFF2-40B4-BE49-F238E27FC236}">
+                <a16:creationId xmlns:a16="http://schemas.microsoft.com/office/drawing/2014/main" id="{A13F4BB9-F12B-24F4-00AE-95675E6F2BCD}"/>
+              </a:ext>
+            </a:extLst>
+          </p:cNvPr>
+          <p:cNvSpPr/>
+          <p:nvPr/>
+        </p:nvSpPr>
+        <p:spPr>
+          <a:xfrm>
+            <a:off x="621792" y="841248"/>
+            <a:ext cx="8686800" cy="640080"/>
+          </a:xfrm>
+          <a:prstGeom prst="rect">
+            <a:avLst/>
+          </a:prstGeom>
+          <a:noFill/>
+          <a:ln/>
+        </p:spPr>
+        <p:txBody>
+          <a:bodyPr wrap="square" lIns="0" tIns="0" rIns="0" bIns="0" rtlCol="0" anchor="ctr"/>
+          <a:lstStyle/>
+          <a:p>
+            <a:pPr marL="0" indent="0">
+              <a:buNone/>
+            </a:pPr>
+            <a:r>
+              <a:rPr lang="en-US" sz="3600" b="1" dirty="0">
+                <a:solidFill>
+                  <a:srgbClr val="0F172A"/>
+                </a:solidFill>
+                <a:latin typeface="Plus Jakarta Sans" pitchFamily="34" charset="0"/>
+                <a:ea typeface="Plus Jakarta Sans" pitchFamily="34" charset="-122"/>
+                <a:cs typeface="Plus Jakarta Sans" pitchFamily="34" charset="-120"/>
+              </a:rPr>
+              <a:t>Democracy-Ranking der Kantone</a:t>
+            </a:r>
+            <a:endParaRPr lang="en-US" sz="3600" dirty="0"/>
+          </a:p>
+        </p:txBody>
+      </p:sp>
+      <p:pic>
+        <p:nvPicPr>
+          <p:cNvPr id="51" name="Grafik 50">
+            <a:extLst>
+              <a:ext uri="{FF2B5EF4-FFF2-40B4-BE49-F238E27FC236}">
+                <a16:creationId xmlns:a16="http://schemas.microsoft.com/office/drawing/2014/main" id="{A1F3BEFB-D5C8-DF36-42BA-5135B585C995}"/>
+              </a:ext>
+            </a:extLst>
+          </p:cNvPr>
+          <p:cNvPicPr>
+            <a:picLocks noChangeAspect="1"/>
+          </p:cNvPicPr>
+          <p:nvPr/>
+        </p:nvPicPr>
+        <p:blipFill>
+          <a:blip r:embed="rId3"/>
+          <a:stretch>
+            <a:fillRect/>
+          </a:stretch>
+        </p:blipFill>
+        <p:spPr>
+          <a:xfrm>
+            <a:off x="6242283" y="1763922"/>
+            <a:ext cx="5557620" cy="3672000"/>
+          </a:xfrm>
+          <a:prstGeom prst="rect">
+            <a:avLst/>
+          </a:prstGeom>
+        </p:spPr>
+      </p:pic>
+      <p:pic>
+        <p:nvPicPr>
+          <p:cNvPr id="6" name="Grafik 5">
+            <a:extLst>
+              <a:ext uri="{FF2B5EF4-FFF2-40B4-BE49-F238E27FC236}">
+                <a16:creationId xmlns:a16="http://schemas.microsoft.com/office/drawing/2014/main" id="{75E6946A-6003-13A4-F0FF-E20021AB45C1}"/>
+              </a:ext>
+            </a:extLst>
+          </p:cNvPr>
+          <p:cNvPicPr>
+            <a:picLocks noChangeAspect="1"/>
+          </p:cNvPicPr>
+          <p:nvPr/>
+        </p:nvPicPr>
+        <p:blipFill>
+          <a:blip r:embed="rId4"/>
+          <a:stretch>
+            <a:fillRect/>
+          </a:stretch>
+        </p:blipFill>
+        <p:spPr>
+          <a:xfrm>
+            <a:off x="621792" y="1763923"/>
+            <a:ext cx="5483721" cy="3600000"/>
+          </a:xfrm>
+          <a:prstGeom prst="rect">
+            <a:avLst/>
+          </a:prstGeom>
+        </p:spPr>
+      </p:pic>
+    </p:spTree>
+    <p:extLst>
+      <p:ext uri="{BB962C8B-B14F-4D97-AF65-F5344CB8AC3E}">
+        <p14:creationId xmlns:p14="http://schemas.microsoft.com/office/powerpoint/2010/main" val="2844350829"/>
+      </p:ext>
+    </p:extLst>
+  </p:cSld>
+  <p:clrMapOvr>
+    <a:masterClrMapping/>
+  </p:clrMapOvr>
+</p:sld>
+</file>
+
+<file path=ppt/slides/slide6.xml><?xml version="1.0" encoding="utf-8"?>
+<p:sld xmlns:a="http://schemas.openxmlformats.org/drawingml/2006/main" xmlns:r="http://schemas.openxmlformats.org/officeDocument/2006/relationships" xmlns:p="http://schemas.openxmlformats.org/presentationml/2006/main">
   <p:cSld name="Slide 5">
     <p:bg>
       <p:bgPr>
         <a:solidFill>
           <a:srgbClr val="FDF2F8"/>
         </a:solidFill>
+        <a:effectLst/>
       </p:bgPr>
     </p:bg>
     <p:spTree>
@@ -5572,13 +4644,20 @@
             <a:prstDash val="solid"/>
           </a:ln>
           <a:effectLst>
-            <a:outerShdw sx="100000" sy="100000" kx="0" ky="0" algn="bl" rotWithShape="0" blurRad="101600" dist="31750" dir="8100000">
-              <a:srgbClr val="0f172a">
+            <a:outerShdw blurRad="101600" dist="31750" dir="8100000" algn="bl" rotWithShape="0">
+              <a:srgbClr val="0F172A">
                 <a:alpha val="100000"/>
               </a:srgbClr>
             </a:outerShdw>
           </a:effectLst>
         </p:spPr>
+        <p:txBody>
+          <a:bodyPr/>
+          <a:lstStyle/>
+          <a:p>
+            <a:endParaRPr lang="de-CH"/>
+          </a:p>
+        </p:txBody>
       </p:sp>
       <p:sp>
         <p:nvSpPr>
@@ -5601,11 +4680,11 @@
           <a:bodyPr wrap="square" lIns="0" tIns="0" rIns="0" bIns="0" rtlCol="0" anchor="ctr"/>
           <a:lstStyle/>
           <a:p>
-            <a:pPr algn="ctr" indent="0" marL="0">
+            <a:pPr marL="0" indent="0" algn="ctr">
               <a:buNone/>
             </a:pPr>
             <a:r>
-              <a:rPr lang="en-US" sz="1050" b="1" spc="120" kern="0" dirty="0">
+              <a:rPr lang="en-US" sz="1050" b="1" kern="0" spc="120" dirty="0">
                 <a:solidFill>
                   <a:srgbClr val="EC4899"/>
                 </a:solidFill>
@@ -5640,7 +4719,7 @@
           <a:bodyPr wrap="square" lIns="0" tIns="0" rIns="0" bIns="0" rtlCol="0" anchor="ctr"/>
           <a:lstStyle/>
           <a:p>
-            <a:pPr indent="0" marL="0">
+            <a:pPr marL="0" indent="0">
               <a:buNone/>
             </a:pPr>
             <a:r>
@@ -5652,1637 +4731,9 @@
                 <a:ea typeface="Plus Jakarta Sans" pitchFamily="34" charset="-122"/>
                 <a:cs typeface="Plus Jakarta Sans" pitchFamily="34" charset="-120"/>
               </a:rPr>
-              <a:t>Wenn Daten zum </a:t>
-            </a:r>
-            <a:pPr indent="0" marL="0">
-              <a:buNone/>
-            </a:pPr>
-            <a:r>
-              <a:rPr lang="en-US" sz="4000" b="1" dirty="0">
-                <a:solidFill>
-                  <a:srgbClr val="EC4899"/>
-                </a:solidFill>
-                <a:latin typeface="Plus Jakarta Sans" pitchFamily="34" charset="0"/>
-                <a:ea typeface="Plus Jakarta Sans" pitchFamily="34" charset="-122"/>
-                <a:cs typeface="Plus Jakarta Sans" pitchFamily="34" charset="-120"/>
-              </a:rPr>
-              <a:t>Sportevent</a:t>
-            </a:r>
-            <a:pPr indent="0" marL="0">
-              <a:buNone/>
-            </a:pPr>
-            <a:r>
-              <a:rPr lang="en-US" sz="4000" b="1" dirty="0">
-                <a:solidFill>
-                  <a:srgbClr val="0F172A"/>
-                </a:solidFill>
-                <a:latin typeface="Plus Jakarta Sans" pitchFamily="34" charset="0"/>
-                <a:ea typeface="Plus Jakarta Sans" pitchFamily="34" charset="-122"/>
-                <a:cs typeface="Plus Jakarta Sans" pitchFamily="34" charset="-120"/>
-              </a:rPr>
-              <a:t> werden</a:t>
+              <a:t>Sport Mode!</a:t>
             </a:r>
             <a:endParaRPr lang="en-US" sz="4000" dirty="0"/>
-          </a:p>
-        </p:txBody>
-      </p:sp>
-      <p:sp>
-        <p:nvSpPr>
-          <p:cNvPr id="5" name="Shape 3"/>
-          <p:cNvSpPr/>
-          <p:nvPr/>
-        </p:nvSpPr>
-        <p:spPr>
-          <a:xfrm>
-            <a:off x="640080" y="1965960"/>
-            <a:ext cx="6766560" cy="4160520"/>
-          </a:xfrm>
-          <a:prstGeom prst="roundRect">
-            <a:avLst>
-              <a:gd name="adj" fmla="val 2857"/>
-            </a:avLst>
-          </a:prstGeom>
-          <a:solidFill>
-            <a:srgbClr val="FFFFFF"/>
-          </a:solidFill>
-          <a:ln w="31750">
-            <a:solidFill>
-              <a:srgbClr val="0F172A"/>
-            </a:solidFill>
-            <a:prstDash val="solid"/>
-          </a:ln>
-          <a:effectLst>
-            <a:outerShdw sx="100000" sy="100000" kx="0" ky="0" algn="bl" rotWithShape="0" blurRad="101600" dist="63500" dir="8100000">
-              <a:srgbClr val="0f172a">
-                <a:alpha val="100000"/>
-              </a:srgbClr>
-            </a:outerShdw>
-          </a:effectLst>
-        </p:spPr>
-      </p:sp>
-      <p:sp>
-        <p:nvSpPr>
-          <p:cNvPr id="6" name="Shape 4"/>
-          <p:cNvSpPr/>
-          <p:nvPr/>
-        </p:nvSpPr>
-        <p:spPr>
-          <a:xfrm>
-            <a:off x="640080" y="1965960"/>
-            <a:ext cx="6766560" cy="713232"/>
-          </a:xfrm>
-          <a:prstGeom prst="rect">
-            <a:avLst/>
-          </a:prstGeom>
-          <a:solidFill>
-            <a:srgbClr val="F8FAFC"/>
-          </a:solidFill>
-          <a:ln/>
-        </p:spPr>
-      </p:sp>
-      <p:sp>
-        <p:nvSpPr>
-          <p:cNvPr id="7" name="Text 5"/>
-          <p:cNvSpPr/>
-          <p:nvPr/>
-        </p:nvSpPr>
-        <p:spPr>
-          <a:xfrm>
-            <a:off x="914400" y="1965960"/>
-            <a:ext cx="4114800" cy="713232"/>
-          </a:xfrm>
-          <a:prstGeom prst="rect">
-            <a:avLst/>
-          </a:prstGeom>
-          <a:noFill/>
-          <a:ln/>
-        </p:spPr>
-        <p:txBody>
-          <a:bodyPr wrap="square" lIns="0" tIns="0" rIns="0" bIns="0" rtlCol="0" anchor="ctr"/>
-          <a:lstStyle/>
-          <a:p>
-            <a:pPr indent="0" marL="0">
-              <a:buNone/>
-            </a:pPr>
-            <a:r>
-              <a:rPr lang="en-US" sz="1300" b="1" spc="100" kern="0" dirty="0">
-                <a:solidFill>
-                  <a:srgbClr val="0F172A"/>
-                </a:solidFill>
-                <a:latin typeface="Plus Jakarta Sans" pitchFamily="34" charset="0"/>
-                <a:ea typeface="Plus Jakarta Sans" pitchFamily="34" charset="-122"/>
-                <a:cs typeface="Plus Jakarta Sans" pitchFamily="34" charset="-120"/>
-              </a:rPr>
-              <a:t>RACE CHART · LIVE-RANKING</a:t>
-            </a:r>
-            <a:endParaRPr lang="en-US" sz="1300" dirty="0"/>
-          </a:p>
-        </p:txBody>
-      </p:sp>
-      <p:sp>
-        <p:nvSpPr>
-          <p:cNvPr id="8" name="Shape 6"/>
-          <p:cNvSpPr/>
-          <p:nvPr/>
-        </p:nvSpPr>
-        <p:spPr>
-          <a:xfrm>
-            <a:off x="5897880" y="2121408"/>
-            <a:ext cx="1325880" cy="411480"/>
-          </a:xfrm>
-          <a:prstGeom prst="roundRect">
-            <a:avLst>
-              <a:gd name="adj" fmla="val 13333"/>
-            </a:avLst>
-          </a:prstGeom>
-          <a:solidFill>
-            <a:srgbClr val="FCE7F3"/>
-          </a:solidFill>
-          <a:ln w="19050">
-            <a:solidFill>
-              <a:srgbClr val="0F172A"/>
-            </a:solidFill>
-            <a:prstDash val="solid"/>
-          </a:ln>
-        </p:spPr>
-      </p:sp>
-      <p:sp>
-        <p:nvSpPr>
-          <p:cNvPr id="9" name="Text 7"/>
-          <p:cNvSpPr/>
-          <p:nvPr/>
-        </p:nvSpPr>
-        <p:spPr>
-          <a:xfrm>
-            <a:off x="5897880" y="2121408"/>
-            <a:ext cx="1325880" cy="411480"/>
-          </a:xfrm>
-          <a:prstGeom prst="rect">
-            <a:avLst/>
-          </a:prstGeom>
-          <a:noFill/>
-          <a:ln/>
-        </p:spPr>
-        <p:txBody>
-          <a:bodyPr wrap="square" lIns="0" tIns="0" rIns="0" bIns="0" rtlCol="0" anchor="ctr"/>
-          <a:lstStyle/>
-          <a:p>
-            <a:pPr algn="ctr" indent="0" marL="0">
-              <a:buNone/>
-            </a:pPr>
-            <a:r>
-              <a:rPr lang="en-US" sz="1700" b="1" dirty="0">
-                <a:solidFill>
-                  <a:srgbClr val="EC4899"/>
-                </a:solidFill>
-                <a:latin typeface="Plus Jakarta Sans" pitchFamily="34" charset="0"/>
-                <a:ea typeface="Plus Jakarta Sans" pitchFamily="34" charset="-122"/>
-                <a:cs typeface="Plus Jakarta Sans" pitchFamily="34" charset="-120"/>
-              </a:rPr>
-              <a:t>1937</a:t>
-            </a:r>
-            <a:endParaRPr lang="en-US" sz="1700" dirty="0"/>
-          </a:p>
-        </p:txBody>
-      </p:sp>
-      <p:sp>
-        <p:nvSpPr>
-          <p:cNvPr id="10" name="Text 8"/>
-          <p:cNvSpPr/>
-          <p:nvPr/>
-        </p:nvSpPr>
-        <p:spPr>
-          <a:xfrm>
-            <a:off x="868680" y="2926080"/>
-            <a:ext cx="320040" cy="475488"/>
-          </a:xfrm>
-          <a:prstGeom prst="rect">
-            <a:avLst/>
-          </a:prstGeom>
-          <a:noFill/>
-          <a:ln/>
-        </p:spPr>
-        <p:txBody>
-          <a:bodyPr wrap="square" lIns="0" tIns="0" rIns="0" bIns="0" rtlCol="0" anchor="ctr"/>
-          <a:lstStyle/>
-          <a:p>
-            <a:pPr algn="ctr" indent="0" marL="0">
-              <a:buNone/>
-            </a:pPr>
-            <a:r>
-              <a:rPr lang="en-US" sz="1800" b="1" dirty="0">
-                <a:solidFill>
-                  <a:srgbClr val="0F172A"/>
-                </a:solidFill>
-                <a:latin typeface="Plus Jakarta Sans" pitchFamily="34" charset="0"/>
-                <a:ea typeface="Plus Jakarta Sans" pitchFamily="34" charset="-122"/>
-                <a:cs typeface="Plus Jakarta Sans" pitchFamily="34" charset="-120"/>
-              </a:rPr>
-              <a:t>1</a:t>
-            </a:r>
-            <a:endParaRPr lang="en-US" sz="1800" dirty="0"/>
-          </a:p>
-        </p:txBody>
-      </p:sp>
-      <p:sp>
-        <p:nvSpPr>
-          <p:cNvPr id="11" name="Shape 9"/>
-          <p:cNvSpPr/>
-          <p:nvPr/>
-        </p:nvSpPr>
-        <p:spPr>
-          <a:xfrm>
-            <a:off x="1234440" y="2962656"/>
-            <a:ext cx="566928" cy="402336"/>
-          </a:xfrm>
-          <a:prstGeom prst="roundRect">
-            <a:avLst>
-              <a:gd name="adj" fmla="val 11364"/>
-            </a:avLst>
-          </a:prstGeom>
-          <a:solidFill>
-            <a:srgbClr val="0F172A"/>
-          </a:solidFill>
-          <a:ln/>
-        </p:spPr>
-      </p:sp>
-      <p:sp>
-        <p:nvSpPr>
-          <p:cNvPr id="12" name="Text 10"/>
-          <p:cNvSpPr/>
-          <p:nvPr/>
-        </p:nvSpPr>
-        <p:spPr>
-          <a:xfrm>
-            <a:off x="1234440" y="2962656"/>
-            <a:ext cx="566928" cy="402336"/>
-          </a:xfrm>
-          <a:prstGeom prst="rect">
-            <a:avLst/>
-          </a:prstGeom>
-          <a:noFill/>
-          <a:ln/>
-        </p:spPr>
-        <p:txBody>
-          <a:bodyPr wrap="square" lIns="0" tIns="0" rIns="0" bIns="0" rtlCol="0" anchor="ctr"/>
-          <a:lstStyle/>
-          <a:p>
-            <a:pPr algn="ctr" indent="0" marL="0">
-              <a:buNone/>
-            </a:pPr>
-            <a:r>
-              <a:rPr lang="en-US" sz="1200" b="1" dirty="0">
-                <a:solidFill>
-                  <a:srgbClr val="FFFFFF"/>
-                </a:solidFill>
-                <a:latin typeface="Plus Jakarta Sans" pitchFamily="34" charset="0"/>
-                <a:ea typeface="Plus Jakarta Sans" pitchFamily="34" charset="-122"/>
-                <a:cs typeface="Plus Jakarta Sans" pitchFamily="34" charset="-120"/>
-              </a:rPr>
-              <a:t>BS</a:t>
-            </a:r>
-            <a:endParaRPr lang="en-US" sz="1200" dirty="0"/>
-          </a:p>
-        </p:txBody>
-      </p:sp>
-      <p:sp>
-        <p:nvSpPr>
-          <p:cNvPr id="13" name="Shape 11"/>
-          <p:cNvSpPr/>
-          <p:nvPr/>
-        </p:nvSpPr>
-        <p:spPr>
-          <a:xfrm>
-            <a:off x="1874520" y="2944368"/>
-            <a:ext cx="4297680" cy="438912"/>
-          </a:xfrm>
-          <a:prstGeom prst="roundRect">
-            <a:avLst>
-              <a:gd name="adj" fmla="val 10417"/>
-            </a:avLst>
-          </a:prstGeom>
-          <a:solidFill>
-            <a:srgbClr val="D4AF37"/>
-          </a:solidFill>
-          <a:ln w="25400">
-            <a:solidFill>
-              <a:srgbClr val="0F172A"/>
-            </a:solidFill>
-            <a:prstDash val="solid"/>
-          </a:ln>
-          <a:effectLst>
-            <a:outerShdw sx="100000" sy="100000" kx="0" ky="0" algn="bl" rotWithShape="0" blurRad="101600" dist="31750" dir="8100000">
-              <a:srgbClr val="0f172a">
-                <a:alpha val="100000"/>
-              </a:srgbClr>
-            </a:outerShdw>
-          </a:effectLst>
-        </p:spPr>
-      </p:sp>
-      <p:sp>
-        <p:nvSpPr>
-          <p:cNvPr id="14" name="Text 12"/>
-          <p:cNvSpPr/>
-          <p:nvPr/>
-        </p:nvSpPr>
-        <p:spPr>
-          <a:xfrm>
-            <a:off x="2011680" y="2944368"/>
-            <a:ext cx="4114800" cy="438912"/>
-          </a:xfrm>
-          <a:prstGeom prst="rect">
-            <a:avLst/>
-          </a:prstGeom>
-          <a:noFill/>
-          <a:ln/>
-        </p:spPr>
-        <p:txBody>
-          <a:bodyPr wrap="square" lIns="0" tIns="0" rIns="0" bIns="0" rtlCol="0" anchor="ctr"/>
-          <a:lstStyle/>
-          <a:p>
-            <a:pPr indent="0" marL="0">
-              <a:buNone/>
-            </a:pPr>
-            <a:r>
-              <a:rPr lang="en-US" sz="1250" b="1" dirty="0">
-                <a:solidFill>
-                  <a:srgbClr val="FFFFFF"/>
-                </a:solidFill>
-                <a:latin typeface="Plus Jakarta Sans" pitchFamily="34" charset="0"/>
-                <a:ea typeface="Plus Jakarta Sans" pitchFamily="34" charset="-122"/>
-                <a:cs typeface="Plus Jakarta Sans" pitchFamily="34" charset="-120"/>
-              </a:rPr>
-              <a:t>Basel-Stadt</a:t>
-            </a:r>
-            <a:endParaRPr lang="en-US" sz="1250" dirty="0"/>
-          </a:p>
-        </p:txBody>
-      </p:sp>
-      <p:sp>
-        <p:nvSpPr>
-          <p:cNvPr id="15" name="Text 13"/>
-          <p:cNvSpPr/>
-          <p:nvPr/>
-        </p:nvSpPr>
-        <p:spPr>
-          <a:xfrm>
-            <a:off x="6263640" y="2944368"/>
-            <a:ext cx="914400" cy="438912"/>
-          </a:xfrm>
-          <a:prstGeom prst="rect">
-            <a:avLst/>
-          </a:prstGeom>
-          <a:noFill/>
-          <a:ln/>
-        </p:spPr>
-        <p:txBody>
-          <a:bodyPr wrap="square" lIns="0" tIns="0" rIns="0" bIns="0" rtlCol="0" anchor="ctr"/>
-          <a:lstStyle/>
-          <a:p>
-            <a:pPr indent="0" marL="0">
-              <a:buNone/>
-            </a:pPr>
-            <a:r>
-              <a:rPr lang="en-US" sz="1300" b="1" dirty="0">
-                <a:solidFill>
-                  <a:srgbClr val="0F172A"/>
-                </a:solidFill>
-                <a:latin typeface="Plus Jakarta Sans" pitchFamily="34" charset="0"/>
-                <a:ea typeface="Plus Jakarta Sans" pitchFamily="34" charset="-122"/>
-                <a:cs typeface="Plus Jakarta Sans" pitchFamily="34" charset="-120"/>
-              </a:rPr>
-              <a:t>99.8%</a:t>
-            </a:r>
-            <a:endParaRPr lang="en-US" sz="1300" dirty="0"/>
-          </a:p>
-        </p:txBody>
-      </p:sp>
-      <p:sp>
-        <p:nvSpPr>
-          <p:cNvPr id="16" name="Text 14"/>
-          <p:cNvSpPr/>
-          <p:nvPr/>
-        </p:nvSpPr>
-        <p:spPr>
-          <a:xfrm>
-            <a:off x="868680" y="3529584"/>
-            <a:ext cx="320040" cy="475488"/>
-          </a:xfrm>
-          <a:prstGeom prst="rect">
-            <a:avLst/>
-          </a:prstGeom>
-          <a:noFill/>
-          <a:ln/>
-        </p:spPr>
-        <p:txBody>
-          <a:bodyPr wrap="square" lIns="0" tIns="0" rIns="0" bIns="0" rtlCol="0" anchor="ctr"/>
-          <a:lstStyle/>
-          <a:p>
-            <a:pPr algn="ctr" indent="0" marL="0">
-              <a:buNone/>
-            </a:pPr>
-            <a:r>
-              <a:rPr lang="en-US" sz="1800" b="1" dirty="0">
-                <a:solidFill>
-                  <a:srgbClr val="0F172A"/>
-                </a:solidFill>
-                <a:latin typeface="Plus Jakarta Sans" pitchFamily="34" charset="0"/>
-                <a:ea typeface="Plus Jakarta Sans" pitchFamily="34" charset="-122"/>
-                <a:cs typeface="Plus Jakarta Sans" pitchFamily="34" charset="-120"/>
-              </a:rPr>
-              <a:t>2</a:t>
-            </a:r>
-            <a:endParaRPr lang="en-US" sz="1800" dirty="0"/>
-          </a:p>
-        </p:txBody>
-      </p:sp>
-      <p:sp>
-        <p:nvSpPr>
-          <p:cNvPr id="17" name="Shape 15"/>
-          <p:cNvSpPr/>
-          <p:nvPr/>
-        </p:nvSpPr>
-        <p:spPr>
-          <a:xfrm>
-            <a:off x="1234440" y="3566160"/>
-            <a:ext cx="566928" cy="402336"/>
-          </a:xfrm>
-          <a:prstGeom prst="roundRect">
-            <a:avLst>
-              <a:gd name="adj" fmla="val 11364"/>
-            </a:avLst>
-          </a:prstGeom>
-          <a:solidFill>
-            <a:srgbClr val="0F172A"/>
-          </a:solidFill>
-          <a:ln/>
-        </p:spPr>
-      </p:sp>
-      <p:sp>
-        <p:nvSpPr>
-          <p:cNvPr id="18" name="Text 16"/>
-          <p:cNvSpPr/>
-          <p:nvPr/>
-        </p:nvSpPr>
-        <p:spPr>
-          <a:xfrm>
-            <a:off x="1234440" y="3566160"/>
-            <a:ext cx="566928" cy="402336"/>
-          </a:xfrm>
-          <a:prstGeom prst="rect">
-            <a:avLst/>
-          </a:prstGeom>
-          <a:noFill/>
-          <a:ln/>
-        </p:spPr>
-        <p:txBody>
-          <a:bodyPr wrap="square" lIns="0" tIns="0" rIns="0" bIns="0" rtlCol="0" anchor="ctr"/>
-          <a:lstStyle/>
-          <a:p>
-            <a:pPr algn="ctr" indent="0" marL="0">
-              <a:buNone/>
-            </a:pPr>
-            <a:r>
-              <a:rPr lang="en-US" sz="1200" b="1" dirty="0">
-                <a:solidFill>
-                  <a:srgbClr val="FFFFFF"/>
-                </a:solidFill>
-                <a:latin typeface="Plus Jakarta Sans" pitchFamily="34" charset="0"/>
-                <a:ea typeface="Plus Jakarta Sans" pitchFamily="34" charset="-122"/>
-                <a:cs typeface="Plus Jakarta Sans" pitchFamily="34" charset="-120"/>
-              </a:rPr>
-              <a:t>SH</a:t>
-            </a:r>
-            <a:endParaRPr lang="en-US" sz="1200" dirty="0"/>
-          </a:p>
-        </p:txBody>
-      </p:sp>
-      <p:sp>
-        <p:nvSpPr>
-          <p:cNvPr id="19" name="Shape 17"/>
-          <p:cNvSpPr/>
-          <p:nvPr/>
-        </p:nvSpPr>
-        <p:spPr>
-          <a:xfrm>
-            <a:off x="1874520" y="3547872"/>
-            <a:ext cx="3977640" cy="438912"/>
-          </a:xfrm>
-          <a:prstGeom prst="roundRect">
-            <a:avLst>
-              <a:gd name="adj" fmla="val 10417"/>
-            </a:avLst>
-          </a:prstGeom>
-          <a:solidFill>
-            <a:srgbClr val="94A3B8"/>
-          </a:solidFill>
-          <a:ln w="25400">
-            <a:solidFill>
-              <a:srgbClr val="0F172A"/>
-            </a:solidFill>
-            <a:prstDash val="solid"/>
-          </a:ln>
-          <a:effectLst>
-            <a:outerShdw sx="100000" sy="100000" kx="0" ky="0" algn="bl" rotWithShape="0" blurRad="101600" dist="31750" dir="8100000">
-              <a:srgbClr val="0f172a">
-                <a:alpha val="100000"/>
-              </a:srgbClr>
-            </a:outerShdw>
-          </a:effectLst>
-        </p:spPr>
-      </p:sp>
-      <p:sp>
-        <p:nvSpPr>
-          <p:cNvPr id="20" name="Text 18"/>
-          <p:cNvSpPr/>
-          <p:nvPr/>
-        </p:nvSpPr>
-        <p:spPr>
-          <a:xfrm>
-            <a:off x="2011680" y="3547872"/>
-            <a:ext cx="3794760" cy="438912"/>
-          </a:xfrm>
-          <a:prstGeom prst="rect">
-            <a:avLst/>
-          </a:prstGeom>
-          <a:noFill/>
-          <a:ln/>
-        </p:spPr>
-        <p:txBody>
-          <a:bodyPr wrap="square" lIns="0" tIns="0" rIns="0" bIns="0" rtlCol="0" anchor="ctr"/>
-          <a:lstStyle/>
-          <a:p>
-            <a:pPr indent="0" marL="0">
-              <a:buNone/>
-            </a:pPr>
-            <a:r>
-              <a:rPr lang="en-US" sz="1250" b="1" dirty="0">
-                <a:solidFill>
-                  <a:srgbClr val="0F172A"/>
-                </a:solidFill>
-                <a:latin typeface="Plus Jakarta Sans" pitchFamily="34" charset="0"/>
-                <a:ea typeface="Plus Jakarta Sans" pitchFamily="34" charset="-122"/>
-                <a:cs typeface="Plus Jakarta Sans" pitchFamily="34" charset="-120"/>
-              </a:rPr>
-              <a:t>Schaffhausen</a:t>
-            </a:r>
-            <a:endParaRPr lang="en-US" sz="1250" dirty="0"/>
-          </a:p>
-        </p:txBody>
-      </p:sp>
-      <p:sp>
-        <p:nvSpPr>
-          <p:cNvPr id="21" name="Text 19"/>
-          <p:cNvSpPr/>
-          <p:nvPr/>
-        </p:nvSpPr>
-        <p:spPr>
-          <a:xfrm>
-            <a:off x="5943600" y="3547872"/>
-            <a:ext cx="914400" cy="438912"/>
-          </a:xfrm>
-          <a:prstGeom prst="rect">
-            <a:avLst/>
-          </a:prstGeom>
-          <a:noFill/>
-          <a:ln/>
-        </p:spPr>
-        <p:txBody>
-          <a:bodyPr wrap="square" lIns="0" tIns="0" rIns="0" bIns="0" rtlCol="0" anchor="ctr"/>
-          <a:lstStyle/>
-          <a:p>
-            <a:pPr indent="0" marL="0">
-              <a:buNone/>
-            </a:pPr>
-            <a:r>
-              <a:rPr lang="en-US" sz="1300" b="1" dirty="0">
-                <a:solidFill>
-                  <a:srgbClr val="0F172A"/>
-                </a:solidFill>
-                <a:latin typeface="Plus Jakarta Sans" pitchFamily="34" charset="0"/>
-                <a:ea typeface="Plus Jakarta Sans" pitchFamily="34" charset="-122"/>
-                <a:cs typeface="Plus Jakarta Sans" pitchFamily="34" charset="-120"/>
-              </a:rPr>
-              <a:t>92.4%</a:t>
-            </a:r>
-            <a:endParaRPr lang="en-US" sz="1300" dirty="0"/>
-          </a:p>
-        </p:txBody>
-      </p:sp>
-      <p:sp>
-        <p:nvSpPr>
-          <p:cNvPr id="22" name="Text 20"/>
-          <p:cNvSpPr/>
-          <p:nvPr/>
-        </p:nvSpPr>
-        <p:spPr>
-          <a:xfrm>
-            <a:off x="868680" y="4133088"/>
-            <a:ext cx="320040" cy="475488"/>
-          </a:xfrm>
-          <a:prstGeom prst="rect">
-            <a:avLst/>
-          </a:prstGeom>
-          <a:noFill/>
-          <a:ln/>
-        </p:spPr>
-        <p:txBody>
-          <a:bodyPr wrap="square" lIns="0" tIns="0" rIns="0" bIns="0" rtlCol="0" anchor="ctr"/>
-          <a:lstStyle/>
-          <a:p>
-            <a:pPr algn="ctr" indent="0" marL="0">
-              <a:buNone/>
-            </a:pPr>
-            <a:r>
-              <a:rPr lang="en-US" sz="1800" b="1" dirty="0">
-                <a:solidFill>
-                  <a:srgbClr val="0F172A"/>
-                </a:solidFill>
-                <a:latin typeface="Plus Jakarta Sans" pitchFamily="34" charset="0"/>
-                <a:ea typeface="Plus Jakarta Sans" pitchFamily="34" charset="-122"/>
-                <a:cs typeface="Plus Jakarta Sans" pitchFamily="34" charset="-120"/>
-              </a:rPr>
-              <a:t>3</a:t>
-            </a:r>
-            <a:endParaRPr lang="en-US" sz="1800" dirty="0"/>
-          </a:p>
-        </p:txBody>
-      </p:sp>
-      <p:sp>
-        <p:nvSpPr>
-          <p:cNvPr id="23" name="Shape 21"/>
-          <p:cNvSpPr/>
-          <p:nvPr/>
-        </p:nvSpPr>
-        <p:spPr>
-          <a:xfrm>
-            <a:off x="1234440" y="4169664"/>
-            <a:ext cx="566928" cy="402336"/>
-          </a:xfrm>
-          <a:prstGeom prst="roundRect">
-            <a:avLst>
-              <a:gd name="adj" fmla="val 11364"/>
-            </a:avLst>
-          </a:prstGeom>
-          <a:solidFill>
-            <a:srgbClr val="0F172A"/>
-          </a:solidFill>
-          <a:ln/>
-        </p:spPr>
-      </p:sp>
-      <p:sp>
-        <p:nvSpPr>
-          <p:cNvPr id="24" name="Text 22"/>
-          <p:cNvSpPr/>
-          <p:nvPr/>
-        </p:nvSpPr>
-        <p:spPr>
-          <a:xfrm>
-            <a:off x="1234440" y="4169664"/>
-            <a:ext cx="566928" cy="402336"/>
-          </a:xfrm>
-          <a:prstGeom prst="rect">
-            <a:avLst/>
-          </a:prstGeom>
-          <a:noFill/>
-          <a:ln/>
-        </p:spPr>
-        <p:txBody>
-          <a:bodyPr wrap="square" lIns="0" tIns="0" rIns="0" bIns="0" rtlCol="0" anchor="ctr"/>
-          <a:lstStyle/>
-          <a:p>
-            <a:pPr algn="ctr" indent="0" marL="0">
-              <a:buNone/>
-            </a:pPr>
-            <a:r>
-              <a:rPr lang="en-US" sz="1200" b="1" dirty="0">
-                <a:solidFill>
-                  <a:srgbClr val="FFFFFF"/>
-                </a:solidFill>
-                <a:latin typeface="Plus Jakarta Sans" pitchFamily="34" charset="0"/>
-                <a:ea typeface="Plus Jakarta Sans" pitchFamily="34" charset="-122"/>
-                <a:cs typeface="Plus Jakarta Sans" pitchFamily="34" charset="-120"/>
-              </a:rPr>
-              <a:t>AG</a:t>
-            </a:r>
-            <a:endParaRPr lang="en-US" sz="1200" dirty="0"/>
-          </a:p>
-        </p:txBody>
-      </p:sp>
-      <p:sp>
-        <p:nvSpPr>
-          <p:cNvPr id="25" name="Shape 23"/>
-          <p:cNvSpPr/>
-          <p:nvPr/>
-        </p:nvSpPr>
-        <p:spPr>
-          <a:xfrm>
-            <a:off x="1874520" y="4151376"/>
-            <a:ext cx="3621024" cy="438912"/>
-          </a:xfrm>
-          <a:prstGeom prst="roundRect">
-            <a:avLst>
-              <a:gd name="adj" fmla="val 10417"/>
-            </a:avLst>
-          </a:prstGeom>
-          <a:solidFill>
-            <a:srgbClr val="B45309"/>
-          </a:solidFill>
-          <a:ln w="25400">
-            <a:solidFill>
-              <a:srgbClr val="0F172A"/>
-            </a:solidFill>
-            <a:prstDash val="solid"/>
-          </a:ln>
-          <a:effectLst>
-            <a:outerShdw sx="100000" sy="100000" kx="0" ky="0" algn="bl" rotWithShape="0" blurRad="101600" dist="31750" dir="8100000">
-              <a:srgbClr val="0f172a">
-                <a:alpha val="100000"/>
-              </a:srgbClr>
-            </a:outerShdw>
-          </a:effectLst>
-        </p:spPr>
-      </p:sp>
-      <p:sp>
-        <p:nvSpPr>
-          <p:cNvPr id="26" name="Text 24"/>
-          <p:cNvSpPr/>
-          <p:nvPr/>
-        </p:nvSpPr>
-        <p:spPr>
-          <a:xfrm>
-            <a:off x="2011680" y="4151376"/>
-            <a:ext cx="3438144" cy="438912"/>
-          </a:xfrm>
-          <a:prstGeom prst="rect">
-            <a:avLst/>
-          </a:prstGeom>
-          <a:noFill/>
-          <a:ln/>
-        </p:spPr>
-        <p:txBody>
-          <a:bodyPr wrap="square" lIns="0" tIns="0" rIns="0" bIns="0" rtlCol="0" anchor="ctr"/>
-          <a:lstStyle/>
-          <a:p>
-            <a:pPr indent="0" marL="0">
-              <a:buNone/>
-            </a:pPr>
-            <a:r>
-              <a:rPr lang="en-US" sz="1250" b="1" dirty="0">
-                <a:solidFill>
-                  <a:srgbClr val="0F172A"/>
-                </a:solidFill>
-                <a:latin typeface="Plus Jakarta Sans" pitchFamily="34" charset="0"/>
-                <a:ea typeface="Plus Jakarta Sans" pitchFamily="34" charset="-122"/>
-                <a:cs typeface="Plus Jakarta Sans" pitchFamily="34" charset="-120"/>
-              </a:rPr>
-              <a:t>Aargau</a:t>
-            </a:r>
-            <a:endParaRPr lang="en-US" sz="1250" dirty="0"/>
-          </a:p>
-        </p:txBody>
-      </p:sp>
-      <p:sp>
-        <p:nvSpPr>
-          <p:cNvPr id="27" name="Text 25"/>
-          <p:cNvSpPr/>
-          <p:nvPr/>
-        </p:nvSpPr>
-        <p:spPr>
-          <a:xfrm>
-            <a:off x="5586984" y="4151376"/>
-            <a:ext cx="914400" cy="438912"/>
-          </a:xfrm>
-          <a:prstGeom prst="rect">
-            <a:avLst/>
-          </a:prstGeom>
-          <a:noFill/>
-          <a:ln/>
-        </p:spPr>
-        <p:txBody>
-          <a:bodyPr wrap="square" lIns="0" tIns="0" rIns="0" bIns="0" rtlCol="0" anchor="ctr"/>
-          <a:lstStyle/>
-          <a:p>
-            <a:pPr indent="0" marL="0">
-              <a:buNone/>
-            </a:pPr>
-            <a:r>
-              <a:rPr lang="en-US" sz="1300" b="1" dirty="0">
-                <a:solidFill>
-                  <a:srgbClr val="0F172A"/>
-                </a:solidFill>
-                <a:latin typeface="Plus Jakarta Sans" pitchFamily="34" charset="0"/>
-                <a:ea typeface="Plus Jakarta Sans" pitchFamily="34" charset="-122"/>
-                <a:cs typeface="Plus Jakarta Sans" pitchFamily="34" charset="-120"/>
-              </a:rPr>
-              <a:t>84.1%</a:t>
-            </a:r>
-            <a:endParaRPr lang="en-US" sz="1300" dirty="0"/>
-          </a:p>
-        </p:txBody>
-      </p:sp>
-      <p:sp>
-        <p:nvSpPr>
-          <p:cNvPr id="28" name="Text 26"/>
-          <p:cNvSpPr/>
-          <p:nvPr/>
-        </p:nvSpPr>
-        <p:spPr>
-          <a:xfrm>
-            <a:off x="868680" y="4736592"/>
-            <a:ext cx="320040" cy="475488"/>
-          </a:xfrm>
-          <a:prstGeom prst="rect">
-            <a:avLst/>
-          </a:prstGeom>
-          <a:noFill/>
-          <a:ln/>
-        </p:spPr>
-        <p:txBody>
-          <a:bodyPr wrap="square" lIns="0" tIns="0" rIns="0" bIns="0" rtlCol="0" anchor="ctr"/>
-          <a:lstStyle/>
-          <a:p>
-            <a:pPr algn="ctr" indent="0" marL="0">
-              <a:buNone/>
-            </a:pPr>
-            <a:r>
-              <a:rPr lang="en-US" sz="1800" b="1" dirty="0">
-                <a:solidFill>
-                  <a:srgbClr val="0F172A"/>
-                </a:solidFill>
-                <a:latin typeface="Plus Jakarta Sans" pitchFamily="34" charset="0"/>
-                <a:ea typeface="Plus Jakarta Sans" pitchFamily="34" charset="-122"/>
-                <a:cs typeface="Plus Jakarta Sans" pitchFamily="34" charset="-120"/>
-              </a:rPr>
-              <a:t>4</a:t>
-            </a:r>
-            <a:endParaRPr lang="en-US" sz="1800" dirty="0"/>
-          </a:p>
-        </p:txBody>
-      </p:sp>
-      <p:sp>
-        <p:nvSpPr>
-          <p:cNvPr id="29" name="Shape 27"/>
-          <p:cNvSpPr/>
-          <p:nvPr/>
-        </p:nvSpPr>
-        <p:spPr>
-          <a:xfrm>
-            <a:off x="1234440" y="4773168"/>
-            <a:ext cx="566928" cy="402336"/>
-          </a:xfrm>
-          <a:prstGeom prst="roundRect">
-            <a:avLst>
-              <a:gd name="adj" fmla="val 11364"/>
-            </a:avLst>
-          </a:prstGeom>
-          <a:solidFill>
-            <a:srgbClr val="0F172A"/>
-          </a:solidFill>
-          <a:ln/>
-        </p:spPr>
-      </p:sp>
-      <p:sp>
-        <p:nvSpPr>
-          <p:cNvPr id="30" name="Text 28"/>
-          <p:cNvSpPr/>
-          <p:nvPr/>
-        </p:nvSpPr>
-        <p:spPr>
-          <a:xfrm>
-            <a:off x="1234440" y="4773168"/>
-            <a:ext cx="566928" cy="402336"/>
-          </a:xfrm>
-          <a:prstGeom prst="rect">
-            <a:avLst/>
-          </a:prstGeom>
-          <a:noFill/>
-          <a:ln/>
-        </p:spPr>
-        <p:txBody>
-          <a:bodyPr wrap="square" lIns="0" tIns="0" rIns="0" bIns="0" rtlCol="0" anchor="ctr"/>
-          <a:lstStyle/>
-          <a:p>
-            <a:pPr algn="ctr" indent="0" marL="0">
-              <a:buNone/>
-            </a:pPr>
-            <a:r>
-              <a:rPr lang="en-US" sz="1200" b="1" dirty="0">
-                <a:solidFill>
-                  <a:srgbClr val="FFFFFF"/>
-                </a:solidFill>
-                <a:latin typeface="Plus Jakarta Sans" pitchFamily="34" charset="0"/>
-                <a:ea typeface="Plus Jakarta Sans" pitchFamily="34" charset="-122"/>
-                <a:cs typeface="Plus Jakarta Sans" pitchFamily="34" charset="-120"/>
-              </a:rPr>
-              <a:t>BE</a:t>
-            </a:r>
-            <a:endParaRPr lang="en-US" sz="1200" dirty="0"/>
-          </a:p>
-        </p:txBody>
-      </p:sp>
-      <p:sp>
-        <p:nvSpPr>
-          <p:cNvPr id="31" name="Shape 29"/>
-          <p:cNvSpPr/>
-          <p:nvPr/>
-        </p:nvSpPr>
-        <p:spPr>
-          <a:xfrm>
-            <a:off x="1874520" y="4754880"/>
-            <a:ext cx="3072384" cy="438912"/>
-          </a:xfrm>
-          <a:prstGeom prst="roundRect">
-            <a:avLst>
-              <a:gd name="adj" fmla="val 10417"/>
-            </a:avLst>
-          </a:prstGeom>
-          <a:solidFill>
-            <a:srgbClr val="2563EB"/>
-          </a:solidFill>
-          <a:ln w="25400">
-            <a:solidFill>
-              <a:srgbClr val="0F172A"/>
-            </a:solidFill>
-            <a:prstDash val="solid"/>
-          </a:ln>
-          <a:effectLst>
-            <a:outerShdw sx="100000" sy="100000" kx="0" ky="0" algn="bl" rotWithShape="0" blurRad="101600" dist="31750" dir="8100000">
-              <a:srgbClr val="0f172a">
-                <a:alpha val="100000"/>
-              </a:srgbClr>
-            </a:outerShdw>
-          </a:effectLst>
-        </p:spPr>
-      </p:sp>
-      <p:sp>
-        <p:nvSpPr>
-          <p:cNvPr id="32" name="Text 30"/>
-          <p:cNvSpPr/>
-          <p:nvPr/>
-        </p:nvSpPr>
-        <p:spPr>
-          <a:xfrm>
-            <a:off x="2011680" y="4754880"/>
-            <a:ext cx="2889504" cy="438912"/>
-          </a:xfrm>
-          <a:prstGeom prst="rect">
-            <a:avLst/>
-          </a:prstGeom>
-          <a:noFill/>
-          <a:ln/>
-        </p:spPr>
-        <p:txBody>
-          <a:bodyPr wrap="square" lIns="0" tIns="0" rIns="0" bIns="0" rtlCol="0" anchor="ctr"/>
-          <a:lstStyle/>
-          <a:p>
-            <a:pPr indent="0" marL="0">
-              <a:buNone/>
-            </a:pPr>
-            <a:r>
-              <a:rPr lang="en-US" sz="1250" b="1" dirty="0">
-                <a:solidFill>
-                  <a:srgbClr val="0F172A"/>
-                </a:solidFill>
-                <a:latin typeface="Plus Jakarta Sans" pitchFamily="34" charset="0"/>
-                <a:ea typeface="Plus Jakarta Sans" pitchFamily="34" charset="-122"/>
-                <a:cs typeface="Plus Jakarta Sans" pitchFamily="34" charset="-120"/>
-              </a:rPr>
-              <a:t>Bern</a:t>
-            </a:r>
-            <a:endParaRPr lang="en-US" sz="1250" dirty="0"/>
-          </a:p>
-        </p:txBody>
-      </p:sp>
-      <p:sp>
-        <p:nvSpPr>
-          <p:cNvPr id="33" name="Text 31"/>
-          <p:cNvSpPr/>
-          <p:nvPr/>
-        </p:nvSpPr>
-        <p:spPr>
-          <a:xfrm>
-            <a:off x="5038344" y="4754880"/>
-            <a:ext cx="914400" cy="438912"/>
-          </a:xfrm>
-          <a:prstGeom prst="rect">
-            <a:avLst/>
-          </a:prstGeom>
-          <a:noFill/>
-          <a:ln/>
-        </p:spPr>
-        <p:txBody>
-          <a:bodyPr wrap="square" lIns="0" tIns="0" rIns="0" bIns="0" rtlCol="0" anchor="ctr"/>
-          <a:lstStyle/>
-          <a:p>
-            <a:pPr indent="0" marL="0">
-              <a:buNone/>
-            </a:pPr>
-            <a:r>
-              <a:rPr lang="en-US" sz="1300" b="1" dirty="0">
-                <a:solidFill>
-                  <a:srgbClr val="0F172A"/>
-                </a:solidFill>
-                <a:latin typeface="Plus Jakarta Sans" pitchFamily="34" charset="0"/>
-                <a:ea typeface="Plus Jakarta Sans" pitchFamily="34" charset="-122"/>
-                <a:cs typeface="Plus Jakarta Sans" pitchFamily="34" charset="-120"/>
-              </a:rPr>
-              <a:t>71.3%</a:t>
-            </a:r>
-            <a:endParaRPr lang="en-US" sz="1300" dirty="0"/>
-          </a:p>
-        </p:txBody>
-      </p:sp>
-      <p:sp>
-        <p:nvSpPr>
-          <p:cNvPr id="34" name="Text 32"/>
-          <p:cNvSpPr/>
-          <p:nvPr/>
-        </p:nvSpPr>
-        <p:spPr>
-          <a:xfrm>
-            <a:off x="868680" y="5340096"/>
-            <a:ext cx="320040" cy="475488"/>
-          </a:xfrm>
-          <a:prstGeom prst="rect">
-            <a:avLst/>
-          </a:prstGeom>
-          <a:noFill/>
-          <a:ln/>
-        </p:spPr>
-        <p:txBody>
-          <a:bodyPr wrap="square" lIns="0" tIns="0" rIns="0" bIns="0" rtlCol="0" anchor="ctr"/>
-          <a:lstStyle/>
-          <a:p>
-            <a:pPr algn="ctr" indent="0" marL="0">
-              <a:buNone/>
-            </a:pPr>
-            <a:r>
-              <a:rPr lang="en-US" sz="1800" b="1" dirty="0">
-                <a:solidFill>
-                  <a:srgbClr val="0F172A"/>
-                </a:solidFill>
-                <a:latin typeface="Plus Jakarta Sans" pitchFamily="34" charset="0"/>
-                <a:ea typeface="Plus Jakarta Sans" pitchFamily="34" charset="-122"/>
-                <a:cs typeface="Plus Jakarta Sans" pitchFamily="34" charset="-120"/>
-              </a:rPr>
-              <a:t>5</a:t>
-            </a:r>
-            <a:endParaRPr lang="en-US" sz="1800" dirty="0"/>
-          </a:p>
-        </p:txBody>
-      </p:sp>
-      <p:sp>
-        <p:nvSpPr>
-          <p:cNvPr id="35" name="Shape 33"/>
-          <p:cNvSpPr/>
-          <p:nvPr/>
-        </p:nvSpPr>
-        <p:spPr>
-          <a:xfrm>
-            <a:off x="1234440" y="5376672"/>
-            <a:ext cx="566928" cy="402336"/>
-          </a:xfrm>
-          <a:prstGeom prst="roundRect">
-            <a:avLst>
-              <a:gd name="adj" fmla="val 11364"/>
-            </a:avLst>
-          </a:prstGeom>
-          <a:solidFill>
-            <a:srgbClr val="0F172A"/>
-          </a:solidFill>
-          <a:ln/>
-        </p:spPr>
-      </p:sp>
-      <p:sp>
-        <p:nvSpPr>
-          <p:cNvPr id="36" name="Text 34"/>
-          <p:cNvSpPr/>
-          <p:nvPr/>
-        </p:nvSpPr>
-        <p:spPr>
-          <a:xfrm>
-            <a:off x="1234440" y="5376672"/>
-            <a:ext cx="566928" cy="402336"/>
-          </a:xfrm>
-          <a:prstGeom prst="rect">
-            <a:avLst/>
-          </a:prstGeom>
-          <a:noFill/>
-          <a:ln/>
-        </p:spPr>
-        <p:txBody>
-          <a:bodyPr wrap="square" lIns="0" tIns="0" rIns="0" bIns="0" rtlCol="0" anchor="ctr"/>
-          <a:lstStyle/>
-          <a:p>
-            <a:pPr algn="ctr" indent="0" marL="0">
-              <a:buNone/>
-            </a:pPr>
-            <a:r>
-              <a:rPr lang="en-US" sz="1200" b="1" dirty="0">
-                <a:solidFill>
-                  <a:srgbClr val="FFFFFF"/>
-                </a:solidFill>
-                <a:latin typeface="Plus Jakarta Sans" pitchFamily="34" charset="0"/>
-                <a:ea typeface="Plus Jakarta Sans" pitchFamily="34" charset="-122"/>
-                <a:cs typeface="Plus Jakarta Sans" pitchFamily="34" charset="-120"/>
-              </a:rPr>
-              <a:t>ZH</a:t>
-            </a:r>
-            <a:endParaRPr lang="en-US" sz="1200" dirty="0"/>
-          </a:p>
-        </p:txBody>
-      </p:sp>
-      <p:sp>
-        <p:nvSpPr>
-          <p:cNvPr id="37" name="Shape 35"/>
-          <p:cNvSpPr/>
-          <p:nvPr/>
-        </p:nvSpPr>
-        <p:spPr>
-          <a:xfrm>
-            <a:off x="1874520" y="5358384"/>
-            <a:ext cx="2788920" cy="438912"/>
-          </a:xfrm>
-          <a:prstGeom prst="roundRect">
-            <a:avLst>
-              <a:gd name="adj" fmla="val 10417"/>
-            </a:avLst>
-          </a:prstGeom>
-          <a:solidFill>
-            <a:srgbClr val="CBD5E1"/>
-          </a:solidFill>
-          <a:ln w="25400">
-            <a:solidFill>
-              <a:srgbClr val="0F172A"/>
-            </a:solidFill>
-            <a:prstDash val="solid"/>
-          </a:ln>
-          <a:effectLst>
-            <a:outerShdw sx="100000" sy="100000" kx="0" ky="0" algn="bl" rotWithShape="0" blurRad="101600" dist="31750" dir="8100000">
-              <a:srgbClr val="0f172a">
-                <a:alpha val="100000"/>
-              </a:srgbClr>
-            </a:outerShdw>
-          </a:effectLst>
-        </p:spPr>
-      </p:sp>
-      <p:sp>
-        <p:nvSpPr>
-          <p:cNvPr id="38" name="Text 36"/>
-          <p:cNvSpPr/>
-          <p:nvPr/>
-        </p:nvSpPr>
-        <p:spPr>
-          <a:xfrm>
-            <a:off x="2011680" y="5358384"/>
-            <a:ext cx="2606040" cy="438912"/>
-          </a:xfrm>
-          <a:prstGeom prst="rect">
-            <a:avLst/>
-          </a:prstGeom>
-          <a:noFill/>
-          <a:ln/>
-        </p:spPr>
-        <p:txBody>
-          <a:bodyPr wrap="square" lIns="0" tIns="0" rIns="0" bIns="0" rtlCol="0" anchor="ctr"/>
-          <a:lstStyle/>
-          <a:p>
-            <a:pPr indent="0" marL="0">
-              <a:buNone/>
-            </a:pPr>
-            <a:r>
-              <a:rPr lang="en-US" sz="1250" b="1" dirty="0">
-                <a:solidFill>
-                  <a:srgbClr val="0F172A"/>
-                </a:solidFill>
-                <a:latin typeface="Plus Jakarta Sans" pitchFamily="34" charset="0"/>
-                <a:ea typeface="Plus Jakarta Sans" pitchFamily="34" charset="-122"/>
-                <a:cs typeface="Plus Jakarta Sans" pitchFamily="34" charset="-120"/>
-              </a:rPr>
-              <a:t>Zürich</a:t>
-            </a:r>
-            <a:endParaRPr lang="en-US" sz="1250" dirty="0"/>
-          </a:p>
-        </p:txBody>
-      </p:sp>
-      <p:sp>
-        <p:nvSpPr>
-          <p:cNvPr id="39" name="Text 37"/>
-          <p:cNvSpPr/>
-          <p:nvPr/>
-        </p:nvSpPr>
-        <p:spPr>
-          <a:xfrm>
-            <a:off x="4754880" y="5358384"/>
-            <a:ext cx="914400" cy="438912"/>
-          </a:xfrm>
-          <a:prstGeom prst="rect">
-            <a:avLst/>
-          </a:prstGeom>
-          <a:noFill/>
-          <a:ln/>
-        </p:spPr>
-        <p:txBody>
-          <a:bodyPr wrap="square" lIns="0" tIns="0" rIns="0" bIns="0" rtlCol="0" anchor="ctr"/>
-          <a:lstStyle/>
-          <a:p>
-            <a:pPr indent="0" marL="0">
-              <a:buNone/>
-            </a:pPr>
-            <a:r>
-              <a:rPr lang="en-US" sz="1300" b="1" dirty="0">
-                <a:solidFill>
-                  <a:srgbClr val="0F172A"/>
-                </a:solidFill>
-                <a:latin typeface="Plus Jakarta Sans" pitchFamily="34" charset="0"/>
-                <a:ea typeface="Plus Jakarta Sans" pitchFamily="34" charset="-122"/>
-                <a:cs typeface="Plus Jakarta Sans" pitchFamily="34" charset="-120"/>
-              </a:rPr>
-              <a:t>64.7%</a:t>
-            </a:r>
-            <a:endParaRPr lang="en-US" sz="1300" dirty="0"/>
-          </a:p>
-        </p:txBody>
-      </p:sp>
-      <p:sp>
-        <p:nvSpPr>
-          <p:cNvPr id="40" name="Shape 38"/>
-          <p:cNvSpPr/>
-          <p:nvPr/>
-        </p:nvSpPr>
-        <p:spPr>
-          <a:xfrm>
-            <a:off x="7589520" y="1965960"/>
-            <a:ext cx="3931920" cy="2514600"/>
-          </a:xfrm>
-          <a:prstGeom prst="roundRect">
-            <a:avLst>
-              <a:gd name="adj" fmla="val 4727"/>
-            </a:avLst>
-          </a:prstGeom>
-          <a:solidFill>
-            <a:srgbClr val="8B5CF6"/>
-          </a:solidFill>
-          <a:ln w="31750">
-            <a:solidFill>
-              <a:srgbClr val="0F172A"/>
-            </a:solidFill>
-            <a:prstDash val="solid"/>
-          </a:ln>
-          <a:effectLst>
-            <a:outerShdw sx="100000" sy="100000" kx="0" ky="0" algn="bl" rotWithShape="0" blurRad="101600" dist="63500" dir="8100000">
-              <a:srgbClr val="0f172a">
-                <a:alpha val="100000"/>
-              </a:srgbClr>
-            </a:outerShdw>
-          </a:effectLst>
-        </p:spPr>
-      </p:sp>
-      <p:sp>
-        <p:nvSpPr>
-          <p:cNvPr id="41" name="Shape 39"/>
-          <p:cNvSpPr/>
-          <p:nvPr/>
-        </p:nvSpPr>
-        <p:spPr>
-          <a:xfrm>
-            <a:off x="7863840" y="2240280"/>
-            <a:ext cx="603504" cy="603504"/>
-          </a:xfrm>
-          <a:prstGeom prst="ellipse">
-            <a:avLst/>
-          </a:prstGeom>
-          <a:solidFill>
-            <a:srgbClr val="EC4899"/>
-          </a:solidFill>
-          <a:ln w="25400">
-            <a:solidFill>
-              <a:srgbClr val="0F172A"/>
-            </a:solidFill>
-            <a:prstDash val="solid"/>
-          </a:ln>
-          <a:effectLst>
-            <a:outerShdw sx="100000" sy="100000" kx="0" ky="0" algn="bl" rotWithShape="0" blurRad="101600" dist="31750" dir="8100000">
-              <a:srgbClr val="0f172a">
-                <a:alpha val="100000"/>
-              </a:srgbClr>
-            </a:outerShdw>
-          </a:effectLst>
-        </p:spPr>
-      </p:sp>
-      <p:pic>
-        <p:nvPicPr>
-          <p:cNvPr id="42" name="Image 0" descr="preencoded.png">    </p:cNvPr>
-          <p:cNvPicPr>
-            <a:picLocks noChangeAspect="1"/>
-          </p:cNvPicPr>
-          <p:nvPr/>
-        </p:nvPicPr>
-        <p:blipFill>
-          <a:blip r:embed="rId1"/>
-          <a:stretch>
-            <a:fillRect/>
-          </a:stretch>
-        </p:blipFill>
-        <p:spPr>
-          <a:xfrm>
-            <a:off x="8026786" y="2403226"/>
-            <a:ext cx="277612" cy="277612"/>
-          </a:xfrm>
-          <a:prstGeom prst="rect">
-            <a:avLst/>
-          </a:prstGeom>
-        </p:spPr>
-      </p:pic>
-      <p:sp>
-        <p:nvSpPr>
-          <p:cNvPr id="43" name="Text 40"/>
-          <p:cNvSpPr/>
-          <p:nvPr/>
-        </p:nvSpPr>
-        <p:spPr>
-          <a:xfrm>
-            <a:off x="8641080" y="2240280"/>
-            <a:ext cx="2651760" cy="603504"/>
-          </a:xfrm>
-          <a:prstGeom prst="rect">
-            <a:avLst/>
-          </a:prstGeom>
-          <a:noFill/>
-          <a:ln/>
-        </p:spPr>
-        <p:txBody>
-          <a:bodyPr wrap="square" lIns="0" tIns="0" rIns="0" bIns="0" rtlCol="0" anchor="ctr"/>
-          <a:lstStyle/>
-          <a:p>
-            <a:pPr indent="0" marL="0">
-              <a:buNone/>
-            </a:pPr>
-            <a:r>
-              <a:rPr lang="en-US" sz="1600" b="1" dirty="0">
-                <a:solidFill>
-                  <a:srgbClr val="FFFFFF"/>
-                </a:solidFill>
-                <a:latin typeface="Plus Jakarta Sans" pitchFamily="34" charset="0"/>
-                <a:ea typeface="Plus Jakarta Sans" pitchFamily="34" charset="-122"/>
-                <a:cs typeface="Plus Jakarta Sans" pitchFamily="34" charset="-120"/>
-              </a:rPr>
-              <a:t>AI-Sportkommentator</a:t>
-            </a:r>
-            <a:endParaRPr lang="en-US" sz="1600" dirty="0"/>
-          </a:p>
-        </p:txBody>
-      </p:sp>
-      <p:sp>
-        <p:nvSpPr>
-          <p:cNvPr id="44" name="Shape 41"/>
-          <p:cNvSpPr/>
-          <p:nvPr/>
-        </p:nvSpPr>
-        <p:spPr>
-          <a:xfrm>
-            <a:off x="7863840" y="3063240"/>
-            <a:ext cx="3383280" cy="1234440"/>
-          </a:xfrm>
-          <a:prstGeom prst="roundRect">
-            <a:avLst>
-              <a:gd name="adj" fmla="val 7407"/>
-            </a:avLst>
-          </a:prstGeom>
-          <a:solidFill>
-            <a:srgbClr val="FFFFFF"/>
-          </a:solidFill>
-          <a:ln w="25400">
-            <a:solidFill>
-              <a:srgbClr val="0F172A"/>
-            </a:solidFill>
-            <a:prstDash val="solid"/>
-          </a:ln>
-        </p:spPr>
-      </p:sp>
-      <p:sp>
-        <p:nvSpPr>
-          <p:cNvPr id="45" name="Text 42"/>
-          <p:cNvSpPr/>
-          <p:nvPr/>
-        </p:nvSpPr>
-        <p:spPr>
-          <a:xfrm>
-            <a:off x="8028432" y="3108960"/>
-            <a:ext cx="3108960" cy="1143000"/>
-          </a:xfrm>
-          <a:prstGeom prst="rect">
-            <a:avLst/>
-          </a:prstGeom>
-          <a:noFill/>
-          <a:ln/>
-        </p:spPr>
-        <p:txBody>
-          <a:bodyPr wrap="square" lIns="0" tIns="0" rIns="0" bIns="0" rtlCol="0" anchor="ctr"/>
-          <a:lstStyle/>
-          <a:p>
-            <a:pPr indent="0" marL="0">
-              <a:lnSpc>
-                <a:spcPct val="110000"/>
-              </a:lnSpc>
-              <a:buNone/>
-            </a:pPr>
-            <a:r>
-              <a:rPr lang="en-US" sz="1450" b="1" i="1" dirty="0">
-                <a:solidFill>
-                  <a:srgbClr val="0F172A"/>
-                </a:solidFill>
-                <a:latin typeface="Plus Jakarta Sans" pitchFamily="34" charset="0"/>
-                <a:ea typeface="Plus Jakarta Sans" pitchFamily="34" charset="-122"/>
-                <a:cs typeface="Plus Jakarta Sans" pitchFamily="34" charset="-120"/>
-              </a:rPr>
-              <a:t>«Und Basel-Stadt zieht davon — 99.8 Prozent, das gab es noch nie!»</a:t>
-            </a:r>
-            <a:endParaRPr lang="en-US" sz="1450" dirty="0"/>
-          </a:p>
-        </p:txBody>
-      </p:sp>
-      <p:sp>
-        <p:nvSpPr>
-          <p:cNvPr id="46" name="Shape 43"/>
-          <p:cNvSpPr/>
-          <p:nvPr/>
-        </p:nvSpPr>
-        <p:spPr>
-          <a:xfrm>
-            <a:off x="7589520" y="4663440"/>
-            <a:ext cx="3931920" cy="1463040"/>
-          </a:xfrm>
-          <a:prstGeom prst="roundRect">
-            <a:avLst>
-              <a:gd name="adj" fmla="val 8125"/>
-            </a:avLst>
-          </a:prstGeom>
-          <a:solidFill>
-            <a:srgbClr val="FCE7F3"/>
-          </a:solidFill>
-          <a:ln w="31750">
-            <a:solidFill>
-              <a:srgbClr val="0F172A"/>
-            </a:solidFill>
-            <a:prstDash val="solid"/>
-          </a:ln>
-          <a:effectLst>
-            <a:outerShdw sx="100000" sy="100000" kx="0" ky="0" algn="bl" rotWithShape="0" blurRad="101600" dist="63500" dir="8100000">
-              <a:srgbClr val="0f172a">
-                <a:alpha val="100000"/>
-              </a:srgbClr>
-            </a:outerShdw>
-          </a:effectLst>
-        </p:spPr>
-      </p:sp>
-      <p:sp>
-        <p:nvSpPr>
-          <p:cNvPr id="47" name="Text 44"/>
-          <p:cNvSpPr/>
-          <p:nvPr/>
-        </p:nvSpPr>
-        <p:spPr>
-          <a:xfrm>
-            <a:off x="7863840" y="4846320"/>
-            <a:ext cx="3383280" cy="274320"/>
-          </a:xfrm>
-          <a:prstGeom prst="rect">
-            <a:avLst/>
-          </a:prstGeom>
-          <a:noFill/>
-          <a:ln/>
-        </p:spPr>
-        <p:txBody>
-          <a:bodyPr wrap="square" lIns="0" tIns="0" rIns="0" bIns="0" rtlCol="0" anchor="ctr"/>
-          <a:lstStyle/>
-          <a:p>
-            <a:pPr indent="0" marL="0">
-              <a:buNone/>
-            </a:pPr>
-            <a:r>
-              <a:rPr lang="en-US" sz="1150" b="1" spc="100" kern="0" dirty="0">
-                <a:solidFill>
-                  <a:srgbClr val="EC4899"/>
-                </a:solidFill>
-                <a:latin typeface="Plus Jakarta Sans" pitchFamily="34" charset="0"/>
-                <a:ea typeface="Plus Jakarta Sans" pitchFamily="34" charset="-122"/>
-                <a:cs typeface="Plus Jakarta Sans" pitchFamily="34" charset="-120"/>
-              </a:rPr>
-              <a:t>DER EFFEKT</a:t>
-            </a:r>
-            <a:endParaRPr lang="en-US" sz="1150" dirty="0"/>
-          </a:p>
-        </p:txBody>
-      </p:sp>
-      <p:sp>
-        <p:nvSpPr>
-          <p:cNvPr id="48" name="Text 45"/>
-          <p:cNvSpPr/>
-          <p:nvPr/>
-        </p:nvSpPr>
-        <p:spPr>
-          <a:xfrm>
-            <a:off x="7863840" y="5166360"/>
-            <a:ext cx="3383280" cy="822960"/>
-          </a:xfrm>
-          <a:prstGeom prst="rect">
-            <a:avLst/>
-          </a:prstGeom>
-          <a:noFill/>
-          <a:ln/>
-        </p:spPr>
-        <p:txBody>
-          <a:bodyPr wrap="square" lIns="0" tIns="0" rIns="0" bIns="0" rtlCol="0" anchor="t"/>
-          <a:lstStyle/>
-          <a:p>
-            <a:pPr indent="0" marL="0">
-              <a:lnSpc>
-                <a:spcPct val="115000"/>
-              </a:lnSpc>
-              <a:buNone/>
-            </a:pPr>
-            <a:r>
-              <a:rPr lang="en-US" sz="1800" b="1" dirty="0">
-                <a:solidFill>
-                  <a:srgbClr val="EC4899"/>
-                </a:solidFill>
-                <a:latin typeface="Plus Jakarta Sans" pitchFamily="34" charset="0"/>
-                <a:ea typeface="Plus Jakarta Sans" pitchFamily="34" charset="-122"/>
-                <a:cs typeface="Plus Jakarta Sans" pitchFamily="34" charset="-120"/>
-              </a:rPr>
-              <a:t>emotional</a:t>
-            </a:r>
-            <a:pPr indent="0" marL="0">
-              <a:lnSpc>
-                <a:spcPct val="115000"/>
-              </a:lnSpc>
-              <a:buNone/>
-            </a:pPr>
-            <a:r>
-              <a:rPr lang="en-US" sz="1800" dirty="0">
-                <a:solidFill>
-                  <a:srgbClr val="475569"/>
-                </a:solidFill>
-                <a:latin typeface="Plus Jakarta Sans" pitchFamily="34" charset="0"/>
-                <a:ea typeface="Plus Jakarta Sans" pitchFamily="34" charset="-122"/>
-                <a:cs typeface="Plus Jakarta Sans" pitchFamily="34" charset="-120"/>
-              </a:rPr>
-              <a:t> · </a:t>
-            </a:r>
-            <a:pPr indent="0" marL="0">
-              <a:lnSpc>
-                <a:spcPct val="115000"/>
-              </a:lnSpc>
-              <a:buNone/>
-            </a:pPr>
-            <a:r>
-              <a:rPr lang="en-US" sz="1800" b="1" dirty="0">
-                <a:solidFill>
-                  <a:srgbClr val="8B5CF6"/>
-                </a:solidFill>
-                <a:latin typeface="Plus Jakarta Sans" pitchFamily="34" charset="0"/>
-                <a:ea typeface="Plus Jakarta Sans" pitchFamily="34" charset="-122"/>
-                <a:cs typeface="Plus Jakarta Sans" pitchFamily="34" charset="-120"/>
-              </a:rPr>
-              <a:t>verständlich</a:t>
-            </a:r>
-            <a:pPr indent="0" marL="0">
-              <a:lnSpc>
-                <a:spcPct val="115000"/>
-              </a:lnSpc>
-              <a:buNone/>
-            </a:pPr>
-            <a:r>
-              <a:rPr lang="en-US" sz="1800" dirty="0">
-                <a:solidFill>
-                  <a:srgbClr val="475569"/>
-                </a:solidFill>
-                <a:latin typeface="Plus Jakarta Sans" pitchFamily="34" charset="0"/>
-                <a:ea typeface="Plus Jakarta Sans" pitchFamily="34" charset="-122"/>
-                <a:cs typeface="Plus Jakarta Sans" pitchFamily="34" charset="-120"/>
-              </a:rPr>
-              <a:t> · </a:t>
-            </a:r>
-            <a:pPr indent="0" marL="0">
-              <a:lnSpc>
-                <a:spcPct val="115000"/>
-              </a:lnSpc>
-              <a:buNone/>
-            </a:pPr>
-            <a:r>
-              <a:rPr lang="en-US" sz="1800" b="1" dirty="0">
-                <a:solidFill>
-                  <a:srgbClr val="EC4899"/>
-                </a:solidFill>
-                <a:latin typeface="Plus Jakarta Sans" pitchFamily="34" charset="0"/>
-                <a:ea typeface="Plus Jakarta Sans" pitchFamily="34" charset="-122"/>
-                <a:cs typeface="Plus Jakarta Sans" pitchFamily="34" charset="-120"/>
-              </a:rPr>
-              <a:t>unterhaltsam</a:t>
-            </a:r>
-            <a:endParaRPr lang="en-US" sz="1800" dirty="0"/>
           </a:p>
         </p:txBody>
       </p:sp>
@@ -7294,7 +4745,7 @@
 </p:sld>
 </file>
 
-<file path=ppt/slides/slide6.xml><?xml version="1.0" encoding="utf-8"?>
+<file path=ppt/slides/slide7.xml><?xml version="1.0" encoding="utf-8"?>
 <p:sld xmlns:a="http://schemas.openxmlformats.org/drawingml/2006/main" xmlns:r="http://schemas.openxmlformats.org/officeDocument/2006/relationships" xmlns:p="http://schemas.openxmlformats.org/presentationml/2006/main">
   <p:cSld name="Slide 6">
     <p:bg>
@@ -7302,6 +4753,7 @@
         <a:solidFill>
           <a:srgbClr val="F5F6F8"/>
         </a:solidFill>
+        <a:effectLst/>
       </p:bgPr>
     </p:bg>
     <p:spTree>
@@ -7344,13 +4796,20 @@
             <a:prstDash val="solid"/>
           </a:ln>
           <a:effectLst>
-            <a:outerShdw sx="100000" sy="100000" kx="0" ky="0" algn="bl" rotWithShape="0" blurRad="101600" dist="31750" dir="8100000">
-              <a:srgbClr val="0f172a">
+            <a:outerShdw blurRad="101600" dist="31750" dir="8100000" algn="bl" rotWithShape="0">
+              <a:srgbClr val="0F172A">
                 <a:alpha val="100000"/>
               </a:srgbClr>
             </a:outerShdw>
           </a:effectLst>
         </p:spPr>
+        <p:txBody>
+          <a:bodyPr/>
+          <a:lstStyle/>
+          <a:p>
+            <a:endParaRPr lang="de-CH"/>
+          </a:p>
+        </p:txBody>
       </p:sp>
       <p:sp>
         <p:nvSpPr>
@@ -7373,11 +4832,11 @@
           <a:bodyPr wrap="square" lIns="0" tIns="0" rIns="0" bIns="0" rtlCol="0" anchor="ctr"/>
           <a:lstStyle/>
           <a:p>
-            <a:pPr algn="ctr" indent="0" marL="0">
+            <a:pPr marL="0" indent="0" algn="ctr">
               <a:buNone/>
             </a:pPr>
             <a:r>
-              <a:rPr lang="en-US" sz="1050" b="1" spc="120" kern="0" dirty="0">
+              <a:rPr lang="en-US" sz="1050" b="1" kern="0" spc="120" dirty="0">
                 <a:solidFill>
                   <a:srgbClr val="E30613"/>
                 </a:solidFill>
@@ -7412,7 +4871,7 @@
           <a:bodyPr wrap="square" lIns="0" tIns="0" rIns="0" bIns="0" rtlCol="0" anchor="ctr"/>
           <a:lstStyle/>
           <a:p>
-            <a:pPr indent="0" marL="0">
+            <a:pPr marL="0" indent="0">
               <a:buNone/>
             </a:pPr>
             <a:r>
@@ -7456,13 +4915,20 @@
             <a:prstDash val="solid"/>
           </a:ln>
           <a:effectLst>
-            <a:outerShdw sx="100000" sy="100000" kx="0" ky="0" algn="bl" rotWithShape="0" blurRad="101600" dist="63500" dir="8100000">
-              <a:srgbClr val="0f172a">
+            <a:outerShdw blurRad="101600" dist="63500" dir="8100000" algn="bl" rotWithShape="0">
+              <a:srgbClr val="0F172A">
                 <a:alpha val="100000"/>
               </a:srgbClr>
             </a:outerShdw>
           </a:effectLst>
         </p:spPr>
+        <p:txBody>
+          <a:bodyPr/>
+          <a:lstStyle/>
+          <a:p>
+            <a:endParaRPr lang="de-CH"/>
+          </a:p>
+        </p:txBody>
       </p:sp>
       <p:sp>
         <p:nvSpPr>
@@ -7488,38 +4954,21 @@
             <a:prstDash val="solid"/>
           </a:ln>
           <a:effectLst>
-            <a:outerShdw sx="100000" sy="100000" kx="0" ky="0" algn="bl" rotWithShape="0" blurRad="101600" dist="31750" dir="8100000">
-              <a:srgbClr val="0f172a">
+            <a:outerShdw blurRad="101600" dist="31750" dir="8100000" algn="bl" rotWithShape="0">
+              <a:srgbClr val="0F172A">
                 <a:alpha val="100000"/>
               </a:srgbClr>
             </a:outerShdw>
           </a:effectLst>
         </p:spPr>
-      </p:sp>
-      <p:pic>
-        <p:nvPicPr>
-          <p:cNvPr id="7" name="Image 0" descr="preencoded.png">    </p:cNvPr>
-          <p:cNvPicPr>
-            <a:picLocks noChangeAspect="1"/>
-          </p:cNvPicPr>
-          <p:nvPr/>
-        </p:nvPicPr>
-        <p:blipFill>
-          <a:blip r:embed="rId1"/>
-          <a:stretch>
-            <a:fillRect/>
-          </a:stretch>
-        </p:blipFill>
-        <p:spPr>
-          <a:xfrm>
-            <a:off x="1215695" y="2468423"/>
-            <a:ext cx="357530" cy="357530"/>
-          </a:xfrm>
-          <a:prstGeom prst="rect">
-            <a:avLst/>
-          </a:prstGeom>
-        </p:spPr>
-      </p:pic>
+        <p:txBody>
+          <a:bodyPr/>
+          <a:lstStyle/>
+          <a:p>
+            <a:endParaRPr lang="de-CH"/>
+          </a:p>
+        </p:txBody>
+      </p:sp>
       <p:sp>
         <p:nvSpPr>
           <p:cNvPr id="8" name="Text 5"/>
@@ -7541,7 +4990,7 @@
           <a:bodyPr wrap="square" lIns="0" tIns="0" rIns="0" bIns="0" rtlCol="0" anchor="ctr"/>
           <a:lstStyle/>
           <a:p>
-            <a:pPr indent="0" marL="0">
+            <a:pPr marL="0" indent="0">
               <a:buNone/>
             </a:pPr>
             <a:r>
@@ -7580,24 +5029,21 @@
           <a:bodyPr wrap="square" lIns="0" tIns="0" rIns="0" bIns="0" rtlCol="0" anchor="ctr"/>
           <a:lstStyle/>
           <a:p>
-            <a:pPr indent="0" marL="0">
+            <a:pPr marL="0" indent="0">
               <a:lnSpc>
                 <a:spcPct val="110000"/>
               </a:lnSpc>
               <a:buNone/>
             </a:pPr>
             <a:r>
-              <a:rPr lang="en-US" sz="1400" dirty="0">
-                <a:solidFill>
-                  <a:srgbClr val="475569"/>
-                </a:solidFill>
+              <a:rPr lang="en-US" sz="1600" dirty="0">
                 <a:latin typeface="Plus Jakarta Sans" pitchFamily="34" charset="0"/>
                 <a:ea typeface="Plus Jakarta Sans" pitchFamily="34" charset="-122"/>
                 <a:cs typeface="Plus Jakarta Sans" pitchFamily="34" charset="-120"/>
               </a:rPr>
               <a:t>Interaktive Visualisierungen im Browser</a:t>
             </a:r>
-            <a:endParaRPr lang="en-US" sz="1400" dirty="0"/>
+            <a:endParaRPr lang="en-US" sz="1600" dirty="0"/>
           </a:p>
         </p:txBody>
       </p:sp>
@@ -7627,13 +5073,20 @@
             <a:prstDash val="solid"/>
           </a:ln>
           <a:effectLst>
-            <a:outerShdw sx="100000" sy="100000" kx="0" ky="0" algn="bl" rotWithShape="0" blurRad="101600" dist="63500" dir="8100000">
-              <a:srgbClr val="0f172a">
+            <a:outerShdw blurRad="101600" dist="63500" dir="8100000" algn="bl" rotWithShape="0">
+              <a:srgbClr val="0F172A">
                 <a:alpha val="100000"/>
               </a:srgbClr>
             </a:outerShdw>
           </a:effectLst>
         </p:spPr>
+        <p:txBody>
+          <a:bodyPr/>
+          <a:lstStyle/>
+          <a:p>
+            <a:endParaRPr lang="de-CH"/>
+          </a:p>
+        </p:txBody>
       </p:sp>
       <p:sp>
         <p:nvSpPr>
@@ -7659,38 +5112,21 @@
             <a:prstDash val="solid"/>
           </a:ln>
           <a:effectLst>
-            <a:outerShdw sx="100000" sy="100000" kx="0" ky="0" algn="bl" rotWithShape="0" blurRad="101600" dist="31750" dir="8100000">
-              <a:srgbClr val="0f172a">
+            <a:outerShdw blurRad="101600" dist="31750" dir="8100000" algn="bl" rotWithShape="0">
+              <a:srgbClr val="0F172A">
                 <a:alpha val="100000"/>
               </a:srgbClr>
             </a:outerShdw>
           </a:effectLst>
         </p:spPr>
-      </p:sp>
-      <p:pic>
-        <p:nvPicPr>
-          <p:cNvPr id="12" name="Image 1" descr="preencoded.png">    </p:cNvPr>
-          <p:cNvPicPr>
-            <a:picLocks noChangeAspect="1"/>
-          </p:cNvPicPr>
-          <p:nvPr/>
-        </p:nvPicPr>
-        <p:blipFill>
-          <a:blip r:embed="rId2"/>
-          <a:stretch>
-            <a:fillRect/>
-          </a:stretch>
-        </p:blipFill>
-        <p:spPr>
-          <a:xfrm>
-            <a:off x="6747815" y="2468423"/>
-            <a:ext cx="357530" cy="357530"/>
-          </a:xfrm>
-          <a:prstGeom prst="rect">
-            <a:avLst/>
-          </a:prstGeom>
-        </p:spPr>
-      </p:pic>
+        <p:txBody>
+          <a:bodyPr/>
+          <a:lstStyle/>
+          <a:p>
+            <a:endParaRPr lang="de-CH"/>
+          </a:p>
+        </p:txBody>
+      </p:sp>
       <p:sp>
         <p:nvSpPr>
           <p:cNvPr id="13" name="Text 9"/>
@@ -7712,7 +5148,7 @@
           <a:bodyPr wrap="square" lIns="0" tIns="0" rIns="0" bIns="0" rtlCol="0" anchor="ctr"/>
           <a:lstStyle/>
           <a:p>
-            <a:pPr indent="0" marL="0">
+            <a:pPr marL="0" indent="0">
               <a:buNone/>
             </a:pPr>
             <a:r>
@@ -7751,24 +5187,21 @@
           <a:bodyPr wrap="square" lIns="0" tIns="0" rIns="0" bIns="0" rtlCol="0" anchor="ctr"/>
           <a:lstStyle/>
           <a:p>
-            <a:pPr indent="0" marL="0">
+            <a:pPr marL="0" indent="0">
               <a:lnSpc>
                 <a:spcPct val="110000"/>
               </a:lnSpc>
               <a:buNone/>
             </a:pPr>
             <a:r>
-              <a:rPr lang="en-US" sz="1400" dirty="0">
-                <a:solidFill>
-                  <a:srgbClr val="475569"/>
-                </a:solidFill>
+              <a:rPr lang="en-US" sz="1600" dirty="0">
                 <a:latin typeface="Plus Jakarta Sans" pitchFamily="34" charset="0"/>
                 <a:ea typeface="Plus Jakarta Sans" pitchFamily="34" charset="-122"/>
                 <a:cs typeface="Plus Jakarta Sans" pitchFamily="34" charset="-120"/>
               </a:rPr>
               <a:t>Abfragen über Linked Open Data</a:t>
             </a:r>
-            <a:endParaRPr lang="en-US" sz="1400" dirty="0"/>
+            <a:endParaRPr lang="en-US" sz="1600" dirty="0"/>
           </a:p>
         </p:txBody>
       </p:sp>
@@ -7798,13 +5231,20 @@
             <a:prstDash val="solid"/>
           </a:ln>
           <a:effectLst>
-            <a:outerShdw sx="100000" sy="100000" kx="0" ky="0" algn="bl" rotWithShape="0" blurRad="101600" dist="63500" dir="8100000">
-              <a:srgbClr val="0f172a">
+            <a:outerShdw blurRad="101600" dist="63500" dir="8100000" algn="bl" rotWithShape="0">
+              <a:srgbClr val="0F172A">
                 <a:alpha val="100000"/>
               </a:srgbClr>
             </a:outerShdw>
           </a:effectLst>
         </p:spPr>
+        <p:txBody>
+          <a:bodyPr/>
+          <a:lstStyle/>
+          <a:p>
+            <a:endParaRPr lang="de-CH"/>
+          </a:p>
+        </p:txBody>
       </p:sp>
       <p:sp>
         <p:nvSpPr>
@@ -7830,38 +5270,21 @@
             <a:prstDash val="solid"/>
           </a:ln>
           <a:effectLst>
-            <a:outerShdw sx="100000" sy="100000" kx="0" ky="0" algn="bl" rotWithShape="0" blurRad="101600" dist="31750" dir="8100000">
-              <a:srgbClr val="0f172a">
+            <a:outerShdw blurRad="101600" dist="31750" dir="8100000" algn="bl" rotWithShape="0">
+              <a:srgbClr val="0F172A">
                 <a:alpha val="100000"/>
               </a:srgbClr>
             </a:outerShdw>
           </a:effectLst>
         </p:spPr>
-      </p:sp>
-      <p:pic>
-        <p:nvPicPr>
-          <p:cNvPr id="17" name="Image 2" descr="preencoded.png">    </p:cNvPr>
-          <p:cNvPicPr>
-            <a:picLocks noChangeAspect="1"/>
-          </p:cNvPicPr>
-          <p:nvPr/>
-        </p:nvPicPr>
-        <p:blipFill>
-          <a:blip r:embed="rId3"/>
-          <a:stretch>
-            <a:fillRect/>
-          </a:stretch>
-        </p:blipFill>
-        <p:spPr>
-          <a:xfrm>
-            <a:off x="1215695" y="4617263"/>
-            <a:ext cx="357530" cy="357530"/>
-          </a:xfrm>
-          <a:prstGeom prst="rect">
-            <a:avLst/>
-          </a:prstGeom>
-        </p:spPr>
-      </p:pic>
+        <p:txBody>
+          <a:bodyPr/>
+          <a:lstStyle/>
+          <a:p>
+            <a:endParaRPr lang="de-CH"/>
+          </a:p>
+        </p:txBody>
+      </p:sp>
       <p:sp>
         <p:nvSpPr>
           <p:cNvPr id="18" name="Text 13"/>
@@ -7883,7 +5306,7 @@
           <a:bodyPr wrap="square" lIns="0" tIns="0" rIns="0" bIns="0" rtlCol="0" anchor="ctr"/>
           <a:lstStyle/>
           <a:p>
-            <a:pPr indent="0" marL="0">
+            <a:pPr marL="0" indent="0">
               <a:buNone/>
             </a:pPr>
             <a:r>
@@ -7922,24 +5345,21 @@
           <a:bodyPr wrap="square" lIns="0" tIns="0" rIns="0" bIns="0" rtlCol="0" anchor="ctr"/>
           <a:lstStyle/>
           <a:p>
-            <a:pPr indent="0" marL="0">
+            <a:pPr marL="0" indent="0">
               <a:lnSpc>
                 <a:spcPct val="110000"/>
               </a:lnSpc>
               <a:buNone/>
             </a:pPr>
             <a:r>
-              <a:rPr lang="en-US" sz="1400" dirty="0">
-                <a:solidFill>
-                  <a:srgbClr val="475569"/>
-                </a:solidFill>
+              <a:rPr lang="en-US" sz="1600" dirty="0">
                 <a:latin typeface="Plus Jakarta Sans" pitchFamily="34" charset="0"/>
                 <a:ea typeface="Plus Jakarta Sans" pitchFamily="34" charset="-122"/>
                 <a:cs typeface="Plus Jakarta Sans" pitchFamily="34" charset="-120"/>
               </a:rPr>
               <a:t>Quelle: Schweizer Bundeskanzlei</a:t>
             </a:r>
-            <a:endParaRPr lang="en-US" sz="1400" dirty="0"/>
+            <a:endParaRPr lang="en-US" sz="1600" dirty="0"/>
           </a:p>
         </p:txBody>
       </p:sp>
@@ -7969,13 +5389,20 @@
             <a:prstDash val="solid"/>
           </a:ln>
           <a:effectLst>
-            <a:outerShdw sx="100000" sy="100000" kx="0" ky="0" algn="bl" rotWithShape="0" blurRad="101600" dist="63500" dir="8100000">
-              <a:srgbClr val="0f172a">
+            <a:outerShdw blurRad="101600" dist="63500" dir="8100000" algn="bl" rotWithShape="0">
+              <a:srgbClr val="0F172A">
                 <a:alpha val="100000"/>
               </a:srgbClr>
             </a:outerShdw>
           </a:effectLst>
         </p:spPr>
+        <p:txBody>
+          <a:bodyPr/>
+          <a:lstStyle/>
+          <a:p>
+            <a:endParaRPr lang="de-CH"/>
+          </a:p>
+        </p:txBody>
       </p:sp>
       <p:sp>
         <p:nvSpPr>
@@ -8001,17 +5428,275 @@
             <a:prstDash val="solid"/>
           </a:ln>
           <a:effectLst>
-            <a:outerShdw sx="100000" sy="100000" kx="0" ky="0" algn="bl" rotWithShape="0" blurRad="101600" dist="31750" dir="8100000">
-              <a:srgbClr val="0f172a">
+            <a:outerShdw blurRad="101600" dist="31750" dir="8100000" algn="bl" rotWithShape="0">
+              <a:srgbClr val="0F172A">
                 <a:alpha val="100000"/>
               </a:srgbClr>
             </a:outerShdw>
           </a:effectLst>
         </p:spPr>
+        <p:txBody>
+          <a:bodyPr/>
+          <a:lstStyle/>
+          <a:p>
+            <a:endParaRPr lang="de-CH"/>
+          </a:p>
+        </p:txBody>
+      </p:sp>
+      <p:sp>
+        <p:nvSpPr>
+          <p:cNvPr id="23" name="Text 17"/>
+          <p:cNvSpPr/>
+          <p:nvPr/>
+        </p:nvSpPr>
+        <p:spPr>
+          <a:xfrm>
+            <a:off x="7543800" y="4407408"/>
+            <a:ext cx="3794760" cy="457200"/>
+          </a:xfrm>
+          <a:prstGeom prst="rect">
+            <a:avLst/>
+          </a:prstGeom>
+          <a:noFill/>
+          <a:ln/>
+        </p:spPr>
+        <p:txBody>
+          <a:bodyPr wrap="square" lIns="0" tIns="0" rIns="0" bIns="0" rtlCol="0" anchor="ctr"/>
+          <a:lstStyle/>
+          <a:p>
+            <a:pPr marL="0" indent="0">
+              <a:buNone/>
+            </a:pPr>
+            <a:r>
+              <a:rPr lang="en-US" sz="2200" b="1" dirty="0">
+                <a:solidFill>
+                  <a:srgbClr val="0F172A"/>
+                </a:solidFill>
+                <a:latin typeface="Plus Jakarta Sans" pitchFamily="34" charset="0"/>
+                <a:ea typeface="Plus Jakarta Sans" pitchFamily="34" charset="-122"/>
+                <a:cs typeface="Plus Jakarta Sans" pitchFamily="34" charset="-120"/>
+              </a:rPr>
+              <a:t>AI Text-to-Speech</a:t>
+            </a:r>
+            <a:endParaRPr lang="en-US" sz="2200" dirty="0"/>
+          </a:p>
+        </p:txBody>
+      </p:sp>
+      <p:sp>
+        <p:nvSpPr>
+          <p:cNvPr id="24" name="Text 18"/>
+          <p:cNvSpPr/>
+          <p:nvPr/>
+        </p:nvSpPr>
+        <p:spPr>
+          <a:xfrm>
+            <a:off x="7543800" y="4892040"/>
+            <a:ext cx="3794760" cy="822960"/>
+          </a:xfrm>
+          <a:prstGeom prst="rect">
+            <a:avLst/>
+          </a:prstGeom>
+          <a:noFill/>
+          <a:ln/>
+        </p:spPr>
+        <p:txBody>
+          <a:bodyPr wrap="square" lIns="0" tIns="0" rIns="0" bIns="0" rtlCol="0" anchor="ctr"/>
+          <a:lstStyle/>
+          <a:p>
+            <a:pPr marL="0" indent="0">
+              <a:lnSpc>
+                <a:spcPct val="110000"/>
+              </a:lnSpc>
+              <a:buNone/>
+            </a:pPr>
+            <a:r>
+              <a:rPr lang="en-US" sz="1600" dirty="0">
+                <a:latin typeface="Plus Jakarta Sans" pitchFamily="34" charset="0"/>
+                <a:ea typeface="Plus Jakarta Sans" pitchFamily="34" charset="-122"/>
+                <a:cs typeface="Plus Jakarta Sans" pitchFamily="34" charset="-120"/>
+              </a:rPr>
+              <a:t>Kommentator-Stimme </a:t>
+            </a:r>
+            <a:r>
+              <a:rPr lang="en-US" sz="1600" dirty="0" err="1">
+                <a:latin typeface="Plus Jakarta Sans" pitchFamily="34" charset="0"/>
+                <a:ea typeface="Plus Jakarta Sans" pitchFamily="34" charset="-122"/>
+                <a:cs typeface="Plus Jakarta Sans" pitchFamily="34" charset="-120"/>
+              </a:rPr>
+              <a:t>im</a:t>
+            </a:r>
+            <a:r>
+              <a:rPr lang="en-US" sz="1600" dirty="0">
+                <a:latin typeface="Plus Jakarta Sans" pitchFamily="34" charset="0"/>
+                <a:ea typeface="Plus Jakarta Sans" pitchFamily="34" charset="-122"/>
+                <a:cs typeface="Plus Jakarta Sans" pitchFamily="34" charset="-120"/>
+              </a:rPr>
+              <a:t> Sport Mode</a:t>
+            </a:r>
+            <a:endParaRPr lang="en-US" sz="1600" dirty="0"/>
+          </a:p>
+        </p:txBody>
+      </p:sp>
+      <p:sp>
+        <p:nvSpPr>
+          <p:cNvPr id="25" name="Shape 19"/>
+          <p:cNvSpPr/>
+          <p:nvPr/>
+        </p:nvSpPr>
+        <p:spPr>
+          <a:xfrm>
+            <a:off x="640080" y="6053328"/>
+            <a:ext cx="10881360" cy="548640"/>
+          </a:xfrm>
+          <a:prstGeom prst="roundRect">
+            <a:avLst>
+              <a:gd name="adj" fmla="val 16667"/>
+            </a:avLst>
+          </a:prstGeom>
+          <a:solidFill>
+            <a:srgbClr val="0F172A"/>
+          </a:solidFill>
+          <a:ln/>
+        </p:spPr>
+        <p:txBody>
+          <a:bodyPr/>
+          <a:lstStyle/>
+          <a:p>
+            <a:endParaRPr lang="de-CH" dirty="0"/>
+          </a:p>
+        </p:txBody>
+      </p:sp>
+      <p:sp>
+        <p:nvSpPr>
+          <p:cNvPr id="26" name="Text 20"/>
+          <p:cNvSpPr/>
+          <p:nvPr/>
+        </p:nvSpPr>
+        <p:spPr>
+          <a:xfrm>
+            <a:off x="640080" y="6053328"/>
+            <a:ext cx="10881360" cy="548640"/>
+          </a:xfrm>
+          <a:prstGeom prst="rect">
+            <a:avLst/>
+          </a:prstGeom>
+          <a:noFill/>
+          <a:ln/>
+        </p:spPr>
+        <p:txBody>
+          <a:bodyPr wrap="square" lIns="0" tIns="0" rIns="0" bIns="0" rtlCol="0" anchor="ctr"/>
+          <a:lstStyle/>
+          <a:p>
+            <a:pPr algn="ctr"/>
+            <a:r>
+              <a:rPr lang="en-US" sz="1500" b="1" dirty="0">
+                <a:solidFill>
+                  <a:srgbClr val="94A3B8"/>
+                </a:solidFill>
+                <a:latin typeface="Plus Jakarta Sans" pitchFamily="34" charset="0"/>
+                <a:ea typeface="Plus Jakarta Sans" pitchFamily="34" charset="-122"/>
+                <a:cs typeface="Plus Jakarta Sans" pitchFamily="34" charset="-120"/>
+              </a:rPr>
+              <a:t>Entwicklung:  </a:t>
+            </a:r>
+            <a:r>
+              <a:rPr lang="en-US" sz="1500" b="1" dirty="0">
+                <a:solidFill>
+                  <a:srgbClr val="FFFFFF"/>
+                </a:solidFill>
+                <a:latin typeface="Plus Jakarta Sans" pitchFamily="34" charset="0"/>
+                <a:ea typeface="Plus Jakarta Sans" pitchFamily="34" charset="-122"/>
+                <a:cs typeface="Plus Jakarta Sans" pitchFamily="34" charset="-120"/>
+              </a:rPr>
+              <a:t>iterativ</a:t>
+            </a:r>
+            <a:r>
+              <a:rPr lang="en-US" sz="1500" dirty="0">
+                <a:solidFill>
+                  <a:srgbClr val="94A3B8"/>
+                </a:solidFill>
+                <a:latin typeface="Plus Jakarta Sans" pitchFamily="34" charset="0"/>
+                <a:ea typeface="Plus Jakarta Sans" pitchFamily="34" charset="-122"/>
+                <a:cs typeface="Plus Jakarta Sans" pitchFamily="34" charset="-120"/>
+              </a:rPr>
+              <a:t>  +  </a:t>
+            </a:r>
+            <a:r>
+              <a:rPr lang="en-US" sz="1500" b="1" dirty="0">
+                <a:solidFill>
+                  <a:srgbClr val="D4AF37"/>
+                </a:solidFill>
+                <a:latin typeface="Plus Jakarta Sans" pitchFamily="34" charset="0"/>
+                <a:ea typeface="Plus Jakarta Sans" pitchFamily="34" charset="-122"/>
+                <a:cs typeface="Plus Jakarta Sans" pitchFamily="34" charset="-120"/>
+              </a:rPr>
+              <a:t>vibe coding </a:t>
+            </a:r>
+            <a:r>
+              <a:rPr lang="en-US" sz="1500" dirty="0">
+                <a:solidFill>
+                  <a:srgbClr val="94A3B8"/>
+                </a:solidFill>
+                <a:latin typeface="Plus Jakarta Sans" pitchFamily="34" charset="0"/>
+                <a:ea typeface="Plus Jakarta Sans" pitchFamily="34" charset="-122"/>
+                <a:cs typeface="Plus Jakarta Sans" pitchFamily="34" charset="-120"/>
+              </a:rPr>
+              <a:t>+ </a:t>
+            </a:r>
+            <a:r>
+              <a:rPr lang="en-US" sz="1500" b="1" dirty="0">
+                <a:solidFill>
+                  <a:srgbClr val="FFFFFF"/>
+                </a:solidFill>
+                <a:latin typeface="Plus Jakarta Sans" pitchFamily="34" charset="0"/>
+                <a:ea typeface="Plus Jakarta Sans" pitchFamily="34" charset="-122"/>
+                <a:cs typeface="Plus Jakarta Sans" pitchFamily="34" charset="-120"/>
+              </a:rPr>
+              <a:t>fun</a:t>
+            </a:r>
+            <a:endParaRPr lang="en-US" sz="1500" dirty="0"/>
+          </a:p>
+        </p:txBody>
       </p:sp>
       <p:pic>
         <p:nvPicPr>
-          <p:cNvPr id="22" name="Image 3" descr="preencoded.png">    </p:cNvPr>
+          <p:cNvPr id="33" name="Grafik 32">
+            <a:extLst>
+              <a:ext uri="{FF2B5EF4-FFF2-40B4-BE49-F238E27FC236}">
+                <a16:creationId xmlns:a16="http://schemas.microsoft.com/office/drawing/2014/main" id="{0209FD5E-99D2-FB11-3220-E3995E244890}"/>
+              </a:ext>
+            </a:extLst>
+          </p:cNvPr>
+          <p:cNvPicPr>
+            <a:picLocks noChangeAspect="1"/>
+          </p:cNvPicPr>
+          <p:nvPr/>
+        </p:nvPicPr>
+        <p:blipFill>
+          <a:blip r:embed="rId3"/>
+          <a:stretch>
+            <a:fillRect/>
+          </a:stretch>
+        </p:blipFill>
+        <p:spPr>
+          <a:xfrm>
+            <a:off x="1181961" y="2434689"/>
+            <a:ext cx="424998" cy="424998"/>
+          </a:xfrm>
+          <a:prstGeom prst="rect">
+            <a:avLst/>
+          </a:prstGeom>
+        </p:spPr>
+      </p:pic>
+      <p:pic>
+        <p:nvPicPr>
+          <p:cNvPr id="39" name="Grafik 38">
+            <a:extLst>
+              <a:ext uri="{FF2B5EF4-FFF2-40B4-BE49-F238E27FC236}">
+                <a16:creationId xmlns:a16="http://schemas.microsoft.com/office/drawing/2014/main" id="{E74B38AF-AF51-31F6-93FF-123114551B4F}"/>
+              </a:ext>
+            </a:extLst>
+          </p:cNvPr>
           <p:cNvPicPr>
             <a:picLocks noChangeAspect="1"/>
           </p:cNvPicPr>
@@ -8025,198 +5710,91 @@
         </p:blipFill>
         <p:spPr>
           <a:xfrm>
-            <a:off x="6747815" y="4617263"/>
-            <a:ext cx="357530" cy="357530"/>
+            <a:off x="6679849" y="2400457"/>
+            <a:ext cx="493461" cy="493461"/>
           </a:xfrm>
           <a:prstGeom prst="rect">
             <a:avLst/>
           </a:prstGeom>
         </p:spPr>
       </p:pic>
-      <p:sp>
-        <p:nvSpPr>
-          <p:cNvPr id="23" name="Text 17"/>
-          <p:cNvSpPr/>
-          <p:nvPr/>
-        </p:nvSpPr>
-        <p:spPr>
-          <a:xfrm>
-            <a:off x="7543800" y="4407408"/>
-            <a:ext cx="3794760" cy="457200"/>
+      <p:pic>
+        <p:nvPicPr>
+          <p:cNvPr id="41" name="Grafik 40">
+            <a:extLst>
+              <a:ext uri="{FF2B5EF4-FFF2-40B4-BE49-F238E27FC236}">
+                <a16:creationId xmlns:a16="http://schemas.microsoft.com/office/drawing/2014/main" id="{63521094-CD33-0B9D-8B1E-34E505A18461}"/>
+              </a:ext>
+            </a:extLst>
+          </p:cNvPr>
+          <p:cNvPicPr>
+            <a:picLocks noChangeAspect="1"/>
+          </p:cNvPicPr>
+          <p:nvPr/>
+        </p:nvPicPr>
+        <p:blipFill>
+          <a:blip r:embed="rId5"/>
+          <a:stretch>
+            <a:fillRect/>
+          </a:stretch>
+        </p:blipFill>
+        <p:spPr>
+          <a:xfrm flipH="1">
+            <a:off x="6537960" y="4407408"/>
+            <a:ext cx="777240" cy="777240"/>
           </a:xfrm>
           <a:prstGeom prst="rect">
             <a:avLst/>
           </a:prstGeom>
+        </p:spPr>
+      </p:pic>
+      <p:pic>
+        <p:nvPicPr>
+          <p:cNvPr id="1040" name="Picture 16" descr="opendata.swiss · GitHub">
+            <a:extLst>
+              <a:ext uri="{FF2B5EF4-FFF2-40B4-BE49-F238E27FC236}">
+                <a16:creationId xmlns:a16="http://schemas.microsoft.com/office/drawing/2014/main" id="{7A1E2311-D348-62BF-60C1-4DA5C5EDD6E5}"/>
+              </a:ext>
+            </a:extLst>
+          </p:cNvPr>
+          <p:cNvPicPr>
+            <a:picLocks noChangeAspect="1" noChangeArrowheads="1"/>
+          </p:cNvPicPr>
+          <p:nvPr/>
+        </p:nvPicPr>
+        <p:blipFill>
+          <a:blip r:embed="rId6">
+            <a:extLst>
+              <a:ext uri="{28A0092B-C50C-407E-A947-70E740481C1C}">
+                <a14:useLocalDpi xmlns:a14="http://schemas.microsoft.com/office/drawing/2010/main" val="0"/>
+              </a:ext>
+            </a:extLst>
+          </a:blip>
+          <a:srcRect/>
+          <a:stretch>
+            <a:fillRect/>
+          </a:stretch>
+        </p:blipFill>
+        <p:spPr bwMode="auto">
+          <a:xfrm>
+            <a:off x="1115568" y="4517136"/>
+            <a:ext cx="557784" cy="557784"/>
+          </a:xfrm>
+          <a:prstGeom prst="rect">
+            <a:avLst/>
+          </a:prstGeom>
           <a:noFill/>
-          <a:ln/>
-        </p:spPr>
-        <p:txBody>
-          <a:bodyPr wrap="square" lIns="0" tIns="0" rIns="0" bIns="0" rtlCol="0" anchor="ctr"/>
-          <a:lstStyle/>
-          <a:p>
-            <a:pPr indent="0" marL="0">
-              <a:buNone/>
-            </a:pPr>
-            <a:r>
-              <a:rPr lang="en-US" sz="2200" b="1" dirty="0">
-                <a:solidFill>
-                  <a:srgbClr val="0F172A"/>
-                </a:solidFill>
-                <a:latin typeface="Plus Jakarta Sans" pitchFamily="34" charset="0"/>
-                <a:ea typeface="Plus Jakarta Sans" pitchFamily="34" charset="-122"/>
-                <a:cs typeface="Plus Jakarta Sans" pitchFamily="34" charset="-120"/>
-              </a:rPr>
-              <a:t>AI Text-to-Speech</a:t>
-            </a:r>
-            <a:endParaRPr lang="en-US" sz="2200" dirty="0"/>
-          </a:p>
-        </p:txBody>
-      </p:sp>
-      <p:sp>
-        <p:nvSpPr>
-          <p:cNvPr id="24" name="Text 18"/>
-          <p:cNvSpPr/>
-          <p:nvPr/>
-        </p:nvSpPr>
-        <p:spPr>
-          <a:xfrm>
-            <a:off x="7543800" y="4892040"/>
-            <a:ext cx="3794760" cy="822960"/>
-          </a:xfrm>
-          <a:prstGeom prst="rect">
-            <a:avLst/>
-          </a:prstGeom>
-          <a:noFill/>
-          <a:ln/>
-        </p:spPr>
-        <p:txBody>
-          <a:bodyPr wrap="square" lIns="0" tIns="0" rIns="0" bIns="0" rtlCol="0" anchor="ctr"/>
-          <a:lstStyle/>
-          <a:p>
-            <a:pPr indent="0" marL="0">
-              <a:lnSpc>
-                <a:spcPct val="110000"/>
-              </a:lnSpc>
-              <a:buNone/>
-            </a:pPr>
-            <a:r>
-              <a:rPr lang="en-US" sz="1400" dirty="0">
-                <a:solidFill>
-                  <a:srgbClr val="475569"/>
-                </a:solidFill>
-                <a:latin typeface="Plus Jakarta Sans" pitchFamily="34" charset="0"/>
-                <a:ea typeface="Plus Jakarta Sans" pitchFamily="34" charset="-122"/>
-                <a:cs typeface="Plus Jakarta Sans" pitchFamily="34" charset="-120"/>
-              </a:rPr>
-              <a:t>Kommentator-Stimme im Fun Mode</a:t>
-            </a:r>
-            <a:endParaRPr lang="en-US" sz="1400" dirty="0"/>
-          </a:p>
-        </p:txBody>
-      </p:sp>
-      <p:sp>
-        <p:nvSpPr>
-          <p:cNvPr id="25" name="Shape 19"/>
-          <p:cNvSpPr/>
-          <p:nvPr/>
-        </p:nvSpPr>
-        <p:spPr>
-          <a:xfrm>
-            <a:off x="640080" y="6053328"/>
-            <a:ext cx="10881360" cy="548640"/>
-          </a:xfrm>
-          <a:prstGeom prst="roundRect">
-            <a:avLst>
-              <a:gd name="adj" fmla="val 16667"/>
-            </a:avLst>
-          </a:prstGeom>
-          <a:solidFill>
-            <a:srgbClr val="0F172A"/>
-          </a:solidFill>
-          <a:ln/>
-        </p:spPr>
-      </p:sp>
-      <p:sp>
-        <p:nvSpPr>
-          <p:cNvPr id="26" name="Text 20"/>
-          <p:cNvSpPr/>
-          <p:nvPr/>
-        </p:nvSpPr>
-        <p:spPr>
-          <a:xfrm>
-            <a:off x="640080" y="6053328"/>
-            <a:ext cx="10881360" cy="548640"/>
-          </a:xfrm>
-          <a:prstGeom prst="rect">
-            <a:avLst/>
-          </a:prstGeom>
-          <a:noFill/>
-          <a:ln/>
-        </p:spPr>
-        <p:txBody>
-          <a:bodyPr wrap="square" lIns="0" tIns="0" rIns="0" bIns="0" rtlCol="0" anchor="ctr"/>
-          <a:lstStyle/>
-          <a:p>
-            <a:pPr algn="ctr" indent="0" marL="0">
-              <a:buNone/>
-            </a:pPr>
-            <a:r>
-              <a:rPr lang="en-US" sz="1500" b="1" dirty="0">
-                <a:solidFill>
-                  <a:srgbClr val="94A3B8"/>
-                </a:solidFill>
-                <a:latin typeface="Plus Jakarta Sans" pitchFamily="34" charset="0"/>
-                <a:ea typeface="Plus Jakarta Sans" pitchFamily="34" charset="-122"/>
-                <a:cs typeface="Plus Jakarta Sans" pitchFamily="34" charset="-120"/>
-              </a:rPr>
-              <a:t>Entwicklung:  </a:t>
-            </a:r>
-            <a:pPr algn="ctr" indent="0" marL="0">
-              <a:buNone/>
-            </a:pPr>
-            <a:r>
-              <a:rPr lang="en-US" sz="1500" b="1" dirty="0">
+          <a:extLst>
+            <a:ext uri="{909E8E84-426E-40DD-AFC4-6F175D3DCCD1}">
+              <a14:hiddenFill xmlns:a14="http://schemas.microsoft.com/office/drawing/2010/main">
                 <a:solidFill>
                   <a:srgbClr val="FFFFFF"/>
                 </a:solidFill>
-                <a:latin typeface="Plus Jakarta Sans" pitchFamily="34" charset="0"/>
-                <a:ea typeface="Plus Jakarta Sans" pitchFamily="34" charset="-122"/>
-                <a:cs typeface="Plus Jakarta Sans" pitchFamily="34" charset="-120"/>
-              </a:rPr>
-              <a:t>iterativ</a:t>
-            </a:r>
-            <a:pPr algn="ctr" indent="0" marL="0">
-              <a:buNone/>
-            </a:pPr>
-            <a:r>
-              <a:rPr lang="en-US" sz="1500" dirty="0">
-                <a:solidFill>
-                  <a:srgbClr val="94A3B8"/>
-                </a:solidFill>
-                <a:latin typeface="Plus Jakarta Sans" pitchFamily="34" charset="0"/>
-                <a:ea typeface="Plus Jakarta Sans" pitchFamily="34" charset="-122"/>
-                <a:cs typeface="Plus Jakarta Sans" pitchFamily="34" charset="-120"/>
-              </a:rPr>
-              <a:t>  +  </a:t>
-            </a:r>
-            <a:pPr algn="ctr" indent="0" marL="0">
-              <a:buNone/>
-            </a:pPr>
-            <a:r>
-              <a:rPr lang="en-US" sz="1500" b="1" dirty="0">
-                <a:solidFill>
-                  <a:srgbClr val="D4AF37"/>
-                </a:solidFill>
-                <a:latin typeface="Plus Jakarta Sans" pitchFamily="34" charset="0"/>
-                <a:ea typeface="Plus Jakarta Sans" pitchFamily="34" charset="-122"/>
-                <a:cs typeface="Plus Jakarta Sans" pitchFamily="34" charset="-120"/>
-              </a:rPr>
-              <a:t>«vibe coding»</a:t>
-            </a:r>
-            <a:endParaRPr lang="en-US" sz="1500" dirty="0"/>
-          </a:p>
-        </p:txBody>
-      </p:sp>
+              </a14:hiddenFill>
+            </a:ext>
+          </a:extLst>
+        </p:spPr>
+      </p:pic>
     </p:spTree>
   </p:cSld>
   <p:clrMapOvr>
@@ -8225,7 +5803,7 @@
 </p:sld>
 </file>
 
-<file path=ppt/slides/slide7.xml><?xml version="1.0" encoding="utf-8"?>
+<file path=ppt/slides/slide8.xml><?xml version="1.0" encoding="utf-8"?>
 <p:sld xmlns:a="http://schemas.openxmlformats.org/drawingml/2006/main" xmlns:r="http://schemas.openxmlformats.org/officeDocument/2006/relationships" xmlns:p="http://schemas.openxmlformats.org/presentationml/2006/main">
   <p:cSld name="Slide 7">
     <p:bg>
@@ -8233,6 +5811,7 @@
         <a:solidFill>
           <a:srgbClr val="F5F6F8"/>
         </a:solidFill>
+        <a:effectLst/>
       </p:bgPr>
     </p:bg>
     <p:spTree>
@@ -8275,13 +5854,20 @@
             <a:prstDash val="solid"/>
           </a:ln>
           <a:effectLst>
-            <a:outerShdw sx="100000" sy="100000" kx="0" ky="0" algn="bl" rotWithShape="0" blurRad="101600" dist="31750" dir="8100000">
-              <a:srgbClr val="0f172a">
+            <a:outerShdw blurRad="101600" dist="31750" dir="8100000" algn="bl" rotWithShape="0">
+              <a:srgbClr val="0F172A">
                 <a:alpha val="100000"/>
               </a:srgbClr>
             </a:outerShdw>
           </a:effectLst>
         </p:spPr>
+        <p:txBody>
+          <a:bodyPr/>
+          <a:lstStyle/>
+          <a:p>
+            <a:endParaRPr lang="de-CH"/>
+          </a:p>
+        </p:txBody>
       </p:sp>
       <p:sp>
         <p:nvSpPr>
@@ -8304,11 +5890,11 @@
           <a:bodyPr wrap="square" lIns="0" tIns="0" rIns="0" bIns="0" rtlCol="0" anchor="ctr"/>
           <a:lstStyle/>
           <a:p>
-            <a:pPr algn="ctr" indent="0" marL="0">
+            <a:pPr marL="0" indent="0" algn="ctr">
               <a:buNone/>
             </a:pPr>
             <a:r>
-              <a:rPr lang="en-US" sz="1050" b="1" spc="120" kern="0" dirty="0">
+              <a:rPr lang="en-US" sz="1050" b="1" kern="0" spc="120" dirty="0">
                 <a:solidFill>
                   <a:srgbClr val="E30613"/>
                 </a:solidFill>
@@ -8343,7 +5929,7 @@
           <a:bodyPr wrap="square" lIns="0" tIns="0" rIns="0" bIns="0" rtlCol="0" anchor="ctr"/>
           <a:lstStyle/>
           <a:p>
-            <a:pPr indent="0" marL="0">
+            <a:pPr marL="0" indent="0">
               <a:buNone/>
             </a:pPr>
             <a:r>
@@ -8355,7 +5941,29 @@
                 <a:ea typeface="Plus Jakarta Sans" pitchFamily="34" charset="-122"/>
                 <a:cs typeface="Plus Jakarta Sans" pitchFamily="34" charset="-120"/>
               </a:rPr>
-              <a:t>Was die Daten verraten</a:t>
+              <a:t>Trends, </a:t>
+            </a:r>
+            <a:r>
+              <a:rPr lang="en-US" sz="3800" b="1" dirty="0" err="1">
+                <a:solidFill>
+                  <a:srgbClr val="0F172A"/>
+                </a:solidFill>
+                <a:latin typeface="Plus Jakarta Sans" pitchFamily="34" charset="0"/>
+                <a:ea typeface="Plus Jakarta Sans" pitchFamily="34" charset="-122"/>
+                <a:cs typeface="Plus Jakarta Sans" pitchFamily="34" charset="-120"/>
+              </a:rPr>
+              <a:t>Einblicke</a:t>
+            </a:r>
+            <a:r>
+              <a:rPr lang="en-US" sz="3800" b="1" dirty="0">
+                <a:solidFill>
+                  <a:srgbClr val="0F172A"/>
+                </a:solidFill>
+                <a:latin typeface="Plus Jakarta Sans" pitchFamily="34" charset="0"/>
+                <a:ea typeface="Plus Jakarta Sans" pitchFamily="34" charset="-122"/>
+                <a:cs typeface="Plus Jakarta Sans" pitchFamily="34" charset="-120"/>
+              </a:rPr>
+              <a:t> und Fun Facts</a:t>
             </a:r>
             <a:endParaRPr lang="en-US" sz="3800" dirty="0"/>
           </a:p>
@@ -8387,13 +5995,20 @@
             <a:prstDash val="solid"/>
           </a:ln>
           <a:effectLst>
-            <a:outerShdw sx="100000" sy="100000" kx="0" ky="0" algn="bl" rotWithShape="0" blurRad="101600" dist="63500" dir="8100000">
-              <a:srgbClr val="0f172a">
+            <a:outerShdw blurRad="101600" dist="63500" dir="8100000" algn="bl" rotWithShape="0">
+              <a:srgbClr val="0F172A">
                 <a:alpha val="100000"/>
               </a:srgbClr>
             </a:outerShdw>
           </a:effectLst>
         </p:spPr>
+        <p:txBody>
+          <a:bodyPr/>
+          <a:lstStyle/>
+          <a:p>
+            <a:endParaRPr lang="de-CH" dirty="0"/>
+          </a:p>
+        </p:txBody>
       </p:sp>
       <p:sp>
         <p:nvSpPr>
@@ -8416,11 +6031,11 @@
           <a:bodyPr wrap="square" lIns="0" tIns="0" rIns="0" bIns="0" rtlCol="0" anchor="ctr"/>
           <a:lstStyle/>
           <a:p>
-            <a:pPr indent="0" marL="0">
+            <a:pPr marL="0" indent="0">
               <a:buNone/>
             </a:pPr>
             <a:r>
-              <a:rPr lang="en-US" sz="1200" b="1" spc="100" kern="0" dirty="0">
+              <a:rPr lang="en-US" sz="1200" b="1" kern="0" spc="100" dirty="0">
                 <a:solidFill>
                   <a:srgbClr val="475569"/>
                 </a:solidFill>
@@ -8455,7 +6070,7 @@
           <a:bodyPr wrap="square" lIns="0" tIns="0" rIns="0" bIns="0" rtlCol="0" anchor="ctr"/>
           <a:lstStyle/>
           <a:p>
-            <a:pPr indent="0" marL="0">
+            <a:pPr marL="0" indent="0">
               <a:buNone/>
             </a:pPr>
             <a:r>
@@ -8494,14 +6109,14 @@
           <a:bodyPr wrap="square" lIns="0" tIns="0" rIns="0" bIns="0" rtlCol="0" anchor="ctr"/>
           <a:lstStyle/>
           <a:p>
-            <a:pPr indent="0" marL="0">
+            <a:pPr marL="0" indent="0">
               <a:lnSpc>
                 <a:spcPct val="120000"/>
               </a:lnSpc>
               <a:buNone/>
             </a:pPr>
             <a:r>
-              <a:rPr lang="en-US" sz="1450" dirty="0">
+              <a:rPr lang="en-US" sz="1600" dirty="0">
                 <a:solidFill>
                   <a:srgbClr val="0F172A"/>
                 </a:solidFill>
@@ -8511,7 +6126,7 @@
               </a:rPr>
               <a:t>Bei der Freimaurer-Initiative 1937 war die Beteiligung landesweit extrem hoch — Basel-Stadt erreichte fast 100 Prozent.</a:t>
             </a:r>
-            <a:endParaRPr lang="en-US" sz="1450" dirty="0"/>
+            <a:endParaRPr lang="en-US" sz="1600" dirty="0"/>
           </a:p>
         </p:txBody>
       </p:sp>
@@ -8541,6 +6156,13 @@
             <a:prstDash val="solid"/>
           </a:ln>
         </p:spPr>
+        <p:txBody>
+          <a:bodyPr/>
+          <a:lstStyle/>
+          <a:p>
+            <a:endParaRPr lang="de-CH"/>
+          </a:p>
+        </p:txBody>
       </p:sp>
       <p:sp>
         <p:nvSpPr>
@@ -8563,11 +6185,11 @@
           <a:bodyPr wrap="square" lIns="0" tIns="0" rIns="0" bIns="0" rtlCol="0" anchor="ctr"/>
           <a:lstStyle/>
           <a:p>
-            <a:pPr algn="ctr" indent="0" marL="0">
+            <a:pPr marL="0" indent="0" algn="ctr">
               <a:buNone/>
             </a:pPr>
             <a:r>
-              <a:rPr lang="en-US" sz="1250" b="1" dirty="0">
+              <a:rPr lang="en-US" sz="1600" b="1" dirty="0">
                 <a:solidFill>
                   <a:srgbClr val="E30613"/>
                 </a:solidFill>
@@ -8577,7 +6199,7 @@
               </a:rPr>
               <a:t>Spitzenwert im ganzen Datensatz</a:t>
             </a:r>
-            <a:endParaRPr lang="en-US" sz="1250" dirty="0"/>
+            <a:endParaRPr lang="en-US" sz="1600" dirty="0"/>
           </a:p>
         </p:txBody>
       </p:sp>
@@ -8607,13 +6229,20 @@
             <a:prstDash val="solid"/>
           </a:ln>
           <a:effectLst>
-            <a:outerShdw sx="100000" sy="100000" kx="0" ky="0" algn="bl" rotWithShape="0" blurRad="101600" dist="63500" dir="8100000">
-              <a:srgbClr val="0f172a">
+            <a:outerShdw blurRad="101600" dist="63500" dir="8100000" algn="bl" rotWithShape="0">
+              <a:srgbClr val="0F172A">
                 <a:alpha val="100000"/>
               </a:srgbClr>
             </a:outerShdw>
           </a:effectLst>
         </p:spPr>
+        <p:txBody>
+          <a:bodyPr/>
+          <a:lstStyle/>
+          <a:p>
+            <a:endParaRPr lang="de-CH"/>
+          </a:p>
+        </p:txBody>
       </p:sp>
       <p:sp>
         <p:nvSpPr>
@@ -8639,38 +6268,21 @@
             <a:prstDash val="solid"/>
           </a:ln>
           <a:effectLst>
-            <a:outerShdw sx="100000" sy="100000" kx="0" ky="0" algn="bl" rotWithShape="0" blurRad="101600" dist="31750" dir="8100000">
-              <a:srgbClr val="0f172a">
+            <a:outerShdw blurRad="101600" dist="31750" dir="8100000" algn="bl" rotWithShape="0">
+              <a:srgbClr val="0F172A">
                 <a:alpha val="100000"/>
               </a:srgbClr>
             </a:outerShdw>
           </a:effectLst>
         </p:spPr>
-      </p:sp>
-      <p:pic>
-        <p:nvPicPr>
-          <p:cNvPr id="13" name="Image 0" descr="preencoded.png">    </p:cNvPr>
-          <p:cNvPicPr>
-            <a:picLocks noChangeAspect="1"/>
-          </p:cNvPicPr>
-          <p:nvPr/>
-        </p:nvPicPr>
-        <p:blipFill>
-          <a:blip r:embed="rId1"/>
-          <a:stretch>
-            <a:fillRect/>
-          </a:stretch>
-        </p:blipFill>
-        <p:spPr>
-          <a:xfrm>
-            <a:off x="4953671" y="2228759"/>
-            <a:ext cx="260787" cy="260787"/>
-          </a:xfrm>
-          <a:prstGeom prst="rect">
-            <a:avLst/>
-          </a:prstGeom>
-        </p:spPr>
-      </p:pic>
+        <p:txBody>
+          <a:bodyPr/>
+          <a:lstStyle/>
+          <a:p>
+            <a:endParaRPr lang="de-CH"/>
+          </a:p>
+        </p:txBody>
+      </p:sp>
       <p:sp>
         <p:nvSpPr>
           <p:cNvPr id="14" name="Text 11"/>
@@ -8692,7 +6304,7 @@
           <a:bodyPr wrap="square" lIns="0" tIns="0" rIns="0" bIns="0" rtlCol="0" anchor="ctr"/>
           <a:lstStyle/>
           <a:p>
-            <a:pPr indent="0" marL="0">
+            <a:pPr marL="0" indent="0">
               <a:buNone/>
             </a:pPr>
             <a:r>
@@ -8731,24 +6343,37 @@
           <a:bodyPr wrap="square" lIns="0" tIns="0" rIns="0" bIns="0" rtlCol="0" anchor="ctr"/>
           <a:lstStyle/>
           <a:p>
-            <a:pPr indent="0" marL="0">
+            <a:pPr marL="0" indent="0">
               <a:lnSpc>
                 <a:spcPct val="115000"/>
               </a:lnSpc>
               <a:buNone/>
             </a:pPr>
             <a:r>
-              <a:rPr lang="en-US" sz="1300" dirty="0">
-                <a:solidFill>
-                  <a:srgbClr val="475569"/>
-                </a:solidFill>
-                <a:latin typeface="Plus Jakarta Sans" pitchFamily="34" charset="0"/>
-                <a:ea typeface="Plus Jakarta Sans" pitchFamily="34" charset="-122"/>
-                <a:cs typeface="Plus Jakarta Sans" pitchFamily="34" charset="-120"/>
-              </a:rPr>
-              <a:t>Konstant zuoberst — eine Busse bei Nicht-Teilnahme treibt die Beteiligung bis heute.</a:t>
-            </a:r>
-            <a:endParaRPr lang="en-US" sz="1300" dirty="0"/>
+              <a:rPr lang="en-US" sz="1600" dirty="0">
+                <a:latin typeface="Plus Jakarta Sans" pitchFamily="34" charset="0"/>
+                <a:ea typeface="Plus Jakarta Sans" pitchFamily="34" charset="-122"/>
+                <a:cs typeface="Plus Jakarta Sans" pitchFamily="34" charset="-120"/>
+              </a:rPr>
+              <a:t>Konstant </a:t>
+            </a:r>
+            <a:r>
+              <a:rPr lang="en-US" sz="1600" dirty="0" err="1">
+                <a:latin typeface="Plus Jakarta Sans" pitchFamily="34" charset="0"/>
+                <a:ea typeface="Plus Jakarta Sans" pitchFamily="34" charset="-122"/>
+                <a:cs typeface="Plus Jakarta Sans" pitchFamily="34" charset="-120"/>
+              </a:rPr>
+              <a:t>zuoberst</a:t>
+            </a:r>
+            <a:r>
+              <a:rPr lang="en-US" sz="1600" dirty="0">
+                <a:latin typeface="Plus Jakarta Sans" pitchFamily="34" charset="0"/>
+                <a:ea typeface="Plus Jakarta Sans" pitchFamily="34" charset="-122"/>
+                <a:cs typeface="Plus Jakarta Sans" pitchFamily="34" charset="-120"/>
+              </a:rPr>
+              <a:t> eine Busse bei Nicht-Teilnahme treibt die Beteiligung bis heute.</a:t>
+            </a:r>
+            <a:endParaRPr lang="en-US" sz="1600" dirty="0"/>
           </a:p>
         </p:txBody>
       </p:sp>
@@ -8778,13 +6403,20 @@
             <a:prstDash val="solid"/>
           </a:ln>
           <a:effectLst>
-            <a:outerShdw sx="100000" sy="100000" kx="0" ky="0" algn="bl" rotWithShape="0" blurRad="101600" dist="63500" dir="8100000">
-              <a:srgbClr val="0f172a">
+            <a:outerShdw blurRad="101600" dist="63500" dir="8100000" algn="bl" rotWithShape="0">
+              <a:srgbClr val="0F172A">
                 <a:alpha val="100000"/>
               </a:srgbClr>
             </a:outerShdw>
           </a:effectLst>
         </p:spPr>
+        <p:txBody>
+          <a:bodyPr/>
+          <a:lstStyle/>
+          <a:p>
+            <a:endParaRPr lang="de-CH"/>
+          </a:p>
+        </p:txBody>
       </p:sp>
       <p:sp>
         <p:nvSpPr>
@@ -8810,38 +6442,21 @@
             <a:prstDash val="solid"/>
           </a:ln>
           <a:effectLst>
-            <a:outerShdw sx="100000" sy="100000" kx="0" ky="0" algn="bl" rotWithShape="0" blurRad="101600" dist="31750" dir="8100000">
-              <a:srgbClr val="0f172a">
+            <a:outerShdw blurRad="101600" dist="31750" dir="8100000" algn="bl" rotWithShape="0">
+              <a:srgbClr val="0F172A">
                 <a:alpha val="100000"/>
               </a:srgbClr>
             </a:outerShdw>
           </a:effectLst>
         </p:spPr>
-      </p:sp>
-      <p:pic>
-        <p:nvPicPr>
-          <p:cNvPr id="18" name="Image 1" descr="preencoded.png">    </p:cNvPr>
-          <p:cNvPicPr>
-            <a:picLocks noChangeAspect="1"/>
-          </p:cNvPicPr>
-          <p:nvPr/>
-        </p:nvPicPr>
-        <p:blipFill>
-          <a:blip r:embed="rId2"/>
-          <a:stretch>
-            <a:fillRect/>
-          </a:stretch>
-        </p:blipFill>
-        <p:spPr>
-          <a:xfrm>
-            <a:off x="8519831" y="2228759"/>
-            <a:ext cx="260787" cy="260787"/>
-          </a:xfrm>
-          <a:prstGeom prst="rect">
-            <a:avLst/>
-          </a:prstGeom>
-        </p:spPr>
-      </p:pic>
+        <p:txBody>
+          <a:bodyPr/>
+          <a:lstStyle/>
+          <a:p>
+            <a:endParaRPr lang="de-CH"/>
+          </a:p>
+        </p:txBody>
+      </p:sp>
       <p:sp>
         <p:nvSpPr>
           <p:cNvPr id="19" name="Text 15"/>
@@ -8863,7 +6478,7 @@
           <a:bodyPr wrap="square" lIns="0" tIns="0" rIns="0" bIns="0" rtlCol="0" anchor="ctr"/>
           <a:lstStyle/>
           <a:p>
-            <a:pPr indent="0" marL="0">
+            <a:pPr marL="0" indent="0">
               <a:buNone/>
             </a:pPr>
             <a:r>
@@ -8902,24 +6517,21 @@
           <a:bodyPr wrap="square" lIns="0" tIns="0" rIns="0" bIns="0" rtlCol="0" anchor="ctr"/>
           <a:lstStyle/>
           <a:p>
-            <a:pPr indent="0" marL="0">
+            <a:pPr marL="0" indent="0">
               <a:lnSpc>
                 <a:spcPct val="115000"/>
               </a:lnSpc>
               <a:buNone/>
             </a:pPr>
             <a:r>
-              <a:rPr lang="en-US" sz="1300" dirty="0">
-                <a:solidFill>
-                  <a:srgbClr val="475569"/>
-                </a:solidFill>
+              <a:rPr lang="en-US" sz="1600" dirty="0">
                 <a:latin typeface="Plus Jakarta Sans" pitchFamily="34" charset="0"/>
                 <a:ea typeface="Plus Jakarta Sans" pitchFamily="34" charset="-122"/>
                 <a:cs typeface="Plus Jakarta Sans" pitchFamily="34" charset="-120"/>
               </a:rPr>
               <a:t>Bis in die 1970er an der Spitze, danach starker Rückgang.</a:t>
             </a:r>
-            <a:endParaRPr lang="en-US" sz="1300" dirty="0"/>
+            <a:endParaRPr lang="en-US" sz="1600" dirty="0"/>
           </a:p>
         </p:txBody>
       </p:sp>
@@ -8949,13 +6561,20 @@
             <a:prstDash val="solid"/>
           </a:ln>
           <a:effectLst>
-            <a:outerShdw sx="100000" sy="100000" kx="0" ky="0" algn="bl" rotWithShape="0" blurRad="101600" dist="63500" dir="8100000">
-              <a:srgbClr val="0f172a">
+            <a:outerShdw blurRad="101600" dist="63500" dir="8100000" algn="bl" rotWithShape="0">
+              <a:srgbClr val="0F172A">
                 <a:alpha val="100000"/>
               </a:srgbClr>
             </a:outerShdw>
           </a:effectLst>
         </p:spPr>
+        <p:txBody>
+          <a:bodyPr/>
+          <a:lstStyle/>
+          <a:p>
+            <a:endParaRPr lang="de-CH"/>
+          </a:p>
+        </p:txBody>
       </p:sp>
       <p:sp>
         <p:nvSpPr>
@@ -8981,38 +6600,21 @@
             <a:prstDash val="solid"/>
           </a:ln>
           <a:effectLst>
-            <a:outerShdw sx="100000" sy="100000" kx="0" ky="0" algn="bl" rotWithShape="0" blurRad="101600" dist="31750" dir="8100000">
-              <a:srgbClr val="0f172a">
+            <a:outerShdw blurRad="101600" dist="31750" dir="8100000" algn="bl" rotWithShape="0">
+              <a:srgbClr val="0F172A">
                 <a:alpha val="100000"/>
               </a:srgbClr>
             </a:outerShdw>
           </a:effectLst>
         </p:spPr>
-      </p:sp>
-      <p:pic>
-        <p:nvPicPr>
-          <p:cNvPr id="23" name="Image 2" descr="preencoded.png">    </p:cNvPr>
-          <p:cNvPicPr>
-            <a:picLocks noChangeAspect="1"/>
-          </p:cNvPicPr>
-          <p:nvPr/>
-        </p:nvPicPr>
-        <p:blipFill>
-          <a:blip r:embed="rId3"/>
-          <a:stretch>
-            <a:fillRect/>
-          </a:stretch>
-        </p:blipFill>
-        <p:spPr>
-          <a:xfrm>
-            <a:off x="4953671" y="4514759"/>
-            <a:ext cx="260787" cy="260787"/>
-          </a:xfrm>
-          <a:prstGeom prst="rect">
-            <a:avLst/>
-          </a:prstGeom>
-        </p:spPr>
-      </p:pic>
+        <p:txBody>
+          <a:bodyPr/>
+          <a:lstStyle/>
+          <a:p>
+            <a:endParaRPr lang="de-CH"/>
+          </a:p>
+        </p:txBody>
+      </p:sp>
       <p:sp>
         <p:nvSpPr>
           <p:cNvPr id="24" name="Text 19"/>
@@ -9034,7 +6636,7 @@
           <a:bodyPr wrap="square" lIns="0" tIns="0" rIns="0" bIns="0" rtlCol="0" anchor="ctr"/>
           <a:lstStyle/>
           <a:p>
-            <a:pPr indent="0" marL="0">
+            <a:pPr marL="0" indent="0">
               <a:buNone/>
             </a:pPr>
             <a:r>
@@ -9073,24 +6675,21 @@
           <a:bodyPr wrap="square" lIns="0" tIns="0" rIns="0" bIns="0" rtlCol="0" anchor="ctr"/>
           <a:lstStyle/>
           <a:p>
-            <a:pPr indent="0" marL="0">
+            <a:pPr marL="0" indent="0">
               <a:lnSpc>
                 <a:spcPct val="115000"/>
               </a:lnSpc>
               <a:buNone/>
             </a:pPr>
             <a:r>
-              <a:rPr lang="en-US" sz="1300" dirty="0">
-                <a:solidFill>
-                  <a:srgbClr val="475569"/>
-                </a:solidFill>
+              <a:rPr lang="en-US" sz="1600" dirty="0">
                 <a:latin typeface="Plus Jakarta Sans" pitchFamily="34" charset="0"/>
                 <a:ea typeface="Plus Jakarta Sans" pitchFamily="34" charset="-122"/>
                 <a:cs typeface="Plus Jakarta Sans" pitchFamily="34" charset="-120"/>
               </a:rPr>
               <a:t>In den meisten Kantonen nimmt die Beteiligung deutlich ab.</a:t>
             </a:r>
-            <a:endParaRPr lang="en-US" sz="1300" dirty="0"/>
+            <a:endParaRPr lang="en-US" sz="1600" dirty="0"/>
           </a:p>
         </p:txBody>
       </p:sp>
@@ -9120,13 +6719,20 @@
             <a:prstDash val="solid"/>
           </a:ln>
           <a:effectLst>
-            <a:outerShdw sx="100000" sy="100000" kx="0" ky="0" algn="bl" rotWithShape="0" blurRad="101600" dist="63500" dir="8100000">
-              <a:srgbClr val="0f172a">
+            <a:outerShdw blurRad="101600" dist="63500" dir="8100000" algn="bl" rotWithShape="0">
+              <a:srgbClr val="0F172A">
                 <a:alpha val="100000"/>
               </a:srgbClr>
             </a:outerShdw>
           </a:effectLst>
         </p:spPr>
+        <p:txBody>
+          <a:bodyPr/>
+          <a:lstStyle/>
+          <a:p>
+            <a:endParaRPr lang="de-CH" sz="1600"/>
+          </a:p>
+        </p:txBody>
       </p:sp>
       <p:sp>
         <p:nvSpPr>
@@ -9152,17 +6758,256 @@
             <a:prstDash val="solid"/>
           </a:ln>
           <a:effectLst>
-            <a:outerShdw sx="100000" sy="100000" kx="0" ky="0" algn="bl" rotWithShape="0" blurRad="101600" dist="31750" dir="8100000">
-              <a:srgbClr val="0f172a">
+            <a:outerShdw blurRad="101600" dist="31750" dir="8100000" algn="bl" rotWithShape="0">
+              <a:srgbClr val="0F172A">
                 <a:alpha val="100000"/>
               </a:srgbClr>
             </a:outerShdw>
           </a:effectLst>
         </p:spPr>
+        <p:txBody>
+          <a:bodyPr/>
+          <a:lstStyle/>
+          <a:p>
+            <a:endParaRPr lang="de-CH"/>
+          </a:p>
+        </p:txBody>
+      </p:sp>
+      <p:sp>
+        <p:nvSpPr>
+          <p:cNvPr id="29" name="Text 23"/>
+          <p:cNvSpPr/>
+          <p:nvPr/>
+        </p:nvSpPr>
+        <p:spPr>
+          <a:xfrm>
+            <a:off x="9052560" y="4361688"/>
+            <a:ext cx="2331720" cy="566928"/>
+          </a:xfrm>
+          <a:prstGeom prst="rect">
+            <a:avLst/>
+          </a:prstGeom>
+          <a:noFill/>
+          <a:ln/>
+        </p:spPr>
+        <p:txBody>
+          <a:bodyPr wrap="square" lIns="0" tIns="0" rIns="0" bIns="0" rtlCol="0" anchor="ctr"/>
+          <a:lstStyle/>
+          <a:p>
+            <a:pPr marL="0" indent="0">
+              <a:buNone/>
+            </a:pPr>
+            <a:r>
+              <a:rPr lang="en-US" sz="1700" b="1" dirty="0">
+                <a:solidFill>
+                  <a:srgbClr val="0F172A"/>
+                </a:solidFill>
+                <a:latin typeface="Plus Jakarta Sans" pitchFamily="34" charset="0"/>
+                <a:ea typeface="Plus Jakarta Sans" pitchFamily="34" charset="-122"/>
+                <a:cs typeface="Plus Jakarta Sans" pitchFamily="34" charset="-120"/>
+              </a:rPr>
+              <a:t>Stand </a:t>
+            </a:r>
+            <a:r>
+              <a:rPr lang="en-US" sz="1700" b="1" dirty="0" err="1">
+                <a:solidFill>
+                  <a:srgbClr val="0F172A"/>
+                </a:solidFill>
+                <a:latin typeface="Plus Jakarta Sans" pitchFamily="34" charset="0"/>
+                <a:ea typeface="Plus Jakarta Sans" pitchFamily="34" charset="-122"/>
+                <a:cs typeface="Plus Jakarta Sans" pitchFamily="34" charset="-120"/>
+              </a:rPr>
+              <a:t>heute</a:t>
+            </a:r>
+            <a:endParaRPr lang="en-US" sz="1700" dirty="0"/>
+          </a:p>
+        </p:txBody>
+      </p:sp>
+      <p:sp>
+        <p:nvSpPr>
+          <p:cNvPr id="30" name="Text 24"/>
+          <p:cNvSpPr/>
+          <p:nvPr/>
+        </p:nvSpPr>
+        <p:spPr>
+          <a:xfrm>
+            <a:off x="8385048" y="5056632"/>
+            <a:ext cx="2880360" cy="1005840"/>
+          </a:xfrm>
+          <a:prstGeom prst="rect">
+            <a:avLst/>
+          </a:prstGeom>
+          <a:noFill/>
+          <a:ln/>
+        </p:spPr>
+        <p:txBody>
+          <a:bodyPr wrap="square" lIns="0" tIns="0" rIns="0" bIns="0" rtlCol="0" anchor="ctr"/>
+          <a:lstStyle/>
+          <a:p>
+            <a:pPr marL="0" indent="0">
+              <a:lnSpc>
+                <a:spcPct val="115000"/>
+              </a:lnSpc>
+              <a:buNone/>
+            </a:pPr>
+            <a:r>
+              <a:rPr lang="en-US" sz="1600" dirty="0" err="1">
+                <a:latin typeface="Plus Jakarta Sans" pitchFamily="34" charset="0"/>
+                <a:ea typeface="Plus Jakarta Sans" pitchFamily="34" charset="-122"/>
+              </a:rPr>
+              <a:t>Aktuell</a:t>
+            </a:r>
+            <a:r>
+              <a:rPr lang="en-US" sz="1600" dirty="0">
+                <a:latin typeface="Plus Jakarta Sans" pitchFamily="34" charset="0"/>
+                <a:ea typeface="Plus Jakarta Sans" pitchFamily="34" charset="-122"/>
+              </a:rPr>
+              <a:t> </a:t>
+            </a:r>
+            <a:r>
+              <a:rPr lang="en-US" sz="1600" dirty="0" err="1">
+                <a:latin typeface="Plus Jakarta Sans" pitchFamily="34" charset="0"/>
+                <a:ea typeface="Plus Jakarta Sans" pitchFamily="34" charset="-122"/>
+              </a:rPr>
+              <a:t>liegt</a:t>
+            </a:r>
+            <a:r>
+              <a:rPr lang="en-US" sz="1600" dirty="0">
+                <a:latin typeface="Plus Jakarta Sans" pitchFamily="34" charset="0"/>
+                <a:ea typeface="Plus Jakarta Sans" pitchFamily="34" charset="-122"/>
+              </a:rPr>
+              <a:t> die </a:t>
+            </a:r>
+            <a:r>
+              <a:rPr lang="en-US" sz="1600" dirty="0" err="1">
+                <a:latin typeface="Plus Jakarta Sans" pitchFamily="34" charset="0"/>
+                <a:ea typeface="Plus Jakarta Sans" pitchFamily="34" charset="-122"/>
+              </a:rPr>
+              <a:t>Stimmbeteiligung</a:t>
+            </a:r>
+            <a:r>
+              <a:rPr lang="en-US" sz="1600" dirty="0">
+                <a:latin typeface="Plus Jakarta Sans" pitchFamily="34" charset="0"/>
+                <a:ea typeface="Plus Jakarta Sans" pitchFamily="34" charset="-122"/>
+              </a:rPr>
+              <a:t> </a:t>
+            </a:r>
+            <a:r>
+              <a:rPr lang="en-US" sz="1600" dirty="0" err="1">
+                <a:latin typeface="Plus Jakarta Sans" pitchFamily="34" charset="0"/>
+                <a:ea typeface="Plus Jakarta Sans" pitchFamily="34" charset="-122"/>
+              </a:rPr>
+              <a:t>historisch</a:t>
+            </a:r>
+            <a:r>
+              <a:rPr lang="en-US" sz="1600" dirty="0">
+                <a:latin typeface="Plus Jakarta Sans" pitchFamily="34" charset="0"/>
+                <a:ea typeface="Plus Jakarta Sans" pitchFamily="34" charset="-122"/>
+              </a:rPr>
+              <a:t> </a:t>
+            </a:r>
+            <a:r>
+              <a:rPr lang="en-US" sz="1600" dirty="0" err="1">
+                <a:latin typeface="Plus Jakarta Sans" pitchFamily="34" charset="0"/>
+                <a:ea typeface="Plus Jakarta Sans" pitchFamily="34" charset="-122"/>
+              </a:rPr>
+              <a:t>gesehen</a:t>
+            </a:r>
+            <a:r>
+              <a:rPr lang="en-US" sz="1600" dirty="0">
+                <a:latin typeface="Plus Jakarta Sans" pitchFamily="34" charset="0"/>
+                <a:ea typeface="Plus Jakarta Sans" pitchFamily="34" charset="-122"/>
+              </a:rPr>
+              <a:t> </a:t>
+            </a:r>
+            <a:r>
+              <a:rPr lang="en-US" sz="1600" dirty="0" err="1">
+                <a:latin typeface="Plus Jakarta Sans" pitchFamily="34" charset="0"/>
+                <a:ea typeface="Plus Jakarta Sans" pitchFamily="34" charset="-122"/>
+              </a:rPr>
+              <a:t>sehr</a:t>
+            </a:r>
+            <a:r>
+              <a:rPr lang="en-US" sz="1600" dirty="0">
+                <a:latin typeface="Plus Jakarta Sans" pitchFamily="34" charset="0"/>
+                <a:ea typeface="Plus Jakarta Sans" pitchFamily="34" charset="-122"/>
+              </a:rPr>
+              <a:t> </a:t>
+            </a:r>
+            <a:r>
+              <a:rPr lang="en-US" sz="1600" dirty="0" err="1">
+                <a:latin typeface="Plus Jakarta Sans" pitchFamily="34" charset="0"/>
+                <a:ea typeface="Plus Jakarta Sans" pitchFamily="34" charset="-122"/>
+              </a:rPr>
+              <a:t>tief</a:t>
+            </a:r>
+            <a:r>
+              <a:rPr lang="en-US" sz="1600" dirty="0">
+                <a:latin typeface="Plus Jakarta Sans" pitchFamily="34" charset="0"/>
+                <a:ea typeface="Plus Jakarta Sans" pitchFamily="34" charset="-122"/>
+              </a:rPr>
+              <a:t>.</a:t>
+            </a:r>
+            <a:endParaRPr lang="en-US" sz="1600" dirty="0"/>
+          </a:p>
+        </p:txBody>
       </p:sp>
       <p:pic>
         <p:nvPicPr>
-          <p:cNvPr id="28" name="Image 3" descr="preencoded.png">    </p:cNvPr>
+          <p:cNvPr id="2050" name="Picture 2">
+            <a:extLst>
+              <a:ext uri="{FF2B5EF4-FFF2-40B4-BE49-F238E27FC236}">
+                <a16:creationId xmlns:a16="http://schemas.microsoft.com/office/drawing/2014/main" id="{D9D9BD04-62AD-95A4-1077-D1FAC50D0097}"/>
+              </a:ext>
+            </a:extLst>
+          </p:cNvPr>
+          <p:cNvPicPr>
+            <a:picLocks noChangeAspect="1" noChangeArrowheads="1"/>
+          </p:cNvPicPr>
+          <p:nvPr/>
+        </p:nvPicPr>
+        <p:blipFill>
+          <a:blip r:embed="rId3">
+            <a:extLst>
+              <a:ext uri="{28A0092B-C50C-407E-A947-70E740481C1C}">
+                <a14:useLocalDpi xmlns:a14="http://schemas.microsoft.com/office/drawing/2010/main" val="0"/>
+              </a:ext>
+            </a:extLst>
+          </a:blip>
+          <a:srcRect/>
+          <a:stretch>
+            <a:fillRect/>
+          </a:stretch>
+        </p:blipFill>
+        <p:spPr bwMode="auto">
+          <a:xfrm>
+            <a:off x="8489058" y="2165667"/>
+            <a:ext cx="318443" cy="386969"/>
+          </a:xfrm>
+          <a:prstGeom prst="rect">
+            <a:avLst/>
+          </a:prstGeom>
+          <a:noFill/>
+          <a:extLst>
+            <a:ext uri="{909E8E84-426E-40DD-AFC4-6F175D3DCCD1}">
+              <a14:hiddenFill xmlns:a14="http://schemas.microsoft.com/office/drawing/2010/main">
+                <a:solidFill>
+                  <a:srgbClr val="FFFFFF"/>
+                </a:solidFill>
+              </a14:hiddenFill>
+            </a:ext>
+          </a:extLst>
+        </p:spPr>
+      </p:pic>
+      <p:pic>
+        <p:nvPicPr>
+          <p:cNvPr id="33" name="Grafik 32">
+            <a:extLst>
+              <a:ext uri="{FF2B5EF4-FFF2-40B4-BE49-F238E27FC236}">
+                <a16:creationId xmlns:a16="http://schemas.microsoft.com/office/drawing/2014/main" id="{AC9C272C-5DA8-D8D1-7D78-EEED515C80E8}"/>
+              </a:ext>
+            </a:extLst>
+          </p:cNvPr>
           <p:cNvPicPr>
             <a:picLocks noChangeAspect="1"/>
           </p:cNvPicPr>
@@ -9176,809 +7021,91 @@
         </p:blipFill>
         <p:spPr>
           <a:xfrm>
-            <a:off x="8519831" y="4514759"/>
-            <a:ext cx="260787" cy="260787"/>
+            <a:off x="4917463" y="2165666"/>
+            <a:ext cx="331688" cy="401169"/>
           </a:xfrm>
           <a:prstGeom prst="rect">
             <a:avLst/>
           </a:prstGeom>
         </p:spPr>
       </p:pic>
-      <p:sp>
-        <p:nvSpPr>
-          <p:cNvPr id="29" name="Text 23"/>
-          <p:cNvSpPr/>
-          <p:nvPr/>
-        </p:nvSpPr>
-        <p:spPr>
-          <a:xfrm>
-            <a:off x="9052560" y="4361688"/>
-            <a:ext cx="2331720" cy="566928"/>
-          </a:xfrm>
-          <a:prstGeom prst="rect">
-            <a:avLst/>
-          </a:prstGeom>
-          <a:noFill/>
-          <a:ln/>
-        </p:spPr>
-        <p:txBody>
-          <a:bodyPr wrap="square" lIns="0" tIns="0" rIns="0" bIns="0" rtlCol="0" anchor="ctr"/>
-          <a:lstStyle/>
-          <a:p>
-            <a:pPr indent="0" marL="0">
-              <a:buNone/>
-            </a:pPr>
-            <a:r>
-              <a:rPr lang="en-US" sz="1700" b="1" dirty="0">
-                <a:solidFill>
-                  <a:srgbClr val="0F172A"/>
-                </a:solidFill>
-                <a:latin typeface="Plus Jakarta Sans" pitchFamily="34" charset="0"/>
-                <a:ea typeface="Plus Jakarta Sans" pitchFamily="34" charset="-122"/>
-                <a:cs typeface="Plus Jakarta Sans" pitchFamily="34" charset="-120"/>
-              </a:rPr>
-              <a:t>Bundesrats-Effekt</a:t>
-            </a:r>
-            <a:endParaRPr lang="en-US" sz="1700" dirty="0"/>
-          </a:p>
-        </p:txBody>
-      </p:sp>
-      <p:sp>
-        <p:nvSpPr>
-          <p:cNvPr id="30" name="Text 24"/>
-          <p:cNvSpPr/>
-          <p:nvPr/>
-        </p:nvSpPr>
-        <p:spPr>
-          <a:xfrm>
-            <a:off x="8385048" y="5056632"/>
-            <a:ext cx="2880360" cy="1005840"/>
-          </a:xfrm>
-          <a:prstGeom prst="rect">
-            <a:avLst/>
-          </a:prstGeom>
-          <a:noFill/>
-          <a:ln/>
-        </p:spPr>
-        <p:txBody>
-          <a:bodyPr wrap="square" lIns="0" tIns="0" rIns="0" bIns="0" rtlCol="0" anchor="ctr"/>
-          <a:lstStyle/>
-          <a:p>
-            <a:pPr indent="0" marL="0">
-              <a:lnSpc>
-                <a:spcPct val="115000"/>
-              </a:lnSpc>
-              <a:buNone/>
-            </a:pPr>
-            <a:r>
-              <a:rPr lang="en-US" sz="1300" dirty="0">
-                <a:solidFill>
-                  <a:srgbClr val="475569"/>
-                </a:solidFill>
-                <a:latin typeface="Plus Jakarta Sans" pitchFamily="34" charset="0"/>
-                <a:ea typeface="Plus Jakarta Sans" pitchFamily="34" charset="-122"/>
-                <a:cs typeface="Plus Jakarta Sans" pitchFamily="34" charset="-120"/>
-              </a:rPr>
-              <a:t>Heimatkantone markiert. Offene Forschungsfrage: Wirkt Repräsentation?</a:t>
-            </a:r>
-            <a:endParaRPr lang="en-US" sz="1300" dirty="0"/>
-          </a:p>
-        </p:txBody>
-      </p:sp>
-    </p:spTree>
-  </p:cSld>
-  <p:clrMapOvr>
-    <a:masterClrMapping/>
-  </p:clrMapOvr>
-</p:sld>
-</file>
-
-<file path=ppt/slides/slide8.xml><?xml version="1.0" encoding="utf-8"?>
-<p:sld xmlns:a="http://schemas.openxmlformats.org/drawingml/2006/main" xmlns:r="http://schemas.openxmlformats.org/officeDocument/2006/relationships" xmlns:p="http://schemas.openxmlformats.org/presentationml/2006/main">
-  <p:cSld name="Slide 8">
-    <p:bg>
-      <p:bgPr>
-        <a:solidFill>
-          <a:srgbClr val="0F172A"/>
-        </a:solidFill>
-      </p:bgPr>
-    </p:bg>
-    <p:spTree>
-      <p:nvGrpSpPr>
-        <p:cNvPr id="1" name=""/>
-        <p:cNvGrpSpPr/>
-        <p:nvPr/>
-      </p:nvGrpSpPr>
-      <p:grpSpPr>
-        <a:xfrm>
-          <a:off x="0" y="0"/>
-          <a:ext cx="0" cy="0"/>
-          <a:chOff x="0" y="0"/>
-          <a:chExt cx="0" cy="0"/>
-        </a:xfrm>
-      </p:grpSpPr>
-      <p:sp>
-        <p:nvSpPr>
-          <p:cNvPr id="2" name="Shape 0"/>
-          <p:cNvSpPr/>
-          <p:nvPr/>
-        </p:nvSpPr>
-        <p:spPr>
-          <a:xfrm>
-            <a:off x="777240" y="868680"/>
-            <a:ext cx="1783080" cy="384048"/>
-          </a:xfrm>
-          <a:prstGeom prst="roundRect">
-            <a:avLst>
-              <a:gd name="adj" fmla="val 16667"/>
-            </a:avLst>
-          </a:prstGeom>
-          <a:solidFill>
-            <a:srgbClr val="E30613"/>
-          </a:solidFill>
-          <a:ln w="25400">
-            <a:solidFill>
-              <a:srgbClr val="FFFFFF"/>
-            </a:solidFill>
-            <a:prstDash val="solid"/>
-          </a:ln>
-          <a:effectLst>
-            <a:outerShdw sx="100000" sy="100000" kx="0" ky="0" algn="bl" rotWithShape="0" blurRad="101600" dist="50800" dir="8100000">
-              <a:srgbClr val="0f172a">
-                <a:alpha val="100000"/>
-              </a:srgbClr>
-            </a:outerShdw>
-          </a:effectLst>
-        </p:spPr>
-      </p:sp>
-      <p:sp>
-        <p:nvSpPr>
-          <p:cNvPr id="3" name="Text 1"/>
-          <p:cNvSpPr/>
-          <p:nvPr/>
-        </p:nvSpPr>
-        <p:spPr>
-          <a:xfrm>
-            <a:off x="777240" y="868680"/>
-            <a:ext cx="1783080" cy="384048"/>
-          </a:xfrm>
-          <a:prstGeom prst="rect">
-            <a:avLst/>
-          </a:prstGeom>
-          <a:noFill/>
-          <a:ln/>
-        </p:spPr>
-        <p:txBody>
-          <a:bodyPr wrap="square" lIns="0" tIns="0" rIns="0" bIns="0" rtlCol="0" anchor="ctr"/>
-          <a:lstStyle/>
-          <a:p>
-            <a:pPr algn="ctr" indent="0" marL="0">
-              <a:buNone/>
-            </a:pPr>
-            <a:r>
-              <a:rPr lang="en-US" sz="1100" b="1" spc="150" kern="0" dirty="0">
-                <a:solidFill>
-                  <a:srgbClr val="FFFFFF"/>
-                </a:solidFill>
-                <a:latin typeface="Plus Jakarta Sans" pitchFamily="34" charset="0"/>
-                <a:ea typeface="Plus Jakarta Sans" pitchFamily="34" charset="-122"/>
-                <a:cs typeface="Plus Jakarta Sans" pitchFamily="34" charset="-120"/>
-              </a:rPr>
-              <a:t>07 · FAZIT</a:t>
-            </a:r>
-            <a:endParaRPr lang="en-US" sz="1100" dirty="0"/>
-          </a:p>
-        </p:txBody>
-      </p:sp>
-      <p:sp>
-        <p:nvSpPr>
-          <p:cNvPr id="4" name="Text 2"/>
-          <p:cNvSpPr/>
-          <p:nvPr/>
-        </p:nvSpPr>
-        <p:spPr>
-          <a:xfrm>
-            <a:off x="731520" y="1417320"/>
-            <a:ext cx="10515600" cy="1005840"/>
-          </a:xfrm>
-          <a:prstGeom prst="rect">
-            <a:avLst/>
-          </a:prstGeom>
-          <a:noFill/>
-          <a:ln/>
-        </p:spPr>
-        <p:txBody>
-          <a:bodyPr wrap="square" lIns="0" tIns="0" rIns="0" bIns="0" rtlCol="0" anchor="ctr"/>
-          <a:lstStyle/>
-          <a:p>
-            <a:pPr indent="0" marL="0">
-              <a:buNone/>
-            </a:pPr>
-            <a:r>
-              <a:rPr lang="en-US" sz="5400" b="1" spc="-50" kern="0" dirty="0">
-                <a:solidFill>
-                  <a:srgbClr val="FFFFFF"/>
-                </a:solidFill>
-                <a:latin typeface="Plus Jakarta Sans" pitchFamily="34" charset="0"/>
-                <a:ea typeface="Plus Jakarta Sans" pitchFamily="34" charset="-122"/>
-                <a:cs typeface="Plus Jakarta Sans" pitchFamily="34" charset="-120"/>
-              </a:rPr>
-              <a:t>Demokratie als </a:t>
-            </a:r>
-            <a:pPr indent="0" marL="0">
-              <a:buNone/>
-            </a:pPr>
-            <a:r>
-              <a:rPr lang="en-US" sz="5400" b="1" spc="-50" kern="0" dirty="0">
-                <a:solidFill>
-                  <a:srgbClr val="E30613"/>
-                </a:solidFill>
-                <a:latin typeface="Plus Jakarta Sans" pitchFamily="34" charset="0"/>
-                <a:ea typeface="Plus Jakarta Sans" pitchFamily="34" charset="-122"/>
-                <a:cs typeface="Plus Jakarta Sans" pitchFamily="34" charset="-120"/>
-              </a:rPr>
-              <a:t>Live-Erlebnis</a:t>
-            </a:r>
-            <a:endParaRPr lang="en-US" sz="5400" dirty="0"/>
-          </a:p>
-        </p:txBody>
-      </p:sp>
-      <p:sp>
-        <p:nvSpPr>
-          <p:cNvPr id="5" name="Shape 3"/>
-          <p:cNvSpPr/>
-          <p:nvPr/>
-        </p:nvSpPr>
-        <p:spPr>
-          <a:xfrm>
-            <a:off x="777240" y="2743200"/>
-            <a:ext cx="3108960" cy="2194560"/>
-          </a:xfrm>
-          <a:prstGeom prst="roundRect">
-            <a:avLst>
-              <a:gd name="adj" fmla="val 5417"/>
-            </a:avLst>
-          </a:prstGeom>
-          <a:solidFill>
-            <a:srgbClr val="1E293B"/>
-          </a:solidFill>
-          <a:ln w="31750">
-            <a:solidFill>
-              <a:srgbClr val="E30613"/>
-            </a:solidFill>
-            <a:prstDash val="solid"/>
-          </a:ln>
-          <a:effectLst>
-            <a:outerShdw sx="100000" sy="100000" kx="0" ky="0" algn="bl" rotWithShape="0" blurRad="101600" dist="63500" dir="8100000">
-              <a:srgbClr val="0f172a">
-                <a:alpha val="100000"/>
-              </a:srgbClr>
-            </a:outerShdw>
-          </a:effectLst>
-        </p:spPr>
-      </p:sp>
-      <p:sp>
-        <p:nvSpPr>
-          <p:cNvPr id="6" name="Shape 4"/>
-          <p:cNvSpPr/>
-          <p:nvPr/>
-        </p:nvSpPr>
-        <p:spPr>
-          <a:xfrm>
-            <a:off x="1097280" y="3063240"/>
-            <a:ext cx="731520" cy="731520"/>
-          </a:xfrm>
-          <a:prstGeom prst="ellipse">
-            <a:avLst/>
-          </a:prstGeom>
-          <a:solidFill>
-            <a:srgbClr val="E30613"/>
-          </a:solidFill>
-          <a:ln w="25400">
-            <a:solidFill>
-              <a:srgbClr val="FFFFFF"/>
-            </a:solidFill>
-            <a:prstDash val="solid"/>
-          </a:ln>
-        </p:spPr>
-      </p:sp>
       <p:pic>
         <p:nvPicPr>
-          <p:cNvPr id="7" name="Image 0" descr="preencoded.png">    </p:cNvPr>
+          <p:cNvPr id="35" name="Grafik 34">
+            <a:extLst>
+              <a:ext uri="{FF2B5EF4-FFF2-40B4-BE49-F238E27FC236}">
+                <a16:creationId xmlns:a16="http://schemas.microsoft.com/office/drawing/2014/main" id="{ED0C419D-EAFC-236D-A395-F345044C0EFF}"/>
+              </a:ext>
+            </a:extLst>
+          </p:cNvPr>
           <p:cNvPicPr>
             <a:picLocks noChangeAspect="1"/>
           </p:cNvPicPr>
           <p:nvPr/>
         </p:nvPicPr>
         <p:blipFill>
-          <a:blip r:embed="rId1"/>
+          <a:blip r:embed="rId5"/>
           <a:stretch>
             <a:fillRect/>
           </a:stretch>
         </p:blipFill>
         <p:spPr>
           <a:xfrm>
-            <a:off x="1294790" y="3260750"/>
-            <a:ext cx="336499" cy="336499"/>
+            <a:off x="8472906" y="4468682"/>
+            <a:ext cx="352908" cy="391140"/>
           </a:xfrm>
           <a:prstGeom prst="rect">
             <a:avLst/>
           </a:prstGeom>
         </p:spPr>
       </p:pic>
-      <p:sp>
-        <p:nvSpPr>
-          <p:cNvPr id="8" name="Text 5"/>
-          <p:cNvSpPr/>
-          <p:nvPr/>
-        </p:nvSpPr>
-        <p:spPr>
-          <a:xfrm>
-            <a:off x="1097280" y="3931920"/>
-            <a:ext cx="2468880" cy="502920"/>
-          </a:xfrm>
-          <a:prstGeom prst="rect">
-            <a:avLst/>
-          </a:prstGeom>
-          <a:noFill/>
-          <a:ln/>
-        </p:spPr>
-        <p:txBody>
-          <a:bodyPr wrap="square" lIns="0" tIns="0" rIns="0" bIns="0" rtlCol="0" anchor="ctr"/>
-          <a:lstStyle/>
-          <a:p>
-            <a:pPr indent="0" marL="0">
-              <a:buNone/>
-            </a:pPr>
-            <a:r>
-              <a:rPr lang="en-US" sz="2400" b="1" dirty="0">
-                <a:solidFill>
-                  <a:srgbClr val="FFFFFF"/>
-                </a:solidFill>
-                <a:latin typeface="Plus Jakarta Sans" pitchFamily="34" charset="0"/>
-                <a:ea typeface="Plus Jakarta Sans" pitchFamily="34" charset="-122"/>
-                <a:cs typeface="Plus Jakarta Sans" pitchFamily="34" charset="-120"/>
-              </a:rPr>
-              <a:t>Demokratie</a:t>
-            </a:r>
-            <a:endParaRPr lang="en-US" sz="2400" dirty="0"/>
-          </a:p>
-        </p:txBody>
-      </p:sp>
-      <p:sp>
-        <p:nvSpPr>
-          <p:cNvPr id="9" name="Text 6"/>
-          <p:cNvSpPr/>
-          <p:nvPr/>
-        </p:nvSpPr>
-        <p:spPr>
-          <a:xfrm>
-            <a:off x="1097280" y="4434840"/>
-            <a:ext cx="2468880" cy="411480"/>
-          </a:xfrm>
-          <a:prstGeom prst="rect">
-            <a:avLst/>
-          </a:prstGeom>
-          <a:noFill/>
-          <a:ln/>
-        </p:spPr>
-        <p:txBody>
-          <a:bodyPr wrap="square" lIns="0" tIns="0" rIns="0" bIns="0" rtlCol="0" anchor="ctr"/>
-          <a:lstStyle/>
-          <a:p>
-            <a:pPr indent="0" marL="0">
-              <a:buNone/>
-            </a:pPr>
-            <a:r>
-              <a:rPr lang="en-US" sz="1600" b="1" dirty="0">
-                <a:solidFill>
-                  <a:srgbClr val="E30613"/>
-                </a:solidFill>
-                <a:latin typeface="Plus Jakarta Sans" pitchFamily="34" charset="0"/>
-                <a:ea typeface="Plus Jakarta Sans" pitchFamily="34" charset="-122"/>
-                <a:cs typeface="Plus Jakarta Sans" pitchFamily="34" charset="-120"/>
-              </a:rPr>
-              <a:t>= Beteiligung</a:t>
-            </a:r>
-            <a:endParaRPr lang="en-US" sz="1600" dirty="0"/>
-          </a:p>
-        </p:txBody>
-      </p:sp>
-      <p:sp>
-        <p:nvSpPr>
-          <p:cNvPr id="10" name="Shape 7"/>
-          <p:cNvSpPr/>
-          <p:nvPr/>
-        </p:nvSpPr>
-        <p:spPr>
-          <a:xfrm>
-            <a:off x="4526280" y="2743200"/>
-            <a:ext cx="3108960" cy="2194560"/>
-          </a:xfrm>
-          <a:prstGeom prst="roundRect">
-            <a:avLst>
-              <a:gd name="adj" fmla="val 5417"/>
-            </a:avLst>
-          </a:prstGeom>
-          <a:solidFill>
-            <a:srgbClr val="1E293B"/>
-          </a:solidFill>
-          <a:ln w="31750">
-            <a:solidFill>
-              <a:srgbClr val="2563EB"/>
-            </a:solidFill>
-            <a:prstDash val="solid"/>
-          </a:ln>
-          <a:effectLst>
-            <a:outerShdw sx="100000" sy="100000" kx="0" ky="0" algn="bl" rotWithShape="0" blurRad="101600" dist="63500" dir="8100000">
-              <a:srgbClr val="0f172a">
-                <a:alpha val="100000"/>
-              </a:srgbClr>
-            </a:outerShdw>
-          </a:effectLst>
-        </p:spPr>
-      </p:sp>
-      <p:sp>
-        <p:nvSpPr>
-          <p:cNvPr id="11" name="Shape 8"/>
-          <p:cNvSpPr/>
-          <p:nvPr/>
-        </p:nvSpPr>
-        <p:spPr>
-          <a:xfrm>
-            <a:off x="4846320" y="3063240"/>
-            <a:ext cx="731520" cy="731520"/>
-          </a:xfrm>
-          <a:prstGeom prst="ellipse">
-            <a:avLst/>
-          </a:prstGeom>
-          <a:solidFill>
-            <a:srgbClr val="2563EB"/>
-          </a:solidFill>
-          <a:ln w="25400">
-            <a:solidFill>
-              <a:srgbClr val="FFFFFF"/>
-            </a:solidFill>
-            <a:prstDash val="solid"/>
-          </a:ln>
-        </p:spPr>
-      </p:sp>
       <p:pic>
         <p:nvPicPr>
-          <p:cNvPr id="12" name="Image 1" descr="preencoded.png">    </p:cNvPr>
+          <p:cNvPr id="2054" name="Picture 6" descr="80er jahre - Kostenlose formen und symbole-Icons">
+            <a:extLst>
+              <a:ext uri="{FF2B5EF4-FFF2-40B4-BE49-F238E27FC236}">
+                <a16:creationId xmlns:a16="http://schemas.microsoft.com/office/drawing/2014/main" id="{D6401848-8269-3C0F-2F3D-C6FA7779D533}"/>
+              </a:ext>
+            </a:extLst>
+          </p:cNvPr>
           <p:cNvPicPr>
-            <a:picLocks noChangeAspect="1"/>
+            <a:picLocks noChangeAspect="1" noChangeArrowheads="1"/>
           </p:cNvPicPr>
           <p:nvPr/>
         </p:nvPicPr>
         <p:blipFill>
-          <a:blip r:embed="rId2"/>
+          <a:blip r:embed="rId6">
+            <a:extLst>
+              <a:ext uri="{28A0092B-C50C-407E-A947-70E740481C1C}">
+                <a14:useLocalDpi xmlns:a14="http://schemas.microsoft.com/office/drawing/2010/main" val="0"/>
+              </a:ext>
+            </a:extLst>
+          </a:blip>
+          <a:srcRect/>
           <a:stretch>
             <a:fillRect/>
           </a:stretch>
         </p:blipFill>
-        <p:spPr>
-          <a:xfrm>
-            <a:off x="5043830" y="3260750"/>
-            <a:ext cx="336499" cy="336499"/>
+        <p:spPr bwMode="auto">
+          <a:xfrm>
+            <a:off x="4899261" y="4482995"/>
+            <a:ext cx="345706" cy="345706"/>
           </a:xfrm>
           <a:prstGeom prst="rect">
             <a:avLst/>
           </a:prstGeom>
+          <a:noFill/>
+          <a:extLst>
+            <a:ext uri="{909E8E84-426E-40DD-AFC4-6F175D3DCCD1}">
+              <a14:hiddenFill xmlns:a14="http://schemas.microsoft.com/office/drawing/2010/main">
+                <a:solidFill>
+                  <a:srgbClr val="FFFFFF"/>
+                </a:solidFill>
+              </a14:hiddenFill>
+            </a:ext>
+          </a:extLst>
         </p:spPr>
       </p:pic>
-      <p:sp>
-        <p:nvSpPr>
-          <p:cNvPr id="13" name="Text 9"/>
-          <p:cNvSpPr/>
-          <p:nvPr/>
-        </p:nvSpPr>
-        <p:spPr>
-          <a:xfrm>
-            <a:off x="4846320" y="3931920"/>
-            <a:ext cx="2468880" cy="502920"/>
-          </a:xfrm>
-          <a:prstGeom prst="rect">
-            <a:avLst/>
-          </a:prstGeom>
-          <a:noFill/>
-          <a:ln/>
-        </p:spPr>
-        <p:txBody>
-          <a:bodyPr wrap="square" lIns="0" tIns="0" rIns="0" bIns="0" rtlCol="0" anchor="ctr"/>
-          <a:lstStyle/>
-          <a:p>
-            <a:pPr indent="0" marL="0">
-              <a:buNone/>
-            </a:pPr>
-            <a:r>
-              <a:rPr lang="en-US" sz="2400" b="1" dirty="0">
-                <a:solidFill>
-                  <a:srgbClr val="FFFFFF"/>
-                </a:solidFill>
-                <a:latin typeface="Plus Jakarta Sans" pitchFamily="34" charset="0"/>
-                <a:ea typeface="Plus Jakarta Sans" pitchFamily="34" charset="-122"/>
-                <a:cs typeface="Plus Jakarta Sans" pitchFamily="34" charset="-120"/>
-              </a:rPr>
-              <a:t>Daten</a:t>
-            </a:r>
-            <a:endParaRPr lang="en-US" sz="2400" dirty="0"/>
-          </a:p>
-        </p:txBody>
-      </p:sp>
-      <p:sp>
-        <p:nvSpPr>
-          <p:cNvPr id="14" name="Text 10"/>
-          <p:cNvSpPr/>
-          <p:nvPr/>
-        </p:nvSpPr>
-        <p:spPr>
-          <a:xfrm>
-            <a:off x="4846320" y="4434840"/>
-            <a:ext cx="2468880" cy="411480"/>
-          </a:xfrm>
-          <a:prstGeom prst="rect">
-            <a:avLst/>
-          </a:prstGeom>
-          <a:noFill/>
-          <a:ln/>
-        </p:spPr>
-        <p:txBody>
-          <a:bodyPr wrap="square" lIns="0" tIns="0" rIns="0" bIns="0" rtlCol="0" anchor="ctr"/>
-          <a:lstStyle/>
-          <a:p>
-            <a:pPr indent="0" marL="0">
-              <a:buNone/>
-            </a:pPr>
-            <a:r>
-              <a:rPr lang="en-US" sz="1600" b="1" dirty="0">
-                <a:solidFill>
-                  <a:srgbClr val="2563EB"/>
-                </a:solidFill>
-                <a:latin typeface="Plus Jakarta Sans" pitchFamily="34" charset="0"/>
-                <a:ea typeface="Plus Jakarta Sans" pitchFamily="34" charset="-122"/>
-                <a:cs typeface="Plus Jakarta Sans" pitchFamily="34" charset="-120"/>
-              </a:rPr>
-              <a:t>= Verständnis</a:t>
-            </a:r>
-            <a:endParaRPr lang="en-US" sz="1600" dirty="0"/>
-          </a:p>
-        </p:txBody>
-      </p:sp>
-      <p:sp>
-        <p:nvSpPr>
-          <p:cNvPr id="15" name="Shape 11"/>
-          <p:cNvSpPr/>
-          <p:nvPr/>
-        </p:nvSpPr>
-        <p:spPr>
-          <a:xfrm>
-            <a:off x="8275320" y="2743200"/>
-            <a:ext cx="3108960" cy="2194560"/>
-          </a:xfrm>
-          <a:prstGeom prst="roundRect">
-            <a:avLst>
-              <a:gd name="adj" fmla="val 5417"/>
-            </a:avLst>
-          </a:prstGeom>
-          <a:solidFill>
-            <a:srgbClr val="1E293B"/>
-          </a:solidFill>
-          <a:ln w="31750">
-            <a:solidFill>
-              <a:srgbClr val="8B5CF6"/>
-            </a:solidFill>
-            <a:prstDash val="solid"/>
-          </a:ln>
-          <a:effectLst>
-            <a:outerShdw sx="100000" sy="100000" kx="0" ky="0" algn="bl" rotWithShape="0" blurRad="101600" dist="63500" dir="8100000">
-              <a:srgbClr val="0f172a">
-                <a:alpha val="100000"/>
-              </a:srgbClr>
-            </a:outerShdw>
-          </a:effectLst>
-        </p:spPr>
-      </p:sp>
-      <p:sp>
-        <p:nvSpPr>
-          <p:cNvPr id="16" name="Shape 12"/>
-          <p:cNvSpPr/>
-          <p:nvPr/>
-        </p:nvSpPr>
-        <p:spPr>
-          <a:xfrm>
-            <a:off x="8595360" y="3063240"/>
-            <a:ext cx="731520" cy="731520"/>
-          </a:xfrm>
-          <a:prstGeom prst="ellipse">
-            <a:avLst/>
-          </a:prstGeom>
-          <a:solidFill>
-            <a:srgbClr val="8B5CF6"/>
-          </a:solidFill>
-          <a:ln w="25400">
-            <a:solidFill>
-              <a:srgbClr val="FFFFFF"/>
-            </a:solidFill>
-            <a:prstDash val="solid"/>
-          </a:ln>
-        </p:spPr>
-      </p:sp>
-      <p:pic>
-        <p:nvPicPr>
-          <p:cNvPr id="17" name="Image 2" descr="preencoded.png">    </p:cNvPr>
-          <p:cNvPicPr>
-            <a:picLocks noChangeAspect="1"/>
-          </p:cNvPicPr>
-          <p:nvPr/>
-        </p:nvPicPr>
-        <p:blipFill>
-          <a:blip r:embed="rId3"/>
-          <a:stretch>
-            <a:fillRect/>
-          </a:stretch>
-        </p:blipFill>
-        <p:spPr>
-          <a:xfrm>
-            <a:off x="8792870" y="3260750"/>
-            <a:ext cx="336499" cy="336499"/>
-          </a:xfrm>
-          <a:prstGeom prst="rect">
-            <a:avLst/>
-          </a:prstGeom>
-        </p:spPr>
-      </p:pic>
-      <p:sp>
-        <p:nvSpPr>
-          <p:cNvPr id="18" name="Text 13"/>
-          <p:cNvSpPr/>
-          <p:nvPr/>
-        </p:nvSpPr>
-        <p:spPr>
-          <a:xfrm>
-            <a:off x="8595360" y="3931920"/>
-            <a:ext cx="2468880" cy="502920"/>
-          </a:xfrm>
-          <a:prstGeom prst="rect">
-            <a:avLst/>
-          </a:prstGeom>
-          <a:noFill/>
-          <a:ln/>
-        </p:spPr>
-        <p:txBody>
-          <a:bodyPr wrap="square" lIns="0" tIns="0" rIns="0" bIns="0" rtlCol="0" anchor="ctr"/>
-          <a:lstStyle/>
-          <a:p>
-            <a:pPr indent="0" marL="0">
-              <a:buNone/>
-            </a:pPr>
-            <a:r>
-              <a:rPr lang="en-US" sz="2400" b="1" dirty="0">
-                <a:solidFill>
-                  <a:srgbClr val="FFFFFF"/>
-                </a:solidFill>
-                <a:latin typeface="Plus Jakarta Sans" pitchFamily="34" charset="0"/>
-                <a:ea typeface="Plus Jakarta Sans" pitchFamily="34" charset="-122"/>
-                <a:cs typeface="Plus Jakarta Sans" pitchFamily="34" charset="-120"/>
-              </a:rPr>
-              <a:t>Kantönligeist</a:t>
-            </a:r>
-            <a:endParaRPr lang="en-US" sz="2400" dirty="0"/>
-          </a:p>
-        </p:txBody>
-      </p:sp>
-      <p:sp>
-        <p:nvSpPr>
-          <p:cNvPr id="19" name="Text 14"/>
-          <p:cNvSpPr/>
-          <p:nvPr/>
-        </p:nvSpPr>
-        <p:spPr>
-          <a:xfrm>
-            <a:off x="8595360" y="4434840"/>
-            <a:ext cx="2468880" cy="411480"/>
-          </a:xfrm>
-          <a:prstGeom prst="rect">
-            <a:avLst/>
-          </a:prstGeom>
-          <a:noFill/>
-          <a:ln/>
-        </p:spPr>
-        <p:txBody>
-          <a:bodyPr wrap="square" lIns="0" tIns="0" rIns="0" bIns="0" rtlCol="0" anchor="ctr"/>
-          <a:lstStyle/>
-          <a:p>
-            <a:pPr indent="0" marL="0">
-              <a:buNone/>
-            </a:pPr>
-            <a:r>
-              <a:rPr lang="en-US" sz="1600" b="1" dirty="0">
-                <a:solidFill>
-                  <a:srgbClr val="8B5CF6"/>
-                </a:solidFill>
-                <a:latin typeface="Plus Jakarta Sans" pitchFamily="34" charset="0"/>
-                <a:ea typeface="Plus Jakarta Sans" pitchFamily="34" charset="-122"/>
-                <a:cs typeface="Plus Jakarta Sans" pitchFamily="34" charset="-120"/>
-              </a:rPr>
-              <a:t>= Gamification Engine</a:t>
-            </a:r>
-            <a:endParaRPr lang="en-US" sz="1600" dirty="0"/>
-          </a:p>
-        </p:txBody>
-      </p:sp>
-      <p:sp>
-        <p:nvSpPr>
-          <p:cNvPr id="20" name="Shape 15"/>
-          <p:cNvSpPr/>
-          <p:nvPr/>
-        </p:nvSpPr>
-        <p:spPr>
-          <a:xfrm>
-            <a:off x="777240" y="5349240"/>
-            <a:ext cx="10607040" cy="868680"/>
-          </a:xfrm>
-          <a:prstGeom prst="roundRect">
-            <a:avLst>
-              <a:gd name="adj" fmla="val 12632"/>
-            </a:avLst>
-          </a:prstGeom>
-          <a:solidFill>
-            <a:srgbClr val="E30613"/>
-          </a:solidFill>
-          <a:ln w="31750">
-            <a:solidFill>
-              <a:srgbClr val="FFFFFF"/>
-            </a:solidFill>
-            <a:prstDash val="solid"/>
-          </a:ln>
-          <a:effectLst>
-            <a:outerShdw sx="100000" sy="100000" kx="0" ky="0" algn="bl" rotWithShape="0" blurRad="101600" dist="63500" dir="8100000">
-              <a:srgbClr val="0f172a">
-                <a:alpha val="100000"/>
-              </a:srgbClr>
-            </a:outerShdw>
-          </a:effectLst>
-        </p:spPr>
-      </p:sp>
-      <p:sp>
-        <p:nvSpPr>
-          <p:cNvPr id="21" name="Text 16"/>
-          <p:cNvSpPr/>
-          <p:nvPr/>
-        </p:nvSpPr>
-        <p:spPr>
-          <a:xfrm>
-            <a:off x="777240" y="5349240"/>
-            <a:ext cx="10607040" cy="868680"/>
-          </a:xfrm>
-          <a:prstGeom prst="rect">
-            <a:avLst/>
-          </a:prstGeom>
-          <a:noFill/>
-          <a:ln/>
-        </p:spPr>
-        <p:txBody>
-          <a:bodyPr wrap="square" lIns="0" tIns="0" rIns="0" bIns="0" rtlCol="0" anchor="ctr"/>
-          <a:lstStyle/>
-          <a:p>
-            <a:pPr algn="ctr" indent="0" marL="0">
-              <a:buNone/>
-            </a:pPr>
-            <a:r>
-              <a:rPr lang="en-US" sz="2200" b="1" dirty="0">
-                <a:solidFill>
-                  <a:srgbClr val="FFFFFF"/>
-                </a:solidFill>
-                <a:latin typeface="Plus Jakarta Sans" pitchFamily="34" charset="0"/>
-                <a:ea typeface="Plus Jakarta Sans" pitchFamily="34" charset="-122"/>
-                <a:cs typeface="Plus Jakarta Sans" pitchFamily="34" charset="-120"/>
-              </a:rPr>
-              <a:t>Open Data nicht nur sichtbar machen — sondern erlebbar.</a:t>
-            </a:r>
-            <a:endParaRPr lang="en-US" sz="2200" dirty="0"/>
-          </a:p>
-        </p:txBody>
-      </p:sp>
     </p:spTree>
   </p:cSld>
   <p:clrMapOvr>
@@ -10280,4 +7407,319 @@
     </a:ext>
   </a:extLst>
 </a:theme>
+</file>
+
+<file path=ppt/theme/theme2.xml><?xml version="1.0" encoding="utf-8"?>
+<a:theme xmlns:a="http://schemas.openxmlformats.org/drawingml/2006/main" name="Office">
+  <a:themeElements>
+    <a:clrScheme name="Office">
+      <a:dk1>
+        <a:sysClr val="windowText" lastClr="000000"/>
+      </a:dk1>
+      <a:lt1>
+        <a:sysClr val="window" lastClr="FFFFFF"/>
+      </a:lt1>
+      <a:dk2>
+        <a:srgbClr val="0E2841"/>
+      </a:dk2>
+      <a:lt2>
+        <a:srgbClr val="E8E8E8"/>
+      </a:lt2>
+      <a:accent1>
+        <a:srgbClr val="156082"/>
+      </a:accent1>
+      <a:accent2>
+        <a:srgbClr val="E97132"/>
+      </a:accent2>
+      <a:accent3>
+        <a:srgbClr val="196B24"/>
+      </a:accent3>
+      <a:accent4>
+        <a:srgbClr val="0F9ED5"/>
+      </a:accent4>
+      <a:accent5>
+        <a:srgbClr val="A02B93"/>
+      </a:accent5>
+      <a:accent6>
+        <a:srgbClr val="4EA72E"/>
+      </a:accent6>
+      <a:hlink>
+        <a:srgbClr val="467886"/>
+      </a:hlink>
+      <a:folHlink>
+        <a:srgbClr val="96607D"/>
+      </a:folHlink>
+    </a:clrScheme>
+    <a:fontScheme name="Office">
+      <a:majorFont>
+        <a:latin typeface="Aptos Display" panose="02110004020202020204"/>
+        <a:ea typeface=""/>
+        <a:cs typeface=""/>
+        <a:font script="Jpan" typeface="游ゴシック Light"/>
+        <a:font script="Hang" typeface="맑은 고딕"/>
+        <a:font script="Hans" typeface="等线 Light"/>
+        <a:font script="Hant" typeface="新細明體"/>
+        <a:font script="Arab" typeface="Times New Roman"/>
+        <a:font script="Hebr" typeface="Times New Roman"/>
+        <a:font script="Thai" typeface="Angsana New"/>
+        <a:font script="Ethi" typeface="Nyala"/>
+        <a:font script="Beng" typeface="Vrinda"/>
+        <a:font script="Gujr" typeface="Shruti"/>
+        <a:font script="Khmr" typeface="MoolBoran"/>
+        <a:font script="Knda" typeface="Tunga"/>
+        <a:font script="Guru" typeface="Raavi"/>
+        <a:font script="Cans" typeface="Euphemia"/>
+        <a:font script="Cher" typeface="Plantagenet Cherokee"/>
+        <a:font script="Yiii" typeface="Microsoft Yi Baiti"/>
+        <a:font script="Tibt" typeface="Microsoft Himalaya"/>
+        <a:font script="Thaa" typeface="MV Boli"/>
+        <a:font script="Deva" typeface="Mangal"/>
+        <a:font script="Telu" typeface="Gautami"/>
+        <a:font script="Taml" typeface="Latha"/>
+        <a:font script="Syrc" typeface="Estrangelo Edessa"/>
+        <a:font script="Orya" typeface="Kalinga"/>
+        <a:font script="Mlym" typeface="Kartika"/>
+        <a:font script="Laoo" typeface="DokChampa"/>
+        <a:font script="Sinh" typeface="Iskoola Pota"/>
+        <a:font script="Mong" typeface="Mongolian Baiti"/>
+        <a:font script="Viet" typeface="Times New Roman"/>
+        <a:font script="Uigh" typeface="Microsoft Uighur"/>
+        <a:font script="Geor" typeface="Sylfaen"/>
+        <a:font script="Armn" typeface="Arial"/>
+        <a:font script="Bugi" typeface="Leelawadee UI"/>
+        <a:font script="Bopo" typeface="Microsoft JhengHei"/>
+        <a:font script="Java" typeface="Javanese Text"/>
+        <a:font script="Lisu" typeface="Segoe UI"/>
+        <a:font script="Mymr" typeface="Myanmar Text"/>
+        <a:font script="Nkoo" typeface="Ebrima"/>
+        <a:font script="Olck" typeface="Nirmala UI"/>
+        <a:font script="Osma" typeface="Ebrima"/>
+        <a:font script="Phag" typeface="Phagspa"/>
+        <a:font script="Syrn" typeface="Estrangelo Edessa"/>
+        <a:font script="Syrj" typeface="Estrangelo Edessa"/>
+        <a:font script="Syre" typeface="Estrangelo Edessa"/>
+        <a:font script="Sora" typeface="Nirmala UI"/>
+        <a:font script="Tale" typeface="Microsoft Tai Le"/>
+        <a:font script="Talu" typeface="Microsoft New Tai Lue"/>
+        <a:font script="Tfng" typeface="Ebrima"/>
+      </a:majorFont>
+      <a:minorFont>
+        <a:latin typeface="Aptos" panose="02110004020202020204"/>
+        <a:ea typeface=""/>
+        <a:cs typeface=""/>
+        <a:font script="Jpan" typeface="游ゴシック"/>
+        <a:font script="Hang" typeface="맑은 고딕"/>
+        <a:font script="Hans" typeface="等线"/>
+        <a:font script="Hant" typeface="新細明體"/>
+        <a:font script="Arab" typeface="Arial"/>
+        <a:font script="Hebr" typeface="Arial"/>
+        <a:font script="Thai" typeface="Cordia New"/>
+        <a:font script="Ethi" typeface="Nyala"/>
+        <a:font script="Beng" typeface="Vrinda"/>
+        <a:font script="Gujr" typeface="Shruti"/>
+        <a:font script="Khmr" typeface="DaunPenh"/>
+        <a:font script="Knda" typeface="Tunga"/>
+        <a:font script="Guru" typeface="Raavi"/>
+        <a:font script="Cans" typeface="Euphemia"/>
+        <a:font script="Cher" typeface="Plantagenet Cherokee"/>
+        <a:font script="Yiii" typeface="Microsoft Yi Baiti"/>
+        <a:font script="Tibt" typeface="Microsoft Himalaya"/>
+        <a:font script="Thaa" typeface="MV Boli"/>
+        <a:font script="Deva" typeface="Mangal"/>
+        <a:font script="Telu" typeface="Gautami"/>
+        <a:font script="Taml" typeface="Latha"/>
+        <a:font script="Syrc" typeface="Estrangelo Edessa"/>
+        <a:font script="Orya" typeface="Kalinga"/>
+        <a:font script="Mlym" typeface="Kartika"/>
+        <a:font script="Laoo" typeface="DokChampa"/>
+        <a:font script="Sinh" typeface="Iskoola Pota"/>
+        <a:font script="Mong" typeface="Mongolian Baiti"/>
+        <a:font script="Viet" typeface="Arial"/>
+        <a:font script="Uigh" typeface="Microsoft Uighur"/>
+        <a:font script="Geor" typeface="Sylfaen"/>
+        <a:font script="Armn" typeface="Arial"/>
+        <a:font script="Bugi" typeface="Leelawadee UI"/>
+        <a:font script="Bopo" typeface="Microsoft JhengHei"/>
+        <a:font script="Java" typeface="Javanese Text"/>
+        <a:font script="Lisu" typeface="Segoe UI"/>
+        <a:font script="Mymr" typeface="Myanmar Text"/>
+        <a:font script="Nkoo" typeface="Ebrima"/>
+        <a:font script="Olck" typeface="Nirmala UI"/>
+        <a:font script="Osma" typeface="Ebrima"/>
+        <a:font script="Phag" typeface="Phagspa"/>
+        <a:font script="Syrn" typeface="Estrangelo Edessa"/>
+        <a:font script="Syrj" typeface="Estrangelo Edessa"/>
+        <a:font script="Syre" typeface="Estrangelo Edessa"/>
+        <a:font script="Sora" typeface="Nirmala UI"/>
+        <a:font script="Tale" typeface="Microsoft Tai Le"/>
+        <a:font script="Talu" typeface="Microsoft New Tai Lue"/>
+        <a:font script="Tfng" typeface="Ebrima"/>
+      </a:minorFont>
+    </a:fontScheme>
+    <a:fmtScheme name="Office">
+      <a:fillStyleLst>
+        <a:solidFill>
+          <a:schemeClr val="phClr"/>
+        </a:solidFill>
+        <a:gradFill rotWithShape="1">
+          <a:gsLst>
+            <a:gs pos="0">
+              <a:schemeClr val="phClr">
+                <a:lumMod val="110000"/>
+                <a:satMod val="105000"/>
+                <a:tint val="67000"/>
+              </a:schemeClr>
+            </a:gs>
+            <a:gs pos="50000">
+              <a:schemeClr val="phClr">
+                <a:lumMod val="105000"/>
+                <a:satMod val="103000"/>
+                <a:tint val="73000"/>
+              </a:schemeClr>
+            </a:gs>
+            <a:gs pos="100000">
+              <a:schemeClr val="phClr">
+                <a:lumMod val="105000"/>
+                <a:satMod val="109000"/>
+                <a:tint val="81000"/>
+              </a:schemeClr>
+            </a:gs>
+          </a:gsLst>
+          <a:lin ang="5400000" scaled="0"/>
+        </a:gradFill>
+        <a:gradFill rotWithShape="1">
+          <a:gsLst>
+            <a:gs pos="0">
+              <a:schemeClr val="phClr">
+                <a:satMod val="103000"/>
+                <a:lumMod val="102000"/>
+                <a:tint val="94000"/>
+              </a:schemeClr>
+            </a:gs>
+            <a:gs pos="50000">
+              <a:schemeClr val="phClr">
+                <a:satMod val="110000"/>
+                <a:lumMod val="100000"/>
+                <a:shade val="100000"/>
+              </a:schemeClr>
+            </a:gs>
+            <a:gs pos="100000">
+              <a:schemeClr val="phClr">
+                <a:lumMod val="99000"/>
+                <a:satMod val="120000"/>
+                <a:shade val="78000"/>
+              </a:schemeClr>
+            </a:gs>
+          </a:gsLst>
+          <a:lin ang="5400000" scaled="0"/>
+        </a:gradFill>
+      </a:fillStyleLst>
+      <a:lnStyleLst>
+        <a:ln w="12700" cap="flat" cmpd="sng" algn="ctr">
+          <a:solidFill>
+            <a:schemeClr val="phClr"/>
+          </a:solidFill>
+          <a:prstDash val="solid"/>
+          <a:miter lim="800000"/>
+        </a:ln>
+        <a:ln w="19050" cap="flat" cmpd="sng" algn="ctr">
+          <a:solidFill>
+            <a:schemeClr val="phClr"/>
+          </a:solidFill>
+          <a:prstDash val="solid"/>
+          <a:miter lim="800000"/>
+        </a:ln>
+        <a:ln w="25400" cap="flat" cmpd="sng" algn="ctr">
+          <a:solidFill>
+            <a:schemeClr val="phClr"/>
+          </a:solidFill>
+          <a:prstDash val="solid"/>
+          <a:miter lim="800000"/>
+        </a:ln>
+      </a:lnStyleLst>
+      <a:effectStyleLst>
+        <a:effectStyle>
+          <a:effectLst/>
+        </a:effectStyle>
+        <a:effectStyle>
+          <a:effectLst/>
+        </a:effectStyle>
+        <a:effectStyle>
+          <a:effectLst>
+            <a:outerShdw blurRad="57150" dist="19050" dir="5400000" algn="ctr" rotWithShape="0">
+              <a:srgbClr val="000000">
+                <a:alpha val="63000"/>
+              </a:srgbClr>
+            </a:outerShdw>
+          </a:effectLst>
+        </a:effectStyle>
+      </a:effectStyleLst>
+      <a:bgFillStyleLst>
+        <a:solidFill>
+          <a:schemeClr val="phClr"/>
+        </a:solidFill>
+        <a:solidFill>
+          <a:schemeClr val="phClr">
+            <a:tint val="95000"/>
+            <a:satMod val="170000"/>
+          </a:schemeClr>
+        </a:solidFill>
+        <a:gradFill rotWithShape="1">
+          <a:gsLst>
+            <a:gs pos="0">
+              <a:schemeClr val="phClr">
+                <a:tint val="93000"/>
+                <a:satMod val="150000"/>
+                <a:shade val="98000"/>
+                <a:lumMod val="102000"/>
+              </a:schemeClr>
+            </a:gs>
+            <a:gs pos="50000">
+              <a:schemeClr val="phClr">
+                <a:tint val="98000"/>
+                <a:satMod val="130000"/>
+                <a:shade val="90000"/>
+                <a:lumMod val="103000"/>
+              </a:schemeClr>
+            </a:gs>
+            <a:gs pos="100000">
+              <a:schemeClr val="phClr">
+                <a:shade val="63000"/>
+                <a:satMod val="120000"/>
+              </a:schemeClr>
+            </a:gs>
+          </a:gsLst>
+          <a:lin ang="5400000" scaled="0"/>
+        </a:gradFill>
+      </a:bgFillStyleLst>
+    </a:fmtScheme>
+  </a:themeElements>
+  <a:objectDefaults>
+    <a:lnDef>
+      <a:spPr/>
+      <a:bodyPr/>
+      <a:lstStyle/>
+      <a:style>
+        <a:lnRef idx="2">
+          <a:schemeClr val="accent1"/>
+        </a:lnRef>
+        <a:fillRef idx="0">
+          <a:schemeClr val="accent1"/>
+        </a:fillRef>
+        <a:effectRef idx="1">
+          <a:schemeClr val="accent1"/>
+        </a:effectRef>
+        <a:fontRef idx="minor">
+          <a:schemeClr val="tx1"/>
+        </a:fontRef>
+      </a:style>
+    </a:lnDef>
+  </a:objectDefaults>
+  <a:extraClrSchemeLst/>
+  <a:extLst>
+    <a:ext uri="{05A4C25C-085E-4340-85A3-A5531E510DB2}">
+      <thm15:themeFamily xmlns:thm15="http://schemas.microsoft.com/office/thememl/2012/main" name="Office Theme" id="{2E142A2C-CD16-42D6-873A-C26D2A0506FA}" vid="{1BDDFF52-6CD6-40A5-AB3C-68EB2F1E4D0A}"/>
+    </a:ext>
+  </a:extLst>
+</a:theme>
 </file>
--- a/Democracy_Race_Pitch.pptx
+++ b/Democracy_Race_Pitch.pptx
@@ -3132,8 +3132,8 @@
         </p:nvSpPr>
         <p:spPr>
           <a:xfrm>
-            <a:off x="822961" y="4572000"/>
-            <a:ext cx="10424160" cy="1417320"/>
+            <a:off x="822960" y="4572000"/>
+            <a:ext cx="10917935" cy="1417320"/>
           </a:xfrm>
           <a:prstGeom prst="rect">
             <a:avLst/>
@@ -3795,24 +3795,34 @@
               <a:buChar char="•"/>
             </a:pPr>
             <a:r>
-              <a:rPr lang="en-US" sz="2000" dirty="0">
+              <a:rPr lang="en-US" sz="2000" dirty="0" err="1">
                 <a:solidFill>
                   <a:srgbClr val="0F172A"/>
                 </a:solidFill>
                 <a:latin typeface="Plus Jakarta Sans"/>
                 <a:ea typeface="Plus Jakarta Sans"/>
               </a:rPr>
-              <a:t>Wenig zugänglich für das </a:t>
-            </a:r>
-            <a:r>
-              <a:rPr lang="en-US" sz="2000" dirty="0" err="1">
+              <a:t>Schwierig</a:t>
+            </a:r>
+            <a:r>
+              <a:rPr lang="en-US" sz="2000" dirty="0">
                 <a:solidFill>
                   <a:srgbClr val="0F172A"/>
                 </a:solidFill>
                 <a:latin typeface="Plus Jakarta Sans"/>
                 <a:ea typeface="Plus Jakarta Sans"/>
               </a:rPr>
-              <a:t>Publikum</a:t>
+              <a:t> </a:t>
+            </a:r>
+            <a:r>
+              <a:rPr lang="en-US" sz="2000" dirty="0" err="1">
+                <a:solidFill>
+                  <a:srgbClr val="0F172A"/>
+                </a:solidFill>
+                <a:latin typeface="Plus Jakarta Sans"/>
+                <a:ea typeface="Plus Jakarta Sans"/>
+              </a:rPr>
+              <a:t>zugänglich</a:t>
             </a:r>
             <a:endParaRPr lang="en-US" sz="2000" dirty="0">
               <a:solidFill>
@@ -3954,7 +3964,15 @@
                 <a:ea typeface="Plus Jakarta Sans" pitchFamily="34" charset="-122"/>
                 <a:cs typeface="Plus Jakarta Sans" pitchFamily="34" charset="-120"/>
               </a:rPr>
-              <a:t>Die Lösung</a:t>
+              <a:t>Unser </a:t>
+            </a:r>
+            <a:r>
+              <a:rPr lang="en-US" sz="2100" b="1" dirty="0" err="1">
+                <a:latin typeface="Plus Jakarta Sans" pitchFamily="34" charset="0"/>
+                <a:ea typeface="Plus Jakarta Sans" pitchFamily="34" charset="-122"/>
+                <a:cs typeface="Plus Jakarta Sans" pitchFamily="34" charset="-120"/>
+              </a:rPr>
+              <a:t>Lösungsansatz</a:t>
             </a:r>
             <a:endParaRPr lang="en-US" sz="2100" dirty="0"/>
           </a:p>
@@ -4117,59 +4135,31 @@
                 <a:latin typeface="Plus Jakarta Sans"/>
                 <a:ea typeface="Plus Jakarta Sans" pitchFamily="34" charset="-122"/>
               </a:rPr>
-              <a:t>Sport-Storytelling für Motivation</a:t>
-            </a:r>
-          </a:p>
-        </p:txBody>
-      </p:sp>
-      <p:pic>
-        <p:nvPicPr>
-          <p:cNvPr id="20" name="Image 3" descr="preencoded.png"/>
-          <p:cNvPicPr>
-            <a:picLocks noChangeAspect="1"/>
-          </p:cNvPicPr>
-          <p:nvPr/>
-        </p:nvPicPr>
-        <p:blipFill>
-          <a:blip r:embed="rId3"/>
-          <a:stretch>
-            <a:fillRect/>
-          </a:stretch>
-        </p:blipFill>
-        <p:spPr>
-          <a:xfrm>
-            <a:off x="4037076" y="3682636"/>
-            <a:ext cx="448056" cy="448056"/>
-          </a:xfrm>
-          <a:prstGeom prst="rect">
-            <a:avLst/>
-          </a:prstGeom>
-        </p:spPr>
-      </p:pic>
-      <p:pic>
-        <p:nvPicPr>
-          <p:cNvPr id="21" name="Image 4" descr="preencoded.png"/>
-          <p:cNvPicPr>
-            <a:picLocks noChangeAspect="1"/>
-          </p:cNvPicPr>
-          <p:nvPr/>
-        </p:nvPicPr>
-        <p:blipFill>
-          <a:blip r:embed="rId3"/>
-          <a:stretch>
-            <a:fillRect/>
-          </a:stretch>
-        </p:blipFill>
-        <p:spPr>
-          <a:xfrm>
-            <a:off x="7806580" y="3682636"/>
-            <a:ext cx="436736" cy="436736"/>
-          </a:xfrm>
-          <a:prstGeom prst="rect">
-            <a:avLst/>
-          </a:prstGeom>
-        </p:spPr>
-      </p:pic>
+              <a:t>Sport-Storytelling </a:t>
+            </a:r>
+            <a:r>
+              <a:rPr lang="en-US" sz="2000" dirty="0" err="1">
+                <a:solidFill>
+                  <a:srgbClr val="0F172A"/>
+                </a:solidFill>
+                <a:latin typeface="Plus Jakarta Sans"/>
+                <a:ea typeface="Plus Jakarta Sans" pitchFamily="34" charset="-122"/>
+              </a:rPr>
+              <a:t>als</a:t>
+            </a:r>
+            <a:r>
+              <a:rPr lang="en-US" sz="2000" dirty="0">
+                <a:solidFill>
+                  <a:srgbClr val="0F172A"/>
+                </a:solidFill>
+                <a:latin typeface="Plus Jakarta Sans"/>
+                <a:ea typeface="Plus Jakarta Sans" pitchFamily="34" charset="-122"/>
+              </a:rPr>
+              <a:t> Motivator</a:t>
+            </a:r>
+          </a:p>
+        </p:txBody>
+      </p:sp>
     </p:spTree>
   </p:cSld>
   <p:clrMapOvr>
@@ -4308,6 +4298,17 @@
               <a:buNone/>
             </a:pPr>
             <a:r>
+              <a:rPr lang="en-US" sz="3600" b="1" dirty="0" err="1">
+                <a:solidFill>
+                  <a:srgbClr val="0F172A"/>
+                </a:solidFill>
+                <a:latin typeface="Plus Jakarta Sans" pitchFamily="34" charset="0"/>
+                <a:ea typeface="Plus Jakarta Sans" pitchFamily="34" charset="-122"/>
+                <a:cs typeface="Plus Jakarta Sans" pitchFamily="34" charset="-120"/>
+              </a:rPr>
+              <a:t>Demokratie</a:t>
+            </a:r>
+            <a:r>
               <a:rPr lang="en-US" sz="3600" b="1" dirty="0">
                 <a:solidFill>
                   <a:srgbClr val="0F172A"/>
@@ -4316,7 +4317,7 @@
                 <a:ea typeface="Plus Jakarta Sans" pitchFamily="34" charset="-122"/>
                 <a:cs typeface="Plus Jakarta Sans" pitchFamily="34" charset="-120"/>
               </a:rPr>
-              <a:t>Democracy-Ranking der Kantone</a:t>
+              <a:t>-Ranking der Kantone</a:t>
             </a:r>
             <a:endParaRPr lang="en-US" sz="3600" dirty="0"/>
           </a:p>
@@ -4506,6 +4507,17 @@
               <a:buNone/>
             </a:pPr>
             <a:r>
+              <a:rPr lang="en-US" sz="3600" b="1" dirty="0" err="1">
+                <a:solidFill>
+                  <a:srgbClr val="0F172A"/>
+                </a:solidFill>
+                <a:latin typeface="Plus Jakarta Sans" pitchFamily="34" charset="0"/>
+                <a:ea typeface="Plus Jakarta Sans" pitchFamily="34" charset="-122"/>
+                <a:cs typeface="Plus Jakarta Sans" pitchFamily="34" charset="-120"/>
+              </a:rPr>
+              <a:t>Demokratie</a:t>
+            </a:r>
+            <a:r>
               <a:rPr lang="en-US" sz="3600" b="1" dirty="0">
                 <a:solidFill>
                   <a:srgbClr val="0F172A"/>
@@ -4514,7 +4526,7 @@
                 <a:ea typeface="Plus Jakarta Sans" pitchFamily="34" charset="-122"/>
                 <a:cs typeface="Plus Jakarta Sans" pitchFamily="34" charset="-120"/>
               </a:rPr>
-              <a:t>Democracy-Ranking der Kantone</a:t>
+              <a:t>-Ranking der Kantone</a:t>
             </a:r>
             <a:endParaRPr lang="en-US" sz="3600" dirty="0"/>
           </a:p>
@@ -6124,7 +6136,51 @@
                 <a:ea typeface="Plus Jakarta Sans" pitchFamily="34" charset="-122"/>
                 <a:cs typeface="Plus Jakarta Sans" pitchFamily="34" charset="-120"/>
               </a:rPr>
-              <a:t>Bei der Freimaurer-Initiative 1937 war die Beteiligung landesweit extrem hoch — Basel-Stadt erreichte fast 100 Prozent.</a:t>
+              <a:t>Bei der Freimaurer-Initiative 1937 war die Beteiligung landesweit </a:t>
+            </a:r>
+            <a:r>
+              <a:rPr lang="en-US" sz="1600" dirty="0" err="1">
+                <a:solidFill>
+                  <a:srgbClr val="0F172A"/>
+                </a:solidFill>
+                <a:latin typeface="Plus Jakarta Sans" pitchFamily="34" charset="0"/>
+                <a:ea typeface="Plus Jakarta Sans" pitchFamily="34" charset="-122"/>
+                <a:cs typeface="Plus Jakarta Sans" pitchFamily="34" charset="-120"/>
+              </a:rPr>
+              <a:t>extrem</a:t>
+            </a:r>
+            <a:r>
+              <a:rPr lang="en-US" sz="1600" dirty="0">
+                <a:solidFill>
+                  <a:srgbClr val="0F172A"/>
+                </a:solidFill>
+                <a:latin typeface="Plus Jakarta Sans" pitchFamily="34" charset="0"/>
+                <a:ea typeface="Plus Jakarta Sans" pitchFamily="34" charset="-122"/>
+                <a:cs typeface="Plus Jakarta Sans" pitchFamily="34" charset="-120"/>
+              </a:rPr>
+              <a:t> </a:t>
+            </a:r>
+            <a:r>
+              <a:rPr lang="en-US" sz="1600" dirty="0" err="1">
+                <a:solidFill>
+                  <a:srgbClr val="0F172A"/>
+                </a:solidFill>
+                <a:latin typeface="Plus Jakarta Sans" pitchFamily="34" charset="0"/>
+                <a:ea typeface="Plus Jakarta Sans" pitchFamily="34" charset="-122"/>
+                <a:cs typeface="Plus Jakarta Sans" pitchFamily="34" charset="-120"/>
+              </a:rPr>
+              <a:t>hoch</a:t>
+            </a:r>
+            <a:r>
+              <a:rPr lang="en-US" sz="1600" dirty="0">
+                <a:solidFill>
+                  <a:srgbClr val="0F172A"/>
+                </a:solidFill>
+                <a:latin typeface="Plus Jakarta Sans" pitchFamily="34" charset="0"/>
+                <a:ea typeface="Plus Jakarta Sans" pitchFamily="34" charset="-122"/>
+                <a:cs typeface="Plus Jakarta Sans" pitchFamily="34" charset="-120"/>
+              </a:rPr>
+              <a:t>; Basel-Stadt erreichte fast 100 Prozent.</a:t>
             </a:r>
             <a:endParaRPr lang="en-US" sz="1600" dirty="0"/>
           </a:p>

--- a/Democracy_Race_Pitch.pptx
+++ b/Democracy_Race_Pitch.pptx
@@ -3681,7 +3681,7 @@
           <a:bodyPr/>
           <a:lstStyle/>
           <a:p>
-            <a:endParaRPr lang="de-CH"/>
+            <a:endParaRPr lang="de-CH" dirty="0"/>
           </a:p>
         </p:txBody>
       </p:sp>
@@ -3744,6 +3744,66 @@
         <p:txBody>
           <a:bodyPr wrap="square" lIns="0" tIns="0" rIns="0" bIns="0" rtlCol="0" anchor="t"/>
           <a:lstStyle/>
+          <a:p>
+            <a:pPr marL="177800" indent="-177800">
+              <a:lnSpc>
+                <a:spcPct val="105000"/>
+              </a:lnSpc>
+              <a:spcAft>
+                <a:spcPts val="1000"/>
+              </a:spcAft>
+              <a:buSzPct val="100000"/>
+              <a:buFontTx/>
+              <a:buChar char="•"/>
+            </a:pPr>
+            <a:r>
+              <a:rPr lang="en-US" sz="2000" dirty="0" err="1">
+                <a:solidFill>
+                  <a:srgbClr val="0F172A"/>
+                </a:solidFill>
+                <a:latin typeface="Plus Jakarta Sans"/>
+                <a:ea typeface="Plus Jakarta Sans"/>
+              </a:rPr>
+              <a:t>Tiefe</a:t>
+            </a:r>
+            <a:r>
+              <a:rPr lang="en-US" sz="2000" dirty="0">
+                <a:solidFill>
+                  <a:srgbClr val="0F172A"/>
+                </a:solidFill>
+                <a:latin typeface="Plus Jakarta Sans"/>
+                <a:ea typeface="Plus Jakarta Sans"/>
+              </a:rPr>
+              <a:t> und </a:t>
+            </a:r>
+            <a:r>
+              <a:rPr lang="en-US" sz="2000" dirty="0" err="1">
+                <a:solidFill>
+                  <a:srgbClr val="0F172A"/>
+                </a:solidFill>
+                <a:latin typeface="Plus Jakarta Sans"/>
+                <a:ea typeface="Plus Jakarta Sans"/>
+              </a:rPr>
+              <a:t>sinkende</a:t>
+            </a:r>
+            <a:r>
+              <a:rPr lang="en-US" sz="2000">
+                <a:solidFill>
+                  <a:srgbClr val="0F172A"/>
+                </a:solidFill>
+                <a:latin typeface="Plus Jakarta Sans"/>
+                <a:ea typeface="Plus Jakarta Sans"/>
+              </a:rPr>
+              <a:t> Stimmbeteiligung</a:t>
+            </a:r>
+            <a:endParaRPr lang="en-US" sz="2000" dirty="0">
+              <a:solidFill>
+                <a:srgbClr val="0F172A"/>
+              </a:solidFill>
+              <a:latin typeface="Plus Jakarta Sans"/>
+              <a:ea typeface="Plus Jakarta Sans"/>
+            </a:endParaRPr>
+          </a:p>
           <a:p>
             <a:pPr marL="177800" indent="-177800">
               <a:lnSpc>
@@ -3756,14 +3816,24 @@
               <a:buChar char="•"/>
             </a:pPr>
             <a:r>
-              <a:rPr lang="en-US" sz="2000" dirty="0">
+              <a:rPr lang="en-US" sz="2000" dirty="0" err="1">
                 <a:solidFill>
                   <a:srgbClr val="0F172A"/>
                 </a:solidFill>
                 <a:latin typeface="Plus Jakarta Sans"/>
                 <a:ea typeface="Plus Jakarta Sans"/>
               </a:rPr>
-              <a:t>Daten sind komplex und </a:t>
+              <a:t>Daten</a:t>
+            </a:r>
+            <a:r>
+              <a:rPr lang="en-US" sz="2000" dirty="0">
+                <a:solidFill>
+                  <a:srgbClr val="0F172A"/>
+                </a:solidFill>
+                <a:latin typeface="Plus Jakarta Sans"/>
+                <a:ea typeface="Plus Jakarta Sans"/>
+              </a:rPr>
+              <a:t> sind komplex und </a:t>
             </a:r>
             <a:r>
               <a:rPr lang="en-US" sz="2000" dirty="0" err="1">
@@ -3823,65 +3893,6 @@
                 <a:ea typeface="Plus Jakarta Sans"/>
               </a:rPr>
               <a:t>zugänglich</a:t>
-            </a:r>
-            <a:endParaRPr lang="en-US" sz="2000" dirty="0">
-              <a:solidFill>
-                <a:srgbClr val="0F172A"/>
-              </a:solidFill>
-              <a:latin typeface="Plus Jakarta Sans"/>
-              <a:ea typeface="Plus Jakarta Sans"/>
-            </a:endParaRPr>
-          </a:p>
-          <a:p>
-            <a:pPr marL="177800" indent="-177800">
-              <a:lnSpc>
-                <a:spcPct val="105000"/>
-              </a:lnSpc>
-              <a:spcAft>
-                <a:spcPts val="1000"/>
-              </a:spcAft>
-              <a:buSzPct val="100000"/>
-              <a:buChar char="•"/>
-            </a:pPr>
-            <a:r>
-              <a:rPr lang="en-US" sz="2000" dirty="0">
-                <a:solidFill>
-                  <a:srgbClr val="0F172A"/>
-                </a:solidFill>
-                <a:latin typeface="Plus Jakarta Sans"/>
-                <a:ea typeface="Plus Jakarta Sans"/>
-              </a:rPr>
-              <a:t>Kaum Bezug </a:t>
-            </a:r>
-            <a:r>
-              <a:rPr lang="en-US" sz="2000" dirty="0" err="1">
-                <a:solidFill>
-                  <a:srgbClr val="0F172A"/>
-                </a:solidFill>
-                <a:latin typeface="Plus Jakarta Sans"/>
-                <a:ea typeface="Plus Jakarta Sans"/>
-              </a:rPr>
-              <a:t>zum</a:t>
-            </a:r>
-            <a:r>
-              <a:rPr lang="en-US" sz="2000" dirty="0">
-                <a:solidFill>
-                  <a:srgbClr val="0F172A"/>
-                </a:solidFill>
-                <a:latin typeface="Plus Jakarta Sans"/>
-                <a:ea typeface="Plus Jakarta Sans"/>
-              </a:rPr>
-              <a:t> </a:t>
-            </a:r>
-            <a:r>
-              <a:rPr lang="en-US" sz="2000" dirty="0" err="1">
-                <a:solidFill>
-                  <a:srgbClr val="0F172A"/>
-                </a:solidFill>
-                <a:latin typeface="Plus Jakarta Sans"/>
-                <a:ea typeface="Plus Jakarta Sans"/>
-              </a:rPr>
-              <a:t>Alltag</a:t>
             </a:r>
             <a:endParaRPr lang="en-US" sz="2000" dirty="0">
               <a:solidFill>
